--- a/Lesson 05 - Understanding Cyber Threats/05_Cyber_Threats.pptx
+++ b/Lesson 05 - Understanding Cyber Threats/05_Cyber_Threats.pptx
@@ -5,7 +5,7 @@
     <p:sldMasterId id="2147483648" r:id="rId1"/>
   </p:sldMasterIdLst>
   <p:handoutMasterIdLst>
-    <p:handoutMasterId r:id="rId42"/>
+    <p:handoutMasterId r:id="rId35"/>
   </p:handoutMasterIdLst>
   <p:sldIdLst>
     <p:sldId id="256" r:id="rId2"/>
@@ -13,51 +13,44 @@
     <p:sldId id="259" r:id="rId4"/>
     <p:sldId id="274" r:id="rId5"/>
     <p:sldId id="261" r:id="rId6"/>
-    <p:sldId id="262" r:id="rId7"/>
-    <p:sldId id="275" r:id="rId8"/>
-    <p:sldId id="268" r:id="rId9"/>
-    <p:sldId id="276" r:id="rId10"/>
-    <p:sldId id="277" r:id="rId11"/>
-    <p:sldId id="278" r:id="rId12"/>
-    <p:sldId id="282" r:id="rId13"/>
-    <p:sldId id="279" r:id="rId14"/>
-    <p:sldId id="280" r:id="rId15"/>
-    <p:sldId id="303" r:id="rId16"/>
-    <p:sldId id="281" r:id="rId17"/>
-    <p:sldId id="283" r:id="rId18"/>
-    <p:sldId id="304" r:id="rId19"/>
-    <p:sldId id="284" r:id="rId20"/>
-    <p:sldId id="285" r:id="rId21"/>
-    <p:sldId id="286" r:id="rId22"/>
-    <p:sldId id="287" r:id="rId23"/>
-    <p:sldId id="288" r:id="rId24"/>
-    <p:sldId id="289" r:id="rId25"/>
-    <p:sldId id="290" r:id="rId26"/>
-    <p:sldId id="291" r:id="rId27"/>
-    <p:sldId id="292" r:id="rId28"/>
-    <p:sldId id="305" r:id="rId29"/>
-    <p:sldId id="293" r:id="rId30"/>
-    <p:sldId id="294" r:id="rId31"/>
-    <p:sldId id="295" r:id="rId32"/>
-    <p:sldId id="296" r:id="rId33"/>
-    <p:sldId id="297" r:id="rId34"/>
-    <p:sldId id="298" r:id="rId35"/>
-    <p:sldId id="299" r:id="rId36"/>
-    <p:sldId id="301" r:id="rId37"/>
-    <p:sldId id="300" r:id="rId38"/>
-    <p:sldId id="302" r:id="rId39"/>
-    <p:sldId id="267" r:id="rId40"/>
-    <p:sldId id="272" r:id="rId41"/>
+    <p:sldId id="275" r:id="rId7"/>
+    <p:sldId id="268" r:id="rId8"/>
+    <p:sldId id="276" r:id="rId9"/>
+    <p:sldId id="277" r:id="rId10"/>
+    <p:sldId id="278" r:id="rId11"/>
+    <p:sldId id="282" r:id="rId12"/>
+    <p:sldId id="279" r:id="rId13"/>
+    <p:sldId id="280" r:id="rId14"/>
+    <p:sldId id="281" r:id="rId15"/>
+    <p:sldId id="283" r:id="rId16"/>
+    <p:sldId id="304" r:id="rId17"/>
+    <p:sldId id="284" r:id="rId18"/>
+    <p:sldId id="285" r:id="rId19"/>
+    <p:sldId id="286" r:id="rId20"/>
+    <p:sldId id="287" r:id="rId21"/>
+    <p:sldId id="291" r:id="rId22"/>
+    <p:sldId id="292" r:id="rId23"/>
+    <p:sldId id="305" r:id="rId24"/>
+    <p:sldId id="293" r:id="rId25"/>
+    <p:sldId id="294" r:id="rId26"/>
+    <p:sldId id="295" r:id="rId27"/>
+    <p:sldId id="296" r:id="rId28"/>
+    <p:sldId id="297" r:id="rId29"/>
+    <p:sldId id="301" r:id="rId30"/>
+    <p:sldId id="300" r:id="rId31"/>
+    <p:sldId id="302" r:id="rId32"/>
+    <p:sldId id="267" r:id="rId33"/>
+    <p:sldId id="272" r:id="rId34"/>
   </p:sldIdLst>
   <p:sldSz cx="12192000" cy="6858000"/>
   <p:notesSz cx="6858000" cy="9144000"/>
   <p:embeddedFontLst>
     <p:embeddedFont>
-      <p:font typeface="OpenDyslexicAlta" panose="00000500000000000000" pitchFamily="50" charset="0"/>
-      <p:regular r:id="rId43"/>
-      <p:bold r:id="rId44"/>
-      <p:italic r:id="rId45"/>
-      <p:boldItalic r:id="rId46"/>
+      <p:font typeface="OpenDyslexicAlta" panose="020B0604020202020204" charset="0"/>
+      <p:regular r:id="rId36"/>
+      <p:bold r:id="rId37"/>
+      <p:italic r:id="rId38"/>
+      <p:boldItalic r:id="rId39"/>
     </p:embeddedFont>
   </p:embeddedFontLst>
   <p:defaultTextStyle>
@@ -271,7 +264,7 @@
           <a:p>
             <a:fld id="{28791796-119E-4260-B149-940ECFE008A4}" type="datetimeFigureOut">
               <a:rPr lang="en-GB" smtClean="0"/>
-              <a:t>19/06/2025</a:t>
+              <a:t>06/09/2026</a:t>
             </a:fld>
             <a:endParaRPr lang="en-GB"/>
           </a:p>
@@ -4844,7 +4837,7 @@
         <p:cNvPr id="1" name="">
           <a:extLst>
             <a:ext uri="{FF2B5EF4-FFF2-40B4-BE49-F238E27FC236}">
-              <a16:creationId xmlns:a16="http://schemas.microsoft.com/office/drawing/2014/main" id="{A89F7598-BA49-B8CD-5418-3A01EEE89FC5}"/>
+              <a16:creationId xmlns:a16="http://schemas.microsoft.com/office/drawing/2014/main" id="{C1E1BA44-0D62-387C-AE00-7F1ECA5384DF}"/>
             </a:ext>
           </a:extLst>
         </p:cNvPr>
@@ -4864,7 +4857,7 @@
           <p:cNvPr id="2" name="Title 1">
             <a:extLst>
               <a:ext uri="{FF2B5EF4-FFF2-40B4-BE49-F238E27FC236}">
-                <a16:creationId xmlns:a16="http://schemas.microsoft.com/office/drawing/2014/main" id="{3FBD3C5C-A0A2-5D40-E936-FCF188996CDA}"/>
+                <a16:creationId xmlns:a16="http://schemas.microsoft.com/office/drawing/2014/main" id="{DA35F8E6-469C-4E9F-2918-10DD606C49B4}"/>
               </a:ext>
             </a:extLst>
           </p:cNvPr>
@@ -4892,7 +4885,7 @@
           <p:cNvPr id="3" name="Content Placeholder 2">
             <a:extLst>
               <a:ext uri="{FF2B5EF4-FFF2-40B4-BE49-F238E27FC236}">
-                <a16:creationId xmlns:a16="http://schemas.microsoft.com/office/drawing/2014/main" id="{65FEB216-EF07-CF32-126F-99CBCB549EAD}"/>
+                <a16:creationId xmlns:a16="http://schemas.microsoft.com/office/drawing/2014/main" id="{A9D907EC-BA5B-FD76-308F-37E4F149B428}"/>
               </a:ext>
             </a:extLst>
           </p:cNvPr>
@@ -4915,8 +4908,12 @@
               <a:t>The </a:t>
             </a:r>
             <a:r>
-              <a:rPr lang="en-GB" b="1" noProof="0" dirty="0"/>
-              <a:t>deep web </a:t>
+              <a:rPr lang="en-GB" b="1" noProof="0" dirty="0">
+                <a:solidFill>
+                  <a:srgbClr val="C00000"/>
+                </a:solidFill>
+              </a:rPr>
+              <a:t>dark web </a:t>
             </a:r>
             <a:r>
               <a:rPr lang="en-GB" noProof="0" dirty="0"/>
@@ -4928,43 +4925,37 @@
             </a:r>
             <a:r>
               <a:rPr lang="en-GB" noProof="0" dirty="0"/>
-              <a:t>made up of pages that are not indexed by search engines.</a:t>
-            </a:r>
-          </a:p>
-          <a:p>
-            <a:pPr marL="893763" indent="-441325">
-              <a:buFont typeface="Arial" panose="020B0604020202020204" pitchFamily="34" charset="0"/>
-              <a:buChar char="•"/>
-            </a:pPr>
+              <a:t>a hidden part of the internet.</a:t>
+            </a:r>
+          </a:p>
+          <a:p>
             <a:r>
               <a:rPr lang="en-GB" noProof="0" dirty="0"/>
-              <a:t>The school’s homework portal</a:t>
-            </a:r>
-          </a:p>
-          <a:p>
-            <a:pPr marL="893763" indent="-441325">
-              <a:buFont typeface="Arial" panose="020B0604020202020204" pitchFamily="34" charset="0"/>
-              <a:buChar char="•"/>
-            </a:pPr>
+              <a:t>You need a special browser (such as Tor) to get there.</a:t>
+            </a:r>
+          </a:p>
+          <a:p>
             <a:r>
               <a:rPr lang="en-GB" noProof="0" dirty="0"/>
-              <a:t>Emails systems </a:t>
-            </a:r>
-          </a:p>
-          <a:p>
-            <a:pPr marL="893763" indent="-441325">
-              <a:buFont typeface="Arial" panose="020B0604020202020204" pitchFamily="34" charset="0"/>
-              <a:buChar char="•"/>
-            </a:pPr>
+              <a:t>Not everything on the dark web is illegal, but it is where a lot of </a:t>
+            </a:r>
+            <a:r>
+              <a:rPr lang="en-GB" b="1" noProof="0" dirty="0">
+                <a:solidFill>
+                  <a:srgbClr val="C00000"/>
+                </a:solidFill>
+              </a:rPr>
+              <a:t>cybercrime</a:t>
+            </a:r>
             <a:r>
               <a:rPr lang="en-GB" noProof="0" dirty="0"/>
-              <a:t>Online banking</a:t>
+              <a:t> happens, including selling stolen data and illegal goods.</a:t>
             </a:r>
           </a:p>
           <a:p>
             <a:r>
               <a:rPr lang="en-GB" noProof="0" dirty="0"/>
-              <a:t>You need a password or special link to access these, but they are legal and used for privacy.</a:t>
+              <a:t>It’s hidden for privacy, which means it attracts criminals.</a:t>
             </a:r>
           </a:p>
         </p:txBody>
@@ -4972,7 +4963,7 @@
     </p:spTree>
     <p:extLst>
       <p:ext uri="{BB962C8B-B14F-4D97-AF65-F5344CB8AC3E}">
-        <p14:creationId xmlns:p14="http://schemas.microsoft.com/office/powerpoint/2010/main" val="3619890700"/>
+        <p14:creationId xmlns:p14="http://schemas.microsoft.com/office/powerpoint/2010/main" val="1868423256"/>
       </p:ext>
     </p:extLst>
   </p:cSld>
@@ -5134,55 +5125,6 @@
                       </p:childTnLst>
                     </p:cTn>
                   </p:par>
-                  <p:par>
-                    <p:cTn id="15" fill="hold">
-                      <p:stCondLst>
-                        <p:cond delay="indefinite"/>
-                      </p:stCondLst>
-                      <p:childTnLst>
-                        <p:par>
-                          <p:cTn id="16" fill="hold">
-                            <p:stCondLst>
-                              <p:cond delay="0"/>
-                            </p:stCondLst>
-                            <p:childTnLst>
-                              <p:par>
-                                <p:cTn id="17" presetID="1" presetClass="entr" presetSubtype="0" fill="hold" grpId="0" nodeType="clickEffect">
-                                  <p:stCondLst>
-                                    <p:cond delay="0"/>
-                                  </p:stCondLst>
-                                  <p:childTnLst>
-                                    <p:set>
-                                      <p:cBhvr>
-                                        <p:cTn id="18" dur="1" fill="hold">
-                                          <p:stCondLst>
-                                            <p:cond delay="0"/>
-                                          </p:stCondLst>
-                                        </p:cTn>
-                                        <p:tgtEl>
-                                          <p:spTgt spid="3">
-                                            <p:txEl>
-                                              <p:pRg st="4" end="4"/>
-                                            </p:txEl>
-                                          </p:spTgt>
-                                        </p:tgtEl>
-                                        <p:attrNameLst>
-                                          <p:attrName>style.visibility</p:attrName>
-                                        </p:attrNameLst>
-                                      </p:cBhvr>
-                                      <p:to>
-                                        <p:strVal val="visible"/>
-                                      </p:to>
-                                    </p:set>
-                                  </p:childTnLst>
-                                </p:cTn>
-                              </p:par>
-                            </p:childTnLst>
-                          </p:cTn>
-                        </p:par>
-                      </p:childTnLst>
-                    </p:cTn>
-                  </p:par>
                 </p:childTnLst>
               </p:cTn>
               <p:prevCondLst>
@@ -5216,13 +5158,7 @@
   <p:cSld>
     <p:spTree>
       <p:nvGrpSpPr>
-        <p:cNvPr id="1" name="">
-          <a:extLst>
-            <a:ext uri="{FF2B5EF4-FFF2-40B4-BE49-F238E27FC236}">
-              <a16:creationId xmlns:a16="http://schemas.microsoft.com/office/drawing/2014/main" id="{C1E1BA44-0D62-387C-AE00-7F1ECA5384DF}"/>
-            </a:ext>
-          </a:extLst>
-        </p:cNvPr>
+        <p:cNvPr id="1" name=""/>
         <p:cNvGrpSpPr/>
         <p:nvPr/>
       </p:nvGrpSpPr>
@@ -5236,10 +5172,90 @@
       </p:grpSpPr>
       <p:sp>
         <p:nvSpPr>
+          <p:cNvPr id="3" name="Content Placeholder 2">
+            <a:extLst>
+              <a:ext uri="{FF2B5EF4-FFF2-40B4-BE49-F238E27FC236}">
+                <a16:creationId xmlns:a16="http://schemas.microsoft.com/office/drawing/2014/main" id="{5AD493B3-6F1E-FB68-689E-D182F9D79CB0}"/>
+              </a:ext>
+            </a:extLst>
+          </p:cNvPr>
+          <p:cNvSpPr>
+            <a:spLocks noGrp="1"/>
+          </p:cNvSpPr>
+          <p:nvPr>
+            <p:ph idx="1"/>
+          </p:nvPr>
+        </p:nvSpPr>
+        <p:spPr/>
+        <p:txBody>
+          <a:bodyPr>
+            <a:normAutofit fontScale="77500" lnSpcReduction="20000"/>
+          </a:bodyPr>
+          <a:lstStyle/>
+          <a:p>
+            <a:pPr>
+              <a:spcAft>
+                <a:spcPts val="600"/>
+              </a:spcAft>
+            </a:pPr>
+            <a:r>
+              <a:rPr lang="en-GB" noProof="0" dirty="0"/>
+              <a:t>Why do you think some people want to hide their online activities?</a:t>
+            </a:r>
+          </a:p>
+          <a:p>
+            <a:pPr>
+              <a:spcAft>
+                <a:spcPts val="600"/>
+              </a:spcAft>
+            </a:pPr>
+            <a:r>
+              <a:rPr lang="en-GB" b="1" noProof="0" dirty="0">
+                <a:solidFill>
+                  <a:srgbClr val="C00000"/>
+                </a:solidFill>
+              </a:rPr>
+              <a:t>Some people want to hide their online activities because they care about their privacy and don’t want others to see what they’re doing, especially if it’s personal or sensitive. They may be doing research that they do not want to make public yet.</a:t>
+            </a:r>
+          </a:p>
+          <a:p>
+            <a:pPr>
+              <a:spcAft>
+                <a:spcPts val="600"/>
+              </a:spcAft>
+            </a:pPr>
+            <a:r>
+              <a:rPr lang="en-GB" b="1" noProof="0" dirty="0">
+                <a:solidFill>
+                  <a:srgbClr val="C00000"/>
+                </a:solidFill>
+              </a:rPr>
+              <a:t>Others might want to avoid being tracked by companies or governments. </a:t>
+            </a:r>
+          </a:p>
+          <a:p>
+            <a:pPr>
+              <a:spcAft>
+                <a:spcPts val="600"/>
+              </a:spcAft>
+            </a:pPr>
+            <a:r>
+              <a:rPr lang="en-GB" b="1" noProof="0" dirty="0">
+                <a:solidFill>
+                  <a:srgbClr val="C00000"/>
+                </a:solidFill>
+              </a:rPr>
+              <a:t>Unfortunately, some people also hide their activities because they are doing something illegal or breaking the rules online. So, people use hidden parts of the internet for both good and bad reasons.</a:t>
+            </a:r>
+          </a:p>
+        </p:txBody>
+      </p:sp>
+      <p:sp>
+        <p:nvSpPr>
           <p:cNvPr id="2" name="Title 1">
             <a:extLst>
               <a:ext uri="{FF2B5EF4-FFF2-40B4-BE49-F238E27FC236}">
-                <a16:creationId xmlns:a16="http://schemas.microsoft.com/office/drawing/2014/main" id="{DA35F8E6-469C-4E9F-2918-10DD606C49B4}"/>
+                <a16:creationId xmlns:a16="http://schemas.microsoft.com/office/drawing/2014/main" id="{18F07293-A803-FBE8-F6E9-E7A93F26D5CE}"/>
               </a:ext>
             </a:extLst>
           </p:cNvPr>
@@ -5262,90 +5278,10 @@
           </a:p>
         </p:txBody>
       </p:sp>
-      <p:sp>
-        <p:nvSpPr>
-          <p:cNvPr id="3" name="Content Placeholder 2">
-            <a:extLst>
-              <a:ext uri="{FF2B5EF4-FFF2-40B4-BE49-F238E27FC236}">
-                <a16:creationId xmlns:a16="http://schemas.microsoft.com/office/drawing/2014/main" id="{A9D907EC-BA5B-FD76-308F-37E4F149B428}"/>
-              </a:ext>
-            </a:extLst>
-          </p:cNvPr>
-          <p:cNvSpPr>
-            <a:spLocks noGrp="1"/>
-          </p:cNvSpPr>
-          <p:nvPr>
-            <p:ph idx="1"/>
-          </p:nvPr>
-        </p:nvSpPr>
-        <p:spPr/>
-        <p:txBody>
-          <a:bodyPr>
-            <a:normAutofit fontScale="92500"/>
-          </a:bodyPr>
-          <a:lstStyle/>
-          <a:p>
-            <a:r>
-              <a:rPr lang="en-GB" noProof="0" dirty="0"/>
-              <a:t>The </a:t>
-            </a:r>
-            <a:r>
-              <a:rPr lang="en-GB" b="1" noProof="0" dirty="0">
-                <a:solidFill>
-                  <a:srgbClr val="C00000"/>
-                </a:solidFill>
-              </a:rPr>
-              <a:t>dark web </a:t>
-            </a:r>
-            <a:r>
-              <a:rPr lang="en-GB" noProof="0" dirty="0"/>
-              <a:t>is</a:t>
-            </a:r>
-            <a:r>
-              <a:rPr lang="en-GB" b="1" noProof="0" dirty="0"/>
-              <a:t> </a:t>
-            </a:r>
-            <a:r>
-              <a:rPr lang="en-GB" noProof="0" dirty="0"/>
-              <a:t>a hidden part of the internet.</a:t>
-            </a:r>
-          </a:p>
-          <a:p>
-            <a:r>
-              <a:rPr lang="en-GB" noProof="0" dirty="0"/>
-              <a:t>You need a special browser (such as Tor) to get there.</a:t>
-            </a:r>
-          </a:p>
-          <a:p>
-            <a:r>
-              <a:rPr lang="en-GB" noProof="0" dirty="0"/>
-              <a:t>Not everything on the dark web is illegal, but it is where a lot of </a:t>
-            </a:r>
-            <a:r>
-              <a:rPr lang="en-GB" b="1" noProof="0" dirty="0">
-                <a:solidFill>
-                  <a:srgbClr val="C00000"/>
-                </a:solidFill>
-              </a:rPr>
-              <a:t>cybercrime</a:t>
-            </a:r>
-            <a:r>
-              <a:rPr lang="en-GB" noProof="0" dirty="0"/>
-              <a:t> happens, including selling stolen data and illegal goods.</a:t>
-            </a:r>
-          </a:p>
-          <a:p>
-            <a:r>
-              <a:rPr lang="en-GB" noProof="0" dirty="0"/>
-              <a:t>It’s hidden for privacy, which means it attracts criminals.</a:t>
-            </a:r>
-          </a:p>
-        </p:txBody>
-      </p:sp>
     </p:spTree>
     <p:extLst>
       <p:ext uri="{BB962C8B-B14F-4D97-AF65-F5344CB8AC3E}">
-        <p14:creationId xmlns:p14="http://schemas.microsoft.com/office/powerpoint/2010/main" val="1868423256"/>
+        <p14:creationId xmlns:p14="http://schemas.microsoft.com/office/powerpoint/2010/main" val="3025601370"/>
       </p:ext>
     </p:extLst>
   </p:cSld>
@@ -5554,324 +5490,6 @@
       </p:grpSpPr>
       <p:sp>
         <p:nvSpPr>
-          <p:cNvPr id="3" name="Content Placeholder 2">
-            <a:extLst>
-              <a:ext uri="{FF2B5EF4-FFF2-40B4-BE49-F238E27FC236}">
-                <a16:creationId xmlns:a16="http://schemas.microsoft.com/office/drawing/2014/main" id="{5AD493B3-6F1E-FB68-689E-D182F9D79CB0}"/>
-              </a:ext>
-            </a:extLst>
-          </p:cNvPr>
-          <p:cNvSpPr>
-            <a:spLocks noGrp="1"/>
-          </p:cNvSpPr>
-          <p:nvPr>
-            <p:ph idx="1"/>
-          </p:nvPr>
-        </p:nvSpPr>
-        <p:spPr/>
-        <p:txBody>
-          <a:bodyPr>
-            <a:normAutofit fontScale="77500" lnSpcReduction="20000"/>
-          </a:bodyPr>
-          <a:lstStyle/>
-          <a:p>
-            <a:pPr>
-              <a:spcAft>
-                <a:spcPts val="600"/>
-              </a:spcAft>
-            </a:pPr>
-            <a:r>
-              <a:rPr lang="en-GB" noProof="0" dirty="0"/>
-              <a:t>Why do you think some people want to hide their online activities?</a:t>
-            </a:r>
-          </a:p>
-          <a:p>
-            <a:pPr>
-              <a:spcAft>
-                <a:spcPts val="600"/>
-              </a:spcAft>
-            </a:pPr>
-            <a:r>
-              <a:rPr lang="en-GB" b="1" noProof="0" dirty="0">
-                <a:solidFill>
-                  <a:srgbClr val="C00000"/>
-                </a:solidFill>
-              </a:rPr>
-              <a:t>Some people want to hide their online activities because they care about their privacy and don’t want others to see what they’re doing, especially if it’s personal or sensitive. They may be doing research that they do not want to make public yet.</a:t>
-            </a:r>
-          </a:p>
-          <a:p>
-            <a:pPr>
-              <a:spcAft>
-                <a:spcPts val="600"/>
-              </a:spcAft>
-            </a:pPr>
-            <a:r>
-              <a:rPr lang="en-GB" b="1" noProof="0" dirty="0">
-                <a:solidFill>
-                  <a:srgbClr val="C00000"/>
-                </a:solidFill>
-              </a:rPr>
-              <a:t>Others might want to avoid being tracked by companies or governments. </a:t>
-            </a:r>
-          </a:p>
-          <a:p>
-            <a:pPr>
-              <a:spcAft>
-                <a:spcPts val="600"/>
-              </a:spcAft>
-            </a:pPr>
-            <a:r>
-              <a:rPr lang="en-GB" b="1" noProof="0" dirty="0">
-                <a:solidFill>
-                  <a:srgbClr val="C00000"/>
-                </a:solidFill>
-              </a:rPr>
-              <a:t>Unfortunately, some people also hide their activities because they are doing something illegal or breaking the rules online. So, people use hidden parts of the internet for both good and bad reasons.</a:t>
-            </a:r>
-          </a:p>
-        </p:txBody>
-      </p:sp>
-      <p:sp>
-        <p:nvSpPr>
-          <p:cNvPr id="2" name="Title 1">
-            <a:extLst>
-              <a:ext uri="{FF2B5EF4-FFF2-40B4-BE49-F238E27FC236}">
-                <a16:creationId xmlns:a16="http://schemas.microsoft.com/office/drawing/2014/main" id="{18F07293-A803-FBE8-F6E9-E7A93F26D5CE}"/>
-              </a:ext>
-            </a:extLst>
-          </p:cNvPr>
-          <p:cNvSpPr>
-            <a:spLocks noGrp="1"/>
-          </p:cNvSpPr>
-          <p:nvPr>
-            <p:ph type="title"/>
-          </p:nvPr>
-        </p:nvSpPr>
-        <p:spPr/>
-        <p:txBody>
-          <a:bodyPr/>
-          <a:lstStyle/>
-          <a:p>
-            <a:r>
-              <a:rPr lang="en-GB" noProof="0" dirty="0"/>
-              <a:t>The dark web</a:t>
-            </a:r>
-          </a:p>
-        </p:txBody>
-      </p:sp>
-    </p:spTree>
-    <p:extLst>
-      <p:ext uri="{BB962C8B-B14F-4D97-AF65-F5344CB8AC3E}">
-        <p14:creationId xmlns:p14="http://schemas.microsoft.com/office/powerpoint/2010/main" val="3025601370"/>
-      </p:ext>
-    </p:extLst>
-  </p:cSld>
-  <p:clrMapOvr>
-    <a:masterClrMapping/>
-  </p:clrMapOvr>
-  <p:timing>
-    <p:tnLst>
-      <p:par>
-        <p:cTn id="1" dur="indefinite" restart="never" nodeType="tmRoot">
-          <p:childTnLst>
-            <p:seq concurrent="1" nextAc="seek">
-              <p:cTn id="2" dur="indefinite" nodeType="mainSeq">
-                <p:childTnLst>
-                  <p:par>
-                    <p:cTn id="3" fill="hold">
-                      <p:stCondLst>
-                        <p:cond delay="indefinite"/>
-                      </p:stCondLst>
-                      <p:childTnLst>
-                        <p:par>
-                          <p:cTn id="4" fill="hold">
-                            <p:stCondLst>
-                              <p:cond delay="0"/>
-                            </p:stCondLst>
-                            <p:childTnLst>
-                              <p:par>
-                                <p:cTn id="5" presetID="1" presetClass="entr" presetSubtype="0" fill="hold" grpId="0" nodeType="clickEffect">
-                                  <p:stCondLst>
-                                    <p:cond delay="0"/>
-                                  </p:stCondLst>
-                                  <p:childTnLst>
-                                    <p:set>
-                                      <p:cBhvr>
-                                        <p:cTn id="6" dur="1" fill="hold">
-                                          <p:stCondLst>
-                                            <p:cond delay="0"/>
-                                          </p:stCondLst>
-                                        </p:cTn>
-                                        <p:tgtEl>
-                                          <p:spTgt spid="3">
-                                            <p:txEl>
-                                              <p:pRg st="1" end="1"/>
-                                            </p:txEl>
-                                          </p:spTgt>
-                                        </p:tgtEl>
-                                        <p:attrNameLst>
-                                          <p:attrName>style.visibility</p:attrName>
-                                        </p:attrNameLst>
-                                      </p:cBhvr>
-                                      <p:to>
-                                        <p:strVal val="visible"/>
-                                      </p:to>
-                                    </p:set>
-                                  </p:childTnLst>
-                                </p:cTn>
-                              </p:par>
-                            </p:childTnLst>
-                          </p:cTn>
-                        </p:par>
-                      </p:childTnLst>
-                    </p:cTn>
-                  </p:par>
-                  <p:par>
-                    <p:cTn id="7" fill="hold">
-                      <p:stCondLst>
-                        <p:cond delay="indefinite"/>
-                      </p:stCondLst>
-                      <p:childTnLst>
-                        <p:par>
-                          <p:cTn id="8" fill="hold">
-                            <p:stCondLst>
-                              <p:cond delay="0"/>
-                            </p:stCondLst>
-                            <p:childTnLst>
-                              <p:par>
-                                <p:cTn id="9" presetID="1" presetClass="entr" presetSubtype="0" fill="hold" grpId="0" nodeType="clickEffect">
-                                  <p:stCondLst>
-                                    <p:cond delay="0"/>
-                                  </p:stCondLst>
-                                  <p:childTnLst>
-                                    <p:set>
-                                      <p:cBhvr>
-                                        <p:cTn id="10" dur="1" fill="hold">
-                                          <p:stCondLst>
-                                            <p:cond delay="0"/>
-                                          </p:stCondLst>
-                                        </p:cTn>
-                                        <p:tgtEl>
-                                          <p:spTgt spid="3">
-                                            <p:txEl>
-                                              <p:pRg st="2" end="2"/>
-                                            </p:txEl>
-                                          </p:spTgt>
-                                        </p:tgtEl>
-                                        <p:attrNameLst>
-                                          <p:attrName>style.visibility</p:attrName>
-                                        </p:attrNameLst>
-                                      </p:cBhvr>
-                                      <p:to>
-                                        <p:strVal val="visible"/>
-                                      </p:to>
-                                    </p:set>
-                                  </p:childTnLst>
-                                </p:cTn>
-                              </p:par>
-                            </p:childTnLst>
-                          </p:cTn>
-                        </p:par>
-                      </p:childTnLst>
-                    </p:cTn>
-                  </p:par>
-                  <p:par>
-                    <p:cTn id="11" fill="hold">
-                      <p:stCondLst>
-                        <p:cond delay="indefinite"/>
-                      </p:stCondLst>
-                      <p:childTnLst>
-                        <p:par>
-                          <p:cTn id="12" fill="hold">
-                            <p:stCondLst>
-                              <p:cond delay="0"/>
-                            </p:stCondLst>
-                            <p:childTnLst>
-                              <p:par>
-                                <p:cTn id="13" presetID="1" presetClass="entr" presetSubtype="0" fill="hold" grpId="0" nodeType="clickEffect">
-                                  <p:stCondLst>
-                                    <p:cond delay="0"/>
-                                  </p:stCondLst>
-                                  <p:childTnLst>
-                                    <p:set>
-                                      <p:cBhvr>
-                                        <p:cTn id="14" dur="1" fill="hold">
-                                          <p:stCondLst>
-                                            <p:cond delay="0"/>
-                                          </p:stCondLst>
-                                        </p:cTn>
-                                        <p:tgtEl>
-                                          <p:spTgt spid="3">
-                                            <p:txEl>
-                                              <p:pRg st="3" end="3"/>
-                                            </p:txEl>
-                                          </p:spTgt>
-                                        </p:tgtEl>
-                                        <p:attrNameLst>
-                                          <p:attrName>style.visibility</p:attrName>
-                                        </p:attrNameLst>
-                                      </p:cBhvr>
-                                      <p:to>
-                                        <p:strVal val="visible"/>
-                                      </p:to>
-                                    </p:set>
-                                  </p:childTnLst>
-                                </p:cTn>
-                              </p:par>
-                            </p:childTnLst>
-                          </p:cTn>
-                        </p:par>
-                      </p:childTnLst>
-                    </p:cTn>
-                  </p:par>
-                </p:childTnLst>
-              </p:cTn>
-              <p:prevCondLst>
-                <p:cond evt="onPrev" delay="0">
-                  <p:tgtEl>
-                    <p:sldTgt/>
-                  </p:tgtEl>
-                </p:cond>
-              </p:prevCondLst>
-              <p:nextCondLst>
-                <p:cond evt="onNext" delay="0">
-                  <p:tgtEl>
-                    <p:sldTgt/>
-                  </p:tgtEl>
-                </p:cond>
-              </p:nextCondLst>
-            </p:seq>
-          </p:childTnLst>
-        </p:cTn>
-      </p:par>
-    </p:tnLst>
-    <p:bldLst>
-      <p:bldP spid="3" grpId="0" uiExpand="1" build="p"/>
-    </p:bldLst>
-  </p:timing>
-</p:sld>
-</file>
-
-<file path=ppt/slides/slide13.xml><?xml version="1.0" encoding="utf-8"?>
-<p:sld xmlns:a="http://schemas.openxmlformats.org/drawingml/2006/main" xmlns:r="http://schemas.openxmlformats.org/officeDocument/2006/relationships" xmlns:p="http://schemas.openxmlformats.org/presentationml/2006/main">
-  <p:cSld>
-    <p:spTree>
-      <p:nvGrpSpPr>
-        <p:cNvPr id="1" name=""/>
-        <p:cNvGrpSpPr/>
-        <p:nvPr/>
-      </p:nvGrpSpPr>
-      <p:grpSpPr>
-        <a:xfrm>
-          <a:off x="0" y="0"/>
-          <a:ext cx="0" cy="0"/>
-          <a:chOff x="0" y="0"/>
-          <a:chExt cx="0" cy="0"/>
-        </a:xfrm>
-      </p:grpSpPr>
-      <p:sp>
-        <p:nvSpPr>
           <p:cNvPr id="2" name="Title 1">
             <a:extLst>
               <a:ext uri="{FF2B5EF4-FFF2-40B4-BE49-F238E27FC236}">
@@ -6084,7 +5702,7 @@
 </p:sld>
 </file>
 
-<file path=ppt/slides/slide14.xml><?xml version="1.0" encoding="utf-8"?>
+<file path=ppt/slides/slide13.xml><?xml version="1.0" encoding="utf-8"?>
 <p:sld xmlns:a="http://schemas.openxmlformats.org/drawingml/2006/main" xmlns:r="http://schemas.openxmlformats.org/officeDocument/2006/relationships" xmlns:p="http://schemas.openxmlformats.org/presentationml/2006/main">
   <p:cSld>
     <p:spTree>
@@ -6370,306 +5988,7 @@
 </p:sld>
 </file>
 
-<file path=ppt/slides/slide15.xml><?xml version="1.0" encoding="utf-8"?>
-<p:sld xmlns:a="http://schemas.openxmlformats.org/drawingml/2006/main" xmlns:r="http://schemas.openxmlformats.org/officeDocument/2006/relationships" xmlns:p="http://schemas.openxmlformats.org/presentationml/2006/main">
-  <p:cSld>
-    <p:spTree>
-      <p:nvGrpSpPr>
-        <p:cNvPr id="1" name=""/>
-        <p:cNvGrpSpPr/>
-        <p:nvPr/>
-      </p:nvGrpSpPr>
-      <p:grpSpPr>
-        <a:xfrm>
-          <a:off x="0" y="0"/>
-          <a:ext cx="0" cy="0"/>
-          <a:chOff x="0" y="0"/>
-          <a:chExt cx="0" cy="0"/>
-        </a:xfrm>
-      </p:grpSpPr>
-      <p:sp>
-        <p:nvSpPr>
-          <p:cNvPr id="3" name="Content Placeholder 2">
-            <a:extLst>
-              <a:ext uri="{FF2B5EF4-FFF2-40B4-BE49-F238E27FC236}">
-                <a16:creationId xmlns:a16="http://schemas.microsoft.com/office/drawing/2014/main" id="{46E3D485-C962-8F3F-7D6F-FA5375948CCC}"/>
-              </a:ext>
-            </a:extLst>
-          </p:cNvPr>
-          <p:cNvSpPr>
-            <a:spLocks noGrp="1"/>
-          </p:cNvSpPr>
-          <p:nvPr>
-            <p:ph idx="1"/>
-          </p:nvPr>
-        </p:nvSpPr>
-        <p:spPr/>
-        <p:txBody>
-          <a:bodyPr/>
-          <a:lstStyle/>
-          <a:p>
-            <a:r>
-              <a:rPr lang="en-GB" noProof="0" dirty="0"/>
-              <a:t>What are the names of the three levels of the internet?</a:t>
-            </a:r>
-          </a:p>
-          <a:p>
-            <a:pPr marL="719138"/>
-            <a:r>
-              <a:rPr lang="en-GB" b="1" noProof="0" dirty="0">
-                <a:solidFill>
-                  <a:srgbClr val="C00000"/>
-                </a:solidFill>
-              </a:rPr>
-              <a:t>Surface web</a:t>
-            </a:r>
-          </a:p>
-          <a:p>
-            <a:pPr marL="719138"/>
-            <a:r>
-              <a:rPr lang="en-GB" b="1" noProof="0" dirty="0">
-                <a:solidFill>
-                  <a:srgbClr val="C00000"/>
-                </a:solidFill>
-              </a:rPr>
-              <a:t>Deep web</a:t>
-            </a:r>
-          </a:p>
-          <a:p>
-            <a:pPr marL="719138"/>
-            <a:r>
-              <a:rPr lang="en-GB" b="1" noProof="0" dirty="0">
-                <a:solidFill>
-                  <a:srgbClr val="C00000"/>
-                </a:solidFill>
-              </a:rPr>
-              <a:t>Dark web</a:t>
-            </a:r>
-          </a:p>
-        </p:txBody>
-      </p:sp>
-      <p:sp>
-        <p:nvSpPr>
-          <p:cNvPr id="2" name="Title 1">
-            <a:extLst>
-              <a:ext uri="{FF2B5EF4-FFF2-40B4-BE49-F238E27FC236}">
-                <a16:creationId xmlns:a16="http://schemas.microsoft.com/office/drawing/2014/main" id="{258E61F8-7A4E-01A3-7D5D-A5A3F589D555}"/>
-              </a:ext>
-            </a:extLst>
-          </p:cNvPr>
-          <p:cNvSpPr>
-            <a:spLocks noGrp="1"/>
-          </p:cNvSpPr>
-          <p:nvPr>
-            <p:ph type="title"/>
-          </p:nvPr>
-        </p:nvSpPr>
-        <p:spPr/>
-        <p:txBody>
-          <a:bodyPr/>
-          <a:lstStyle/>
-          <a:p>
-            <a:r>
-              <a:rPr lang="en-GB" noProof="0" dirty="0"/>
-              <a:t>The dark web</a:t>
-            </a:r>
-          </a:p>
-        </p:txBody>
-      </p:sp>
-    </p:spTree>
-    <p:extLst>
-      <p:ext uri="{BB962C8B-B14F-4D97-AF65-F5344CB8AC3E}">
-        <p14:creationId xmlns:p14="http://schemas.microsoft.com/office/powerpoint/2010/main" val="904874655"/>
-      </p:ext>
-    </p:extLst>
-  </p:cSld>
-  <p:clrMapOvr>
-    <a:masterClrMapping/>
-  </p:clrMapOvr>
-  <p:timing>
-    <p:tnLst>
-      <p:par>
-        <p:cTn id="1" dur="indefinite" restart="never" nodeType="tmRoot">
-          <p:childTnLst>
-            <p:seq concurrent="1" nextAc="seek">
-              <p:cTn id="2" dur="indefinite" nodeType="mainSeq">
-                <p:childTnLst>
-                  <p:par>
-                    <p:cTn id="3" fill="hold">
-                      <p:stCondLst>
-                        <p:cond delay="indefinite"/>
-                      </p:stCondLst>
-                      <p:childTnLst>
-                        <p:par>
-                          <p:cTn id="4" fill="hold">
-                            <p:stCondLst>
-                              <p:cond delay="0"/>
-                            </p:stCondLst>
-                            <p:childTnLst>
-                              <p:par>
-                                <p:cTn id="5" presetID="1" presetClass="entr" presetSubtype="0" fill="hold" grpId="0" nodeType="clickEffect">
-                                  <p:stCondLst>
-                                    <p:cond delay="0"/>
-                                  </p:stCondLst>
-                                  <p:childTnLst>
-                                    <p:set>
-                                      <p:cBhvr>
-                                        <p:cTn id="6" dur="1" fill="hold">
-                                          <p:stCondLst>
-                                            <p:cond delay="0"/>
-                                          </p:stCondLst>
-                                        </p:cTn>
-                                        <p:tgtEl>
-                                          <p:spTgt spid="3">
-                                            <p:txEl>
-                                              <p:pRg st="1" end="1"/>
-                                            </p:txEl>
-                                          </p:spTgt>
-                                        </p:tgtEl>
-                                        <p:attrNameLst>
-                                          <p:attrName>style.visibility</p:attrName>
-                                        </p:attrNameLst>
-                                      </p:cBhvr>
-                                      <p:to>
-                                        <p:strVal val="visible"/>
-                                      </p:to>
-                                    </p:set>
-                                  </p:childTnLst>
-                                </p:cTn>
-                              </p:par>
-                            </p:childTnLst>
-                          </p:cTn>
-                        </p:par>
-                      </p:childTnLst>
-                    </p:cTn>
-                  </p:par>
-                  <p:par>
-                    <p:cTn id="7" fill="hold">
-                      <p:stCondLst>
-                        <p:cond delay="indefinite"/>
-                      </p:stCondLst>
-                      <p:childTnLst>
-                        <p:par>
-                          <p:cTn id="8" fill="hold">
-                            <p:stCondLst>
-                              <p:cond delay="0"/>
-                            </p:stCondLst>
-                            <p:childTnLst>
-                              <p:par>
-                                <p:cTn id="9" presetID="1" presetClass="entr" presetSubtype="0" fill="hold" grpId="0" nodeType="clickEffect">
-                                  <p:stCondLst>
-                                    <p:cond delay="0"/>
-                                  </p:stCondLst>
-                                  <p:childTnLst>
-                                    <p:set>
-                                      <p:cBhvr>
-                                        <p:cTn id="10" dur="1" fill="hold">
-                                          <p:stCondLst>
-                                            <p:cond delay="0"/>
-                                          </p:stCondLst>
-                                        </p:cTn>
-                                        <p:tgtEl>
-                                          <p:spTgt spid="3">
-                                            <p:txEl>
-                                              <p:pRg st="2" end="2"/>
-                                            </p:txEl>
-                                          </p:spTgt>
-                                        </p:tgtEl>
-                                        <p:attrNameLst>
-                                          <p:attrName>style.visibility</p:attrName>
-                                        </p:attrNameLst>
-                                      </p:cBhvr>
-                                      <p:to>
-                                        <p:strVal val="visible"/>
-                                      </p:to>
-                                    </p:set>
-                                  </p:childTnLst>
-                                </p:cTn>
-                              </p:par>
-                            </p:childTnLst>
-                          </p:cTn>
-                        </p:par>
-                      </p:childTnLst>
-                    </p:cTn>
-                  </p:par>
-                  <p:par>
-                    <p:cTn id="11" fill="hold">
-                      <p:stCondLst>
-                        <p:cond delay="indefinite"/>
-                      </p:stCondLst>
-                      <p:childTnLst>
-                        <p:par>
-                          <p:cTn id="12" fill="hold">
-                            <p:stCondLst>
-                              <p:cond delay="0"/>
-                            </p:stCondLst>
-                            <p:childTnLst>
-                              <p:par>
-                                <p:cTn id="13" presetID="1" presetClass="entr" presetSubtype="0" fill="hold" grpId="0" nodeType="clickEffect">
-                                  <p:stCondLst>
-                                    <p:cond delay="0"/>
-                                  </p:stCondLst>
-                                  <p:childTnLst>
-                                    <p:set>
-                                      <p:cBhvr>
-                                        <p:cTn id="14" dur="1" fill="hold">
-                                          <p:stCondLst>
-                                            <p:cond delay="0"/>
-                                          </p:stCondLst>
-                                        </p:cTn>
-                                        <p:tgtEl>
-                                          <p:spTgt spid="3">
-                                            <p:txEl>
-                                              <p:pRg st="3" end="3"/>
-                                            </p:txEl>
-                                          </p:spTgt>
-                                        </p:tgtEl>
-                                        <p:attrNameLst>
-                                          <p:attrName>style.visibility</p:attrName>
-                                        </p:attrNameLst>
-                                      </p:cBhvr>
-                                      <p:to>
-                                        <p:strVal val="visible"/>
-                                      </p:to>
-                                    </p:set>
-                                  </p:childTnLst>
-                                </p:cTn>
-                              </p:par>
-                            </p:childTnLst>
-                          </p:cTn>
-                        </p:par>
-                      </p:childTnLst>
-                    </p:cTn>
-                  </p:par>
-                </p:childTnLst>
-              </p:cTn>
-              <p:prevCondLst>
-                <p:cond evt="onPrev" delay="0">
-                  <p:tgtEl>
-                    <p:sldTgt/>
-                  </p:tgtEl>
-                </p:cond>
-              </p:prevCondLst>
-              <p:nextCondLst>
-                <p:cond evt="onNext" delay="0">
-                  <p:tgtEl>
-                    <p:sldTgt/>
-                  </p:tgtEl>
-                </p:cond>
-              </p:nextCondLst>
-            </p:seq>
-          </p:childTnLst>
-        </p:cTn>
-      </p:par>
-    </p:tnLst>
-    <p:bldLst>
-      <p:bldP spid="3" grpId="0" uiExpand="1" build="p"/>
-    </p:bldLst>
-  </p:timing>
-</p:sld>
-</file>
-
-<file path=ppt/slides/slide16.xml><?xml version="1.0" encoding="utf-8"?>
+<file path=ppt/slides/slide14.xml><?xml version="1.0" encoding="utf-8"?>
 <p:sld xmlns:a="http://schemas.openxmlformats.org/drawingml/2006/main" xmlns:r="http://schemas.openxmlformats.org/officeDocument/2006/relationships" xmlns:p="http://schemas.openxmlformats.org/presentationml/2006/main">
   <p:cSld>
     <p:spTree>
@@ -6755,7 +6074,7 @@
 </p:sld>
 </file>
 
-<file path=ppt/slides/slide17.xml><?xml version="1.0" encoding="utf-8"?>
+<file path=ppt/slides/slide15.xml><?xml version="1.0" encoding="utf-8"?>
 <p:sld xmlns:a="http://schemas.openxmlformats.org/drawingml/2006/main" xmlns:r="http://schemas.openxmlformats.org/officeDocument/2006/relationships" xmlns:p="http://schemas.openxmlformats.org/presentationml/2006/main">
   <p:cSld>
     <p:spTree>
@@ -7016,7 +6335,7 @@
 </p:sld>
 </file>
 
-<file path=ppt/slides/slide18.xml><?xml version="1.0" encoding="utf-8"?>
+<file path=ppt/slides/slide16.xml><?xml version="1.0" encoding="utf-8"?>
 <p:sld xmlns:a="http://schemas.openxmlformats.org/drawingml/2006/main" xmlns:r="http://schemas.openxmlformats.org/officeDocument/2006/relationships" xmlns:p="http://schemas.openxmlformats.org/presentationml/2006/main">
   <p:cSld>
     <p:spTree>
@@ -7283,7 +6602,7 @@
 </p:sld>
 </file>
 
-<file path=ppt/slides/slide19.xml><?xml version="1.0" encoding="utf-8"?>
+<file path=ppt/slides/slide17.xml><?xml version="1.0" encoding="utf-8"?>
 <p:sld xmlns:a="http://schemas.openxmlformats.org/drawingml/2006/main" xmlns:r="http://schemas.openxmlformats.org/officeDocument/2006/relationships" xmlns:p="http://schemas.openxmlformats.org/presentationml/2006/main">
   <p:cSld>
     <p:spTree>
@@ -7569,101 +6888,7 @@
 </p:sld>
 </file>
 
-<file path=ppt/slides/slide2.xml><?xml version="1.0" encoding="utf-8"?>
-<p:sld xmlns:a="http://schemas.openxmlformats.org/drawingml/2006/main" xmlns:r="http://schemas.openxmlformats.org/officeDocument/2006/relationships" xmlns:p="http://schemas.openxmlformats.org/presentationml/2006/main">
-  <p:cSld>
-    <p:spTree>
-      <p:nvGrpSpPr>
-        <p:cNvPr id="1" name=""/>
-        <p:cNvGrpSpPr/>
-        <p:nvPr/>
-      </p:nvGrpSpPr>
-      <p:grpSpPr>
-        <a:xfrm>
-          <a:off x="0" y="0"/>
-          <a:ext cx="0" cy="0"/>
-          <a:chOff x="0" y="0"/>
-          <a:chExt cx="0" cy="0"/>
-        </a:xfrm>
-      </p:grpSpPr>
-      <p:sp>
-        <p:nvSpPr>
-          <p:cNvPr id="2" name="Title 1">
-            <a:extLst>
-              <a:ext uri="{FF2B5EF4-FFF2-40B4-BE49-F238E27FC236}">
-                <a16:creationId xmlns:a16="http://schemas.microsoft.com/office/drawing/2014/main" id="{3F302ABF-1189-622D-C67C-DBF8F48DC098}"/>
-              </a:ext>
-            </a:extLst>
-          </p:cNvPr>
-          <p:cNvSpPr>
-            <a:spLocks noGrp="1"/>
-          </p:cNvSpPr>
-          <p:nvPr>
-            <p:ph type="title"/>
-          </p:nvPr>
-        </p:nvSpPr>
-        <p:spPr/>
-        <p:txBody>
-          <a:bodyPr/>
-          <a:lstStyle/>
-          <a:p>
-            <a:r>
-              <a:rPr lang="en-GB" noProof="0" dirty="0"/>
-              <a:t>Objective</a:t>
-            </a:r>
-          </a:p>
-        </p:txBody>
-      </p:sp>
-      <p:sp>
-        <p:nvSpPr>
-          <p:cNvPr id="3" name="Content Placeholder 2">
-            <a:extLst>
-              <a:ext uri="{FF2B5EF4-FFF2-40B4-BE49-F238E27FC236}">
-                <a16:creationId xmlns:a16="http://schemas.microsoft.com/office/drawing/2014/main" id="{F40FE6D7-DD69-1D13-4F3D-238FFCA5BFEC}"/>
-              </a:ext>
-            </a:extLst>
-          </p:cNvPr>
-          <p:cNvSpPr>
-            <a:spLocks noGrp="1"/>
-          </p:cNvSpPr>
-          <p:nvPr>
-            <p:ph idx="1"/>
-          </p:nvPr>
-        </p:nvSpPr>
-        <p:spPr/>
-        <p:txBody>
-          <a:bodyPr>
-            <a:normAutofit/>
-          </a:bodyPr>
-          <a:lstStyle/>
-          <a:p>
-            <a:pPr marL="0" indent="0">
-              <a:lnSpc>
-                <a:spcPct val="150000"/>
-              </a:lnSpc>
-              <a:buNone/>
-            </a:pPr>
-            <a:r>
-              <a:rPr lang="en-GB" sz="2800" noProof="0" dirty="0"/>
-              <a:t>I can describe the dark web and how cybercriminals operate.</a:t>
-            </a:r>
-          </a:p>
-        </p:txBody>
-      </p:sp>
-    </p:spTree>
-    <p:extLst>
-      <p:ext uri="{BB962C8B-B14F-4D97-AF65-F5344CB8AC3E}">
-        <p14:creationId xmlns:p14="http://schemas.microsoft.com/office/powerpoint/2010/main" val="623897734"/>
-      </p:ext>
-    </p:extLst>
-  </p:cSld>
-  <p:clrMapOvr>
-    <a:masterClrMapping/>
-  </p:clrMapOvr>
-</p:sld>
-</file>
-
-<file path=ppt/slides/slide20.xml><?xml version="1.0" encoding="utf-8"?>
+<file path=ppt/slides/slide18.xml><?xml version="1.0" encoding="utf-8"?>
 <p:sld xmlns:a="http://schemas.openxmlformats.org/drawingml/2006/main" xmlns:r="http://schemas.openxmlformats.org/officeDocument/2006/relationships" xmlns:p="http://schemas.openxmlformats.org/presentationml/2006/main">
   <p:cSld>
     <p:spTree>
@@ -7895,7 +7120,7 @@
 </p:sld>
 </file>
 
-<file path=ppt/slides/slide21.xml><?xml version="1.0" encoding="utf-8"?>
+<file path=ppt/slides/slide19.xml><?xml version="1.0" encoding="utf-8"?>
 <p:sld xmlns:a="http://schemas.openxmlformats.org/drawingml/2006/main" xmlns:r="http://schemas.openxmlformats.org/officeDocument/2006/relationships" xmlns:p="http://schemas.openxmlformats.org/presentationml/2006/main">
   <p:cSld>
     <p:spTree>
@@ -8138,7 +7363,101 @@
 </p:sld>
 </file>
 
-<file path=ppt/slides/slide22.xml><?xml version="1.0" encoding="utf-8"?>
+<file path=ppt/slides/slide2.xml><?xml version="1.0" encoding="utf-8"?>
+<p:sld xmlns:a="http://schemas.openxmlformats.org/drawingml/2006/main" xmlns:r="http://schemas.openxmlformats.org/officeDocument/2006/relationships" xmlns:p="http://schemas.openxmlformats.org/presentationml/2006/main">
+  <p:cSld>
+    <p:spTree>
+      <p:nvGrpSpPr>
+        <p:cNvPr id="1" name=""/>
+        <p:cNvGrpSpPr/>
+        <p:nvPr/>
+      </p:nvGrpSpPr>
+      <p:grpSpPr>
+        <a:xfrm>
+          <a:off x="0" y="0"/>
+          <a:ext cx="0" cy="0"/>
+          <a:chOff x="0" y="0"/>
+          <a:chExt cx="0" cy="0"/>
+        </a:xfrm>
+      </p:grpSpPr>
+      <p:sp>
+        <p:nvSpPr>
+          <p:cNvPr id="2" name="Title 1">
+            <a:extLst>
+              <a:ext uri="{FF2B5EF4-FFF2-40B4-BE49-F238E27FC236}">
+                <a16:creationId xmlns:a16="http://schemas.microsoft.com/office/drawing/2014/main" id="{3F302ABF-1189-622D-C67C-DBF8F48DC098}"/>
+              </a:ext>
+            </a:extLst>
+          </p:cNvPr>
+          <p:cNvSpPr>
+            <a:spLocks noGrp="1"/>
+          </p:cNvSpPr>
+          <p:nvPr>
+            <p:ph type="title"/>
+          </p:nvPr>
+        </p:nvSpPr>
+        <p:spPr/>
+        <p:txBody>
+          <a:bodyPr/>
+          <a:lstStyle/>
+          <a:p>
+            <a:r>
+              <a:rPr lang="en-GB" noProof="0" dirty="0"/>
+              <a:t>Objective</a:t>
+            </a:r>
+          </a:p>
+        </p:txBody>
+      </p:sp>
+      <p:sp>
+        <p:nvSpPr>
+          <p:cNvPr id="3" name="Content Placeholder 2">
+            <a:extLst>
+              <a:ext uri="{FF2B5EF4-FFF2-40B4-BE49-F238E27FC236}">
+                <a16:creationId xmlns:a16="http://schemas.microsoft.com/office/drawing/2014/main" id="{F40FE6D7-DD69-1D13-4F3D-238FFCA5BFEC}"/>
+              </a:ext>
+            </a:extLst>
+          </p:cNvPr>
+          <p:cNvSpPr>
+            <a:spLocks noGrp="1"/>
+          </p:cNvSpPr>
+          <p:nvPr>
+            <p:ph idx="1"/>
+          </p:nvPr>
+        </p:nvSpPr>
+        <p:spPr/>
+        <p:txBody>
+          <a:bodyPr>
+            <a:normAutofit/>
+          </a:bodyPr>
+          <a:lstStyle/>
+          <a:p>
+            <a:pPr marL="0" indent="0">
+              <a:lnSpc>
+                <a:spcPct val="150000"/>
+              </a:lnSpc>
+              <a:buNone/>
+            </a:pPr>
+            <a:r>
+              <a:rPr lang="en-GB" sz="2800" noProof="0" dirty="0"/>
+              <a:t>I can describe the dark web and how cybercriminals operate.</a:t>
+            </a:r>
+          </a:p>
+        </p:txBody>
+      </p:sp>
+    </p:spTree>
+    <p:extLst>
+      <p:ext uri="{BB962C8B-B14F-4D97-AF65-F5344CB8AC3E}">
+        <p14:creationId xmlns:p14="http://schemas.microsoft.com/office/powerpoint/2010/main" val="623897734"/>
+      </p:ext>
+    </p:extLst>
+  </p:cSld>
+  <p:clrMapOvr>
+    <a:masterClrMapping/>
+  </p:clrMapOvr>
+</p:sld>
+</file>
+
+<file path=ppt/slides/slide20.xml><?xml version="1.0" encoding="utf-8"?>
 <p:sld xmlns:a="http://schemas.openxmlformats.org/drawingml/2006/main" xmlns:r="http://schemas.openxmlformats.org/officeDocument/2006/relationships" xmlns:p="http://schemas.openxmlformats.org/presentationml/2006/main">
   <p:cSld>
     <p:spTree>
@@ -8501,909 +7820,7 @@
 </p:sld>
 </file>
 
-<file path=ppt/slides/slide23.xml><?xml version="1.0" encoding="utf-8"?>
-<p:sld xmlns:a="http://schemas.openxmlformats.org/drawingml/2006/main" xmlns:r="http://schemas.openxmlformats.org/officeDocument/2006/relationships" xmlns:p="http://schemas.openxmlformats.org/presentationml/2006/main">
-  <p:cSld>
-    <p:spTree>
-      <p:nvGrpSpPr>
-        <p:cNvPr id="1" name=""/>
-        <p:cNvGrpSpPr/>
-        <p:nvPr/>
-      </p:nvGrpSpPr>
-      <p:grpSpPr>
-        <a:xfrm>
-          <a:off x="0" y="0"/>
-          <a:ext cx="0" cy="0"/>
-          <a:chOff x="0" y="0"/>
-          <a:chExt cx="0" cy="0"/>
-        </a:xfrm>
-      </p:grpSpPr>
-      <p:sp>
-        <p:nvSpPr>
-          <p:cNvPr id="5" name="Content Placeholder 4">
-            <a:extLst>
-              <a:ext uri="{FF2B5EF4-FFF2-40B4-BE49-F238E27FC236}">
-                <a16:creationId xmlns:a16="http://schemas.microsoft.com/office/drawing/2014/main" id="{21011841-C0C5-81F2-50C5-38C8BA0F116D}"/>
-              </a:ext>
-            </a:extLst>
-          </p:cNvPr>
-          <p:cNvSpPr>
-            <a:spLocks noGrp="1"/>
-          </p:cNvSpPr>
-          <p:nvPr>
-            <p:ph idx="1"/>
-          </p:nvPr>
-        </p:nvSpPr>
-        <p:spPr/>
-        <p:txBody>
-          <a:bodyPr>
-            <a:normAutofit/>
-          </a:bodyPr>
-          <a:lstStyle/>
-          <a:p>
-            <a:r>
-              <a:rPr lang="en-GB" noProof="0" dirty="0"/>
-              <a:t>What sort of things are sold on illegal marketplaces?</a:t>
-            </a:r>
-          </a:p>
-          <a:p>
-            <a:pPr marL="719138"/>
-            <a:r>
-              <a:rPr lang="en-GB" b="1" noProof="0" dirty="0">
-                <a:solidFill>
-                  <a:srgbClr val="C00000"/>
-                </a:solidFill>
-              </a:rPr>
-              <a:t>Stolen passwords </a:t>
-            </a:r>
-          </a:p>
-          <a:p>
-            <a:pPr marL="719138"/>
-            <a:r>
-              <a:rPr lang="en-GB" b="1" noProof="0" dirty="0">
-                <a:solidFill>
-                  <a:srgbClr val="C00000"/>
-                </a:solidFill>
-              </a:rPr>
-              <a:t>Credit card details </a:t>
-            </a:r>
-          </a:p>
-          <a:p>
-            <a:pPr marL="719138"/>
-            <a:r>
-              <a:rPr lang="en-GB" b="1" noProof="0" dirty="0">
-                <a:solidFill>
-                  <a:srgbClr val="C00000"/>
-                </a:solidFill>
-              </a:rPr>
-              <a:t>Fake ID documents</a:t>
-            </a:r>
-          </a:p>
-          <a:p>
-            <a:pPr marL="719138"/>
-            <a:r>
-              <a:rPr lang="en-GB" b="1" noProof="0" dirty="0">
-                <a:solidFill>
-                  <a:srgbClr val="C00000"/>
-                </a:solidFill>
-              </a:rPr>
-              <a:t>Personal information</a:t>
-            </a:r>
-          </a:p>
-        </p:txBody>
-      </p:sp>
-      <p:sp>
-        <p:nvSpPr>
-          <p:cNvPr id="4" name="Title 3">
-            <a:extLst>
-              <a:ext uri="{FF2B5EF4-FFF2-40B4-BE49-F238E27FC236}">
-                <a16:creationId xmlns:a16="http://schemas.microsoft.com/office/drawing/2014/main" id="{3E181CF9-3229-02C0-9713-E28D5E962F41}"/>
-              </a:ext>
-            </a:extLst>
-          </p:cNvPr>
-          <p:cNvSpPr>
-            <a:spLocks noGrp="1"/>
-          </p:cNvSpPr>
-          <p:nvPr>
-            <p:ph type="title"/>
-          </p:nvPr>
-        </p:nvSpPr>
-        <p:spPr/>
-        <p:txBody>
-          <a:bodyPr/>
-          <a:lstStyle/>
-          <a:p>
-            <a:r>
-              <a:rPr lang="en-GB" noProof="0" dirty="0"/>
-              <a:t>Stolen data</a:t>
-            </a:r>
-          </a:p>
-        </p:txBody>
-      </p:sp>
-    </p:spTree>
-    <p:extLst>
-      <p:ext uri="{BB962C8B-B14F-4D97-AF65-F5344CB8AC3E}">
-        <p14:creationId xmlns:p14="http://schemas.microsoft.com/office/powerpoint/2010/main" val="3807190137"/>
-      </p:ext>
-    </p:extLst>
-  </p:cSld>
-  <p:clrMapOvr>
-    <a:masterClrMapping/>
-  </p:clrMapOvr>
-  <p:timing>
-    <p:tnLst>
-      <p:par>
-        <p:cTn id="1" dur="indefinite" restart="never" nodeType="tmRoot">
-          <p:childTnLst>
-            <p:seq concurrent="1" nextAc="seek">
-              <p:cTn id="2" dur="indefinite" nodeType="mainSeq">
-                <p:childTnLst>
-                  <p:par>
-                    <p:cTn id="3" fill="hold">
-                      <p:stCondLst>
-                        <p:cond delay="indefinite"/>
-                      </p:stCondLst>
-                      <p:childTnLst>
-                        <p:par>
-                          <p:cTn id="4" fill="hold">
-                            <p:stCondLst>
-                              <p:cond delay="0"/>
-                            </p:stCondLst>
-                            <p:childTnLst>
-                              <p:par>
-                                <p:cTn id="5" presetID="1" presetClass="entr" presetSubtype="0" fill="hold" grpId="0" nodeType="clickEffect">
-                                  <p:stCondLst>
-                                    <p:cond delay="0"/>
-                                  </p:stCondLst>
-                                  <p:childTnLst>
-                                    <p:set>
-                                      <p:cBhvr>
-                                        <p:cTn id="6" dur="1" fill="hold">
-                                          <p:stCondLst>
-                                            <p:cond delay="0"/>
-                                          </p:stCondLst>
-                                        </p:cTn>
-                                        <p:tgtEl>
-                                          <p:spTgt spid="5">
-                                            <p:txEl>
-                                              <p:pRg st="1" end="1"/>
-                                            </p:txEl>
-                                          </p:spTgt>
-                                        </p:tgtEl>
-                                        <p:attrNameLst>
-                                          <p:attrName>style.visibility</p:attrName>
-                                        </p:attrNameLst>
-                                      </p:cBhvr>
-                                      <p:to>
-                                        <p:strVal val="visible"/>
-                                      </p:to>
-                                    </p:set>
-                                  </p:childTnLst>
-                                </p:cTn>
-                              </p:par>
-                            </p:childTnLst>
-                          </p:cTn>
-                        </p:par>
-                      </p:childTnLst>
-                    </p:cTn>
-                  </p:par>
-                  <p:par>
-                    <p:cTn id="7" fill="hold">
-                      <p:stCondLst>
-                        <p:cond delay="indefinite"/>
-                      </p:stCondLst>
-                      <p:childTnLst>
-                        <p:par>
-                          <p:cTn id="8" fill="hold">
-                            <p:stCondLst>
-                              <p:cond delay="0"/>
-                            </p:stCondLst>
-                            <p:childTnLst>
-                              <p:par>
-                                <p:cTn id="9" presetID="1" presetClass="entr" presetSubtype="0" fill="hold" grpId="0" nodeType="clickEffect">
-                                  <p:stCondLst>
-                                    <p:cond delay="0"/>
-                                  </p:stCondLst>
-                                  <p:childTnLst>
-                                    <p:set>
-                                      <p:cBhvr>
-                                        <p:cTn id="10" dur="1" fill="hold">
-                                          <p:stCondLst>
-                                            <p:cond delay="0"/>
-                                          </p:stCondLst>
-                                        </p:cTn>
-                                        <p:tgtEl>
-                                          <p:spTgt spid="5">
-                                            <p:txEl>
-                                              <p:pRg st="2" end="2"/>
-                                            </p:txEl>
-                                          </p:spTgt>
-                                        </p:tgtEl>
-                                        <p:attrNameLst>
-                                          <p:attrName>style.visibility</p:attrName>
-                                        </p:attrNameLst>
-                                      </p:cBhvr>
-                                      <p:to>
-                                        <p:strVal val="visible"/>
-                                      </p:to>
-                                    </p:set>
-                                  </p:childTnLst>
-                                </p:cTn>
-                              </p:par>
-                            </p:childTnLst>
-                          </p:cTn>
-                        </p:par>
-                      </p:childTnLst>
-                    </p:cTn>
-                  </p:par>
-                  <p:par>
-                    <p:cTn id="11" fill="hold">
-                      <p:stCondLst>
-                        <p:cond delay="indefinite"/>
-                      </p:stCondLst>
-                      <p:childTnLst>
-                        <p:par>
-                          <p:cTn id="12" fill="hold">
-                            <p:stCondLst>
-                              <p:cond delay="0"/>
-                            </p:stCondLst>
-                            <p:childTnLst>
-                              <p:par>
-                                <p:cTn id="13" presetID="1" presetClass="entr" presetSubtype="0" fill="hold" grpId="0" nodeType="clickEffect">
-                                  <p:stCondLst>
-                                    <p:cond delay="0"/>
-                                  </p:stCondLst>
-                                  <p:childTnLst>
-                                    <p:set>
-                                      <p:cBhvr>
-                                        <p:cTn id="14" dur="1" fill="hold">
-                                          <p:stCondLst>
-                                            <p:cond delay="0"/>
-                                          </p:stCondLst>
-                                        </p:cTn>
-                                        <p:tgtEl>
-                                          <p:spTgt spid="5">
-                                            <p:txEl>
-                                              <p:pRg st="3" end="3"/>
-                                            </p:txEl>
-                                          </p:spTgt>
-                                        </p:tgtEl>
-                                        <p:attrNameLst>
-                                          <p:attrName>style.visibility</p:attrName>
-                                        </p:attrNameLst>
-                                      </p:cBhvr>
-                                      <p:to>
-                                        <p:strVal val="visible"/>
-                                      </p:to>
-                                    </p:set>
-                                  </p:childTnLst>
-                                </p:cTn>
-                              </p:par>
-                            </p:childTnLst>
-                          </p:cTn>
-                        </p:par>
-                      </p:childTnLst>
-                    </p:cTn>
-                  </p:par>
-                  <p:par>
-                    <p:cTn id="15" fill="hold">
-                      <p:stCondLst>
-                        <p:cond delay="indefinite"/>
-                      </p:stCondLst>
-                      <p:childTnLst>
-                        <p:par>
-                          <p:cTn id="16" fill="hold">
-                            <p:stCondLst>
-                              <p:cond delay="0"/>
-                            </p:stCondLst>
-                            <p:childTnLst>
-                              <p:par>
-                                <p:cTn id="17" presetID="1" presetClass="entr" presetSubtype="0" fill="hold" grpId="0" nodeType="clickEffect">
-                                  <p:stCondLst>
-                                    <p:cond delay="0"/>
-                                  </p:stCondLst>
-                                  <p:childTnLst>
-                                    <p:set>
-                                      <p:cBhvr>
-                                        <p:cTn id="18" dur="1" fill="hold">
-                                          <p:stCondLst>
-                                            <p:cond delay="0"/>
-                                          </p:stCondLst>
-                                        </p:cTn>
-                                        <p:tgtEl>
-                                          <p:spTgt spid="5">
-                                            <p:txEl>
-                                              <p:pRg st="4" end="4"/>
-                                            </p:txEl>
-                                          </p:spTgt>
-                                        </p:tgtEl>
-                                        <p:attrNameLst>
-                                          <p:attrName>style.visibility</p:attrName>
-                                        </p:attrNameLst>
-                                      </p:cBhvr>
-                                      <p:to>
-                                        <p:strVal val="visible"/>
-                                      </p:to>
-                                    </p:set>
-                                  </p:childTnLst>
-                                </p:cTn>
-                              </p:par>
-                            </p:childTnLst>
-                          </p:cTn>
-                        </p:par>
-                      </p:childTnLst>
-                    </p:cTn>
-                  </p:par>
-                </p:childTnLst>
-              </p:cTn>
-              <p:prevCondLst>
-                <p:cond evt="onPrev" delay="0">
-                  <p:tgtEl>
-                    <p:sldTgt/>
-                  </p:tgtEl>
-                </p:cond>
-              </p:prevCondLst>
-              <p:nextCondLst>
-                <p:cond evt="onNext" delay="0">
-                  <p:tgtEl>
-                    <p:sldTgt/>
-                  </p:tgtEl>
-                </p:cond>
-              </p:nextCondLst>
-            </p:seq>
-          </p:childTnLst>
-        </p:cTn>
-      </p:par>
-    </p:tnLst>
-    <p:bldLst>
-      <p:bldP spid="5" grpId="0" uiExpand="1" build="p"/>
-    </p:bldLst>
-  </p:timing>
-</p:sld>
-</file>
-
-<file path=ppt/slides/slide24.xml><?xml version="1.0" encoding="utf-8"?>
-<p:sld xmlns:a="http://schemas.openxmlformats.org/drawingml/2006/main" xmlns:r="http://schemas.openxmlformats.org/officeDocument/2006/relationships" xmlns:p="http://schemas.openxmlformats.org/presentationml/2006/main">
-  <p:cSld>
-    <p:spTree>
-      <p:nvGrpSpPr>
-        <p:cNvPr id="1" name=""/>
-        <p:cNvGrpSpPr/>
-        <p:nvPr/>
-      </p:nvGrpSpPr>
-      <p:grpSpPr>
-        <a:xfrm>
-          <a:off x="0" y="0"/>
-          <a:ext cx="0" cy="0"/>
-          <a:chOff x="0" y="0"/>
-          <a:chExt cx="0" cy="0"/>
-        </a:xfrm>
-      </p:grpSpPr>
-      <p:sp>
-        <p:nvSpPr>
-          <p:cNvPr id="2" name="Content Placeholder 1">
-            <a:extLst>
-              <a:ext uri="{FF2B5EF4-FFF2-40B4-BE49-F238E27FC236}">
-                <a16:creationId xmlns:a16="http://schemas.microsoft.com/office/drawing/2014/main" id="{1BE3BED8-1F55-AE2B-43BF-E9A6911A9780}"/>
-              </a:ext>
-            </a:extLst>
-          </p:cNvPr>
-          <p:cNvSpPr>
-            <a:spLocks noGrp="1"/>
-          </p:cNvSpPr>
-          <p:nvPr>
-            <p:ph idx="1"/>
-          </p:nvPr>
-        </p:nvSpPr>
-        <p:spPr/>
-        <p:txBody>
-          <a:bodyPr>
-            <a:normAutofit fontScale="92500" lnSpcReduction="10000"/>
-          </a:bodyPr>
-          <a:lstStyle/>
-          <a:p>
-            <a:r>
-              <a:rPr lang="en-GB" noProof="0" dirty="0"/>
-              <a:t>How could stolen data affect someone’s life?</a:t>
-            </a:r>
-          </a:p>
-          <a:p>
-            <a:r>
-              <a:rPr lang="en-GB" b="1" noProof="0" dirty="0">
-                <a:solidFill>
-                  <a:srgbClr val="C00000"/>
-                </a:solidFill>
-              </a:rPr>
-              <a:t>Stolen data can cause a lot of problems for someone. </a:t>
-            </a:r>
-          </a:p>
-          <a:p>
-            <a:r>
-              <a:rPr lang="en-GB" b="1" noProof="0" dirty="0">
-                <a:solidFill>
-                  <a:srgbClr val="C00000"/>
-                </a:solidFill>
-              </a:rPr>
-              <a:t>Criminals might use personal information to steal money from bank accounts, buy things in someone else’s name or even pretend to be that person online. </a:t>
-            </a:r>
-          </a:p>
-          <a:p>
-            <a:r>
-              <a:rPr lang="en-GB" b="1" noProof="0" dirty="0">
-                <a:solidFill>
-                  <a:srgbClr val="C00000"/>
-                </a:solidFill>
-              </a:rPr>
-              <a:t>This can lead to stress, loss of money and damage to someone’s reputation.</a:t>
-            </a:r>
-            <a:endParaRPr lang="en-GB" noProof="0" dirty="0"/>
-          </a:p>
-        </p:txBody>
-      </p:sp>
-      <p:sp>
-        <p:nvSpPr>
-          <p:cNvPr id="3" name="Title 2">
-            <a:extLst>
-              <a:ext uri="{FF2B5EF4-FFF2-40B4-BE49-F238E27FC236}">
-                <a16:creationId xmlns:a16="http://schemas.microsoft.com/office/drawing/2014/main" id="{8586CA53-0E57-093C-4543-074E6952C001}"/>
-              </a:ext>
-            </a:extLst>
-          </p:cNvPr>
-          <p:cNvSpPr>
-            <a:spLocks noGrp="1"/>
-          </p:cNvSpPr>
-          <p:nvPr>
-            <p:ph type="title"/>
-          </p:nvPr>
-        </p:nvSpPr>
-        <p:spPr/>
-        <p:txBody>
-          <a:bodyPr/>
-          <a:lstStyle/>
-          <a:p>
-            <a:r>
-              <a:rPr lang="en-GB" noProof="0" dirty="0"/>
-              <a:t>Stolen data</a:t>
-            </a:r>
-          </a:p>
-        </p:txBody>
-      </p:sp>
-    </p:spTree>
-    <p:extLst>
-      <p:ext uri="{BB962C8B-B14F-4D97-AF65-F5344CB8AC3E}">
-        <p14:creationId xmlns:p14="http://schemas.microsoft.com/office/powerpoint/2010/main" val="3695679580"/>
-      </p:ext>
-    </p:extLst>
-  </p:cSld>
-  <p:clrMapOvr>
-    <a:masterClrMapping/>
-  </p:clrMapOvr>
-  <p:timing>
-    <p:tnLst>
-      <p:par>
-        <p:cTn id="1" dur="indefinite" restart="never" nodeType="tmRoot">
-          <p:childTnLst>
-            <p:seq concurrent="1" nextAc="seek">
-              <p:cTn id="2" dur="indefinite" nodeType="mainSeq">
-                <p:childTnLst>
-                  <p:par>
-                    <p:cTn id="3" fill="hold">
-                      <p:stCondLst>
-                        <p:cond delay="indefinite"/>
-                      </p:stCondLst>
-                      <p:childTnLst>
-                        <p:par>
-                          <p:cTn id="4" fill="hold">
-                            <p:stCondLst>
-                              <p:cond delay="0"/>
-                            </p:stCondLst>
-                            <p:childTnLst>
-                              <p:par>
-                                <p:cTn id="5" presetID="1" presetClass="entr" presetSubtype="0" fill="hold" grpId="0" nodeType="clickEffect">
-                                  <p:stCondLst>
-                                    <p:cond delay="0"/>
-                                  </p:stCondLst>
-                                  <p:childTnLst>
-                                    <p:set>
-                                      <p:cBhvr>
-                                        <p:cTn id="6" dur="1" fill="hold">
-                                          <p:stCondLst>
-                                            <p:cond delay="0"/>
-                                          </p:stCondLst>
-                                        </p:cTn>
-                                        <p:tgtEl>
-                                          <p:spTgt spid="2">
-                                            <p:txEl>
-                                              <p:pRg st="1" end="1"/>
-                                            </p:txEl>
-                                          </p:spTgt>
-                                        </p:tgtEl>
-                                        <p:attrNameLst>
-                                          <p:attrName>style.visibility</p:attrName>
-                                        </p:attrNameLst>
-                                      </p:cBhvr>
-                                      <p:to>
-                                        <p:strVal val="visible"/>
-                                      </p:to>
-                                    </p:set>
-                                  </p:childTnLst>
-                                </p:cTn>
-                              </p:par>
-                            </p:childTnLst>
-                          </p:cTn>
-                        </p:par>
-                      </p:childTnLst>
-                    </p:cTn>
-                  </p:par>
-                  <p:par>
-                    <p:cTn id="7" fill="hold">
-                      <p:stCondLst>
-                        <p:cond delay="indefinite"/>
-                      </p:stCondLst>
-                      <p:childTnLst>
-                        <p:par>
-                          <p:cTn id="8" fill="hold">
-                            <p:stCondLst>
-                              <p:cond delay="0"/>
-                            </p:stCondLst>
-                            <p:childTnLst>
-                              <p:par>
-                                <p:cTn id="9" presetID="1" presetClass="entr" presetSubtype="0" fill="hold" grpId="0" nodeType="clickEffect">
-                                  <p:stCondLst>
-                                    <p:cond delay="0"/>
-                                  </p:stCondLst>
-                                  <p:childTnLst>
-                                    <p:set>
-                                      <p:cBhvr>
-                                        <p:cTn id="10" dur="1" fill="hold">
-                                          <p:stCondLst>
-                                            <p:cond delay="0"/>
-                                          </p:stCondLst>
-                                        </p:cTn>
-                                        <p:tgtEl>
-                                          <p:spTgt spid="2">
-                                            <p:txEl>
-                                              <p:pRg st="2" end="2"/>
-                                            </p:txEl>
-                                          </p:spTgt>
-                                        </p:tgtEl>
-                                        <p:attrNameLst>
-                                          <p:attrName>style.visibility</p:attrName>
-                                        </p:attrNameLst>
-                                      </p:cBhvr>
-                                      <p:to>
-                                        <p:strVal val="visible"/>
-                                      </p:to>
-                                    </p:set>
-                                  </p:childTnLst>
-                                </p:cTn>
-                              </p:par>
-                            </p:childTnLst>
-                          </p:cTn>
-                        </p:par>
-                      </p:childTnLst>
-                    </p:cTn>
-                  </p:par>
-                  <p:par>
-                    <p:cTn id="11" fill="hold">
-                      <p:stCondLst>
-                        <p:cond delay="indefinite"/>
-                      </p:stCondLst>
-                      <p:childTnLst>
-                        <p:par>
-                          <p:cTn id="12" fill="hold">
-                            <p:stCondLst>
-                              <p:cond delay="0"/>
-                            </p:stCondLst>
-                            <p:childTnLst>
-                              <p:par>
-                                <p:cTn id="13" presetID="1" presetClass="entr" presetSubtype="0" fill="hold" grpId="0" nodeType="clickEffect">
-                                  <p:stCondLst>
-                                    <p:cond delay="0"/>
-                                  </p:stCondLst>
-                                  <p:childTnLst>
-                                    <p:set>
-                                      <p:cBhvr>
-                                        <p:cTn id="14" dur="1" fill="hold">
-                                          <p:stCondLst>
-                                            <p:cond delay="0"/>
-                                          </p:stCondLst>
-                                        </p:cTn>
-                                        <p:tgtEl>
-                                          <p:spTgt spid="2">
-                                            <p:txEl>
-                                              <p:pRg st="3" end="3"/>
-                                            </p:txEl>
-                                          </p:spTgt>
-                                        </p:tgtEl>
-                                        <p:attrNameLst>
-                                          <p:attrName>style.visibility</p:attrName>
-                                        </p:attrNameLst>
-                                      </p:cBhvr>
-                                      <p:to>
-                                        <p:strVal val="visible"/>
-                                      </p:to>
-                                    </p:set>
-                                  </p:childTnLst>
-                                </p:cTn>
-                              </p:par>
-                            </p:childTnLst>
-                          </p:cTn>
-                        </p:par>
-                      </p:childTnLst>
-                    </p:cTn>
-                  </p:par>
-                </p:childTnLst>
-              </p:cTn>
-              <p:prevCondLst>
-                <p:cond evt="onPrev" delay="0">
-                  <p:tgtEl>
-                    <p:sldTgt/>
-                  </p:tgtEl>
-                </p:cond>
-              </p:prevCondLst>
-              <p:nextCondLst>
-                <p:cond evt="onNext" delay="0">
-                  <p:tgtEl>
-                    <p:sldTgt/>
-                  </p:tgtEl>
-                </p:cond>
-              </p:nextCondLst>
-            </p:seq>
-          </p:childTnLst>
-        </p:cTn>
-      </p:par>
-    </p:tnLst>
-    <p:bldLst>
-      <p:bldP spid="2" grpId="0" uiExpand="1" build="p"/>
-    </p:bldLst>
-  </p:timing>
-</p:sld>
-</file>
-
-<file path=ppt/slides/slide25.xml><?xml version="1.0" encoding="utf-8"?>
-<p:sld xmlns:a="http://schemas.openxmlformats.org/drawingml/2006/main" xmlns:r="http://schemas.openxmlformats.org/officeDocument/2006/relationships" xmlns:p="http://schemas.openxmlformats.org/presentationml/2006/main">
-  <p:cSld>
-    <p:spTree>
-      <p:nvGrpSpPr>
-        <p:cNvPr id="1" name=""/>
-        <p:cNvGrpSpPr/>
-        <p:nvPr/>
-      </p:nvGrpSpPr>
-      <p:grpSpPr>
-        <a:xfrm>
-          <a:off x="0" y="0"/>
-          <a:ext cx="0" cy="0"/>
-          <a:chOff x="0" y="0"/>
-          <a:chExt cx="0" cy="0"/>
-        </a:xfrm>
-      </p:grpSpPr>
-      <p:sp>
-        <p:nvSpPr>
-          <p:cNvPr id="2" name="Content Placeholder 1">
-            <a:extLst>
-              <a:ext uri="{FF2B5EF4-FFF2-40B4-BE49-F238E27FC236}">
-                <a16:creationId xmlns:a16="http://schemas.microsoft.com/office/drawing/2014/main" id="{057536EC-578D-DE98-4350-1A69144D0A83}"/>
-              </a:ext>
-            </a:extLst>
-          </p:cNvPr>
-          <p:cNvSpPr>
-            <a:spLocks noGrp="1"/>
-          </p:cNvSpPr>
-          <p:nvPr>
-            <p:ph idx="1"/>
-          </p:nvPr>
-        </p:nvSpPr>
-        <p:spPr/>
-        <p:txBody>
-          <a:bodyPr/>
-          <a:lstStyle/>
-          <a:p>
-            <a:r>
-              <a:rPr lang="en-GB" noProof="0" dirty="0"/>
-              <a:t>List two ways criminals get information to sell.</a:t>
-            </a:r>
-          </a:p>
-          <a:p>
-            <a:pPr marL="360363"/>
-            <a:r>
-              <a:rPr lang="en-GB" b="1" noProof="0" dirty="0">
-                <a:solidFill>
-                  <a:srgbClr val="C00000"/>
-                </a:solidFill>
-              </a:rPr>
-              <a:t>Criminals use social engineering techniques such as phishing to trick people into giving away their passwords or details.</a:t>
-            </a:r>
-          </a:p>
-          <a:p>
-            <a:pPr marL="360363"/>
-            <a:r>
-              <a:rPr lang="en-GB" b="1" noProof="0" dirty="0">
-                <a:solidFill>
-                  <a:srgbClr val="C00000"/>
-                </a:solidFill>
-              </a:rPr>
-              <a:t>They hack into computer systems to steal information directly.</a:t>
-            </a:r>
-          </a:p>
-          <a:p>
-            <a:endParaRPr lang="en-GB" noProof="0" dirty="0"/>
-          </a:p>
-        </p:txBody>
-      </p:sp>
-      <p:sp>
-        <p:nvSpPr>
-          <p:cNvPr id="3" name="Title 2">
-            <a:extLst>
-              <a:ext uri="{FF2B5EF4-FFF2-40B4-BE49-F238E27FC236}">
-                <a16:creationId xmlns:a16="http://schemas.microsoft.com/office/drawing/2014/main" id="{A00620B9-DFB0-E2D5-8DE3-9B796F208482}"/>
-              </a:ext>
-            </a:extLst>
-          </p:cNvPr>
-          <p:cNvSpPr>
-            <a:spLocks noGrp="1"/>
-          </p:cNvSpPr>
-          <p:nvPr>
-            <p:ph type="title"/>
-          </p:nvPr>
-        </p:nvSpPr>
-        <p:spPr/>
-        <p:txBody>
-          <a:bodyPr/>
-          <a:lstStyle/>
-          <a:p>
-            <a:r>
-              <a:rPr lang="en-GB" noProof="0" dirty="0"/>
-              <a:t>Stolen data</a:t>
-            </a:r>
-          </a:p>
-        </p:txBody>
-      </p:sp>
-    </p:spTree>
-    <p:extLst>
-      <p:ext uri="{BB962C8B-B14F-4D97-AF65-F5344CB8AC3E}">
-        <p14:creationId xmlns:p14="http://schemas.microsoft.com/office/powerpoint/2010/main" val="3013125263"/>
-      </p:ext>
-    </p:extLst>
-  </p:cSld>
-  <p:clrMapOvr>
-    <a:masterClrMapping/>
-  </p:clrMapOvr>
-  <p:timing>
-    <p:tnLst>
-      <p:par>
-        <p:cTn id="1" dur="indefinite" restart="never" nodeType="tmRoot">
-          <p:childTnLst>
-            <p:seq concurrent="1" nextAc="seek">
-              <p:cTn id="2" dur="indefinite" nodeType="mainSeq">
-                <p:childTnLst>
-                  <p:par>
-                    <p:cTn id="3" fill="hold">
-                      <p:stCondLst>
-                        <p:cond delay="indefinite"/>
-                      </p:stCondLst>
-                      <p:childTnLst>
-                        <p:par>
-                          <p:cTn id="4" fill="hold">
-                            <p:stCondLst>
-                              <p:cond delay="0"/>
-                            </p:stCondLst>
-                            <p:childTnLst>
-                              <p:par>
-                                <p:cTn id="5" presetID="1" presetClass="entr" presetSubtype="0" fill="hold" grpId="0" nodeType="clickEffect">
-                                  <p:stCondLst>
-                                    <p:cond delay="0"/>
-                                  </p:stCondLst>
-                                  <p:childTnLst>
-                                    <p:set>
-                                      <p:cBhvr>
-                                        <p:cTn id="6" dur="1" fill="hold">
-                                          <p:stCondLst>
-                                            <p:cond delay="0"/>
-                                          </p:stCondLst>
-                                        </p:cTn>
-                                        <p:tgtEl>
-                                          <p:spTgt spid="2">
-                                            <p:txEl>
-                                              <p:pRg st="1" end="1"/>
-                                            </p:txEl>
-                                          </p:spTgt>
-                                        </p:tgtEl>
-                                        <p:attrNameLst>
-                                          <p:attrName>style.visibility</p:attrName>
-                                        </p:attrNameLst>
-                                      </p:cBhvr>
-                                      <p:to>
-                                        <p:strVal val="visible"/>
-                                      </p:to>
-                                    </p:set>
-                                  </p:childTnLst>
-                                </p:cTn>
-                              </p:par>
-                            </p:childTnLst>
-                          </p:cTn>
-                        </p:par>
-                      </p:childTnLst>
-                    </p:cTn>
-                  </p:par>
-                  <p:par>
-                    <p:cTn id="7" fill="hold">
-                      <p:stCondLst>
-                        <p:cond delay="indefinite"/>
-                      </p:stCondLst>
-                      <p:childTnLst>
-                        <p:par>
-                          <p:cTn id="8" fill="hold">
-                            <p:stCondLst>
-                              <p:cond delay="0"/>
-                            </p:stCondLst>
-                            <p:childTnLst>
-                              <p:par>
-                                <p:cTn id="9" presetID="1" presetClass="entr" presetSubtype="0" fill="hold" grpId="0" nodeType="clickEffect">
-                                  <p:stCondLst>
-                                    <p:cond delay="0"/>
-                                  </p:stCondLst>
-                                  <p:childTnLst>
-                                    <p:set>
-                                      <p:cBhvr>
-                                        <p:cTn id="10" dur="1" fill="hold">
-                                          <p:stCondLst>
-                                            <p:cond delay="0"/>
-                                          </p:stCondLst>
-                                        </p:cTn>
-                                        <p:tgtEl>
-                                          <p:spTgt spid="2">
-                                            <p:txEl>
-                                              <p:pRg st="2" end="2"/>
-                                            </p:txEl>
-                                          </p:spTgt>
-                                        </p:tgtEl>
-                                        <p:attrNameLst>
-                                          <p:attrName>style.visibility</p:attrName>
-                                        </p:attrNameLst>
-                                      </p:cBhvr>
-                                      <p:to>
-                                        <p:strVal val="visible"/>
-                                      </p:to>
-                                    </p:set>
-                                  </p:childTnLst>
-                                </p:cTn>
-                              </p:par>
-                            </p:childTnLst>
-                          </p:cTn>
-                        </p:par>
-                      </p:childTnLst>
-                    </p:cTn>
-                  </p:par>
-                </p:childTnLst>
-              </p:cTn>
-              <p:prevCondLst>
-                <p:cond evt="onPrev" delay="0">
-                  <p:tgtEl>
-                    <p:sldTgt/>
-                  </p:tgtEl>
-                </p:cond>
-              </p:prevCondLst>
-              <p:nextCondLst>
-                <p:cond evt="onNext" delay="0">
-                  <p:tgtEl>
-                    <p:sldTgt/>
-                  </p:tgtEl>
-                </p:cond>
-              </p:nextCondLst>
-            </p:seq>
-          </p:childTnLst>
-        </p:cTn>
-      </p:par>
-    </p:tnLst>
-    <p:bldLst>
-      <p:bldP spid="2" grpId="0" uiExpand="1" build="p"/>
-    </p:bldLst>
-  </p:timing>
-</p:sld>
-</file>
-
-<file path=ppt/slides/slide26.xml><?xml version="1.0" encoding="utf-8"?>
+<file path=ppt/slides/slide21.xml><?xml version="1.0" encoding="utf-8"?>
 <p:sld xmlns:a="http://schemas.openxmlformats.org/drawingml/2006/main" xmlns:r="http://schemas.openxmlformats.org/officeDocument/2006/relationships" xmlns:p="http://schemas.openxmlformats.org/presentationml/2006/main">
   <p:cSld>
     <p:spTree>
@@ -10071,7 +8488,7 @@
 </p:sld>
 </file>
 
-<file path=ppt/slides/slide27.xml><?xml version="1.0" encoding="utf-8"?>
+<file path=ppt/slides/slide22.xml><?xml version="1.0" encoding="utf-8"?>
 <p:sld xmlns:a="http://schemas.openxmlformats.org/drawingml/2006/main" xmlns:r="http://schemas.openxmlformats.org/officeDocument/2006/relationships" xmlns:p="http://schemas.openxmlformats.org/presentationml/2006/main">
   <p:cSld>
     <p:spTree>
@@ -11307,7 +9724,7 @@
 </p:sld>
 </file>
 
-<file path=ppt/slides/slide28.xml><?xml version="1.0" encoding="utf-8"?>
+<file path=ppt/slides/slide23.xml><?xml version="1.0" encoding="utf-8"?>
 <p:sld xmlns:a="http://schemas.openxmlformats.org/drawingml/2006/main" xmlns:r="http://schemas.openxmlformats.org/officeDocument/2006/relationships" xmlns:p="http://schemas.openxmlformats.org/presentationml/2006/main">
   <p:cSld>
     <p:spTree>
@@ -11574,7 +9991,7 @@
 </p:sld>
 </file>
 
-<file path=ppt/slides/slide29.xml><?xml version="1.0" encoding="utf-8"?>
+<file path=ppt/slides/slide24.xml><?xml version="1.0" encoding="utf-8"?>
 <p:sld xmlns:a="http://schemas.openxmlformats.org/drawingml/2006/main" xmlns:r="http://schemas.openxmlformats.org/officeDocument/2006/relationships" xmlns:p="http://schemas.openxmlformats.org/presentationml/2006/main">
   <p:cSld>
     <p:spTree>
@@ -11763,6 +10180,1127 @@
                                           <p:spTgt spid="5">
                                             <p:txEl>
                                               <p:pRg st="2" end="2"/>
+                                            </p:txEl>
+                                          </p:spTgt>
+                                        </p:tgtEl>
+                                        <p:attrNameLst>
+                                          <p:attrName>style.visibility</p:attrName>
+                                        </p:attrNameLst>
+                                      </p:cBhvr>
+                                      <p:to>
+                                        <p:strVal val="visible"/>
+                                      </p:to>
+                                    </p:set>
+                                  </p:childTnLst>
+                                </p:cTn>
+                              </p:par>
+                            </p:childTnLst>
+                          </p:cTn>
+                        </p:par>
+                      </p:childTnLst>
+                    </p:cTn>
+                  </p:par>
+                </p:childTnLst>
+              </p:cTn>
+              <p:prevCondLst>
+                <p:cond evt="onPrev" delay="0">
+                  <p:tgtEl>
+                    <p:sldTgt/>
+                  </p:tgtEl>
+                </p:cond>
+              </p:prevCondLst>
+              <p:nextCondLst>
+                <p:cond evt="onNext" delay="0">
+                  <p:tgtEl>
+                    <p:sldTgt/>
+                  </p:tgtEl>
+                </p:cond>
+              </p:nextCondLst>
+            </p:seq>
+          </p:childTnLst>
+        </p:cTn>
+      </p:par>
+    </p:tnLst>
+    <p:bldLst>
+      <p:bldP spid="5" grpId="0" uiExpand="1" build="p"/>
+    </p:bldLst>
+  </p:timing>
+</p:sld>
+</file>
+
+<file path=ppt/slides/slide25.xml><?xml version="1.0" encoding="utf-8"?>
+<p:sld xmlns:a="http://schemas.openxmlformats.org/drawingml/2006/main" xmlns:r="http://schemas.openxmlformats.org/officeDocument/2006/relationships" xmlns:p="http://schemas.openxmlformats.org/presentationml/2006/main">
+  <p:cSld>
+    <p:spTree>
+      <p:nvGrpSpPr>
+        <p:cNvPr id="1" name=""/>
+        <p:cNvGrpSpPr/>
+        <p:nvPr/>
+      </p:nvGrpSpPr>
+      <p:grpSpPr>
+        <a:xfrm>
+          <a:off x="0" y="0"/>
+          <a:ext cx="0" cy="0"/>
+          <a:chOff x="0" y="0"/>
+          <a:chExt cx="0" cy="0"/>
+        </a:xfrm>
+      </p:grpSpPr>
+      <p:sp>
+        <p:nvSpPr>
+          <p:cNvPr id="2" name="Title 1">
+            <a:extLst>
+              <a:ext uri="{FF2B5EF4-FFF2-40B4-BE49-F238E27FC236}">
+                <a16:creationId xmlns:a16="http://schemas.microsoft.com/office/drawing/2014/main" id="{BB32BE76-7756-B7F7-4722-D1EF2E04C7B4}"/>
+              </a:ext>
+            </a:extLst>
+          </p:cNvPr>
+          <p:cNvSpPr>
+            <a:spLocks noGrp="1"/>
+          </p:cNvSpPr>
+          <p:nvPr>
+            <p:ph type="title"/>
+          </p:nvPr>
+        </p:nvSpPr>
+        <p:spPr/>
+        <p:txBody>
+          <a:bodyPr/>
+          <a:lstStyle/>
+          <a:p>
+            <a:r>
+              <a:rPr lang="en-GB" noProof="0" dirty="0"/>
+              <a:t>Risks</a:t>
+            </a:r>
+          </a:p>
+        </p:txBody>
+      </p:sp>
+      <p:sp>
+        <p:nvSpPr>
+          <p:cNvPr id="3" name="Content Placeholder 2">
+            <a:extLst>
+              <a:ext uri="{FF2B5EF4-FFF2-40B4-BE49-F238E27FC236}">
+                <a16:creationId xmlns:a16="http://schemas.microsoft.com/office/drawing/2014/main" id="{C17987BE-3B57-8A40-AD7B-69C2BCCF3269}"/>
+              </a:ext>
+            </a:extLst>
+          </p:cNvPr>
+          <p:cNvSpPr>
+            <a:spLocks noGrp="1"/>
+          </p:cNvSpPr>
+          <p:nvPr>
+            <p:ph idx="1"/>
+          </p:nvPr>
+        </p:nvSpPr>
+        <p:spPr/>
+        <p:txBody>
+          <a:bodyPr>
+            <a:normAutofit/>
+          </a:bodyPr>
+          <a:lstStyle/>
+          <a:p>
+            <a:r>
+              <a:rPr lang="en-GB" noProof="0" dirty="0"/>
+              <a:t>Viruses and malware are harmful programs that can infect your computer or phone.</a:t>
+            </a:r>
+          </a:p>
+          <a:p>
+            <a:r>
+              <a:rPr lang="en-GB" noProof="0" dirty="0"/>
+              <a:t>Downloading files or software from unknown sources, especially on the dark web, can lead to your device being infected.</a:t>
+            </a:r>
+          </a:p>
+          <a:p>
+            <a:r>
+              <a:rPr lang="en-GB" noProof="0" dirty="0"/>
+              <a:t>Only download from trusted sites and always use antivirus protection.</a:t>
+            </a:r>
+          </a:p>
+          <a:p>
+            <a:endParaRPr lang="en-GB" noProof="0" dirty="0"/>
+          </a:p>
+          <a:p>
+            <a:endParaRPr lang="en-GB" noProof="0" dirty="0"/>
+          </a:p>
+        </p:txBody>
+      </p:sp>
+    </p:spTree>
+    <p:extLst>
+      <p:ext uri="{BB962C8B-B14F-4D97-AF65-F5344CB8AC3E}">
+        <p14:creationId xmlns:p14="http://schemas.microsoft.com/office/powerpoint/2010/main" val="3111090728"/>
+      </p:ext>
+    </p:extLst>
+  </p:cSld>
+  <p:clrMapOvr>
+    <a:masterClrMapping/>
+  </p:clrMapOvr>
+  <p:timing>
+    <p:tnLst>
+      <p:par>
+        <p:cTn id="1" dur="indefinite" restart="never" nodeType="tmRoot">
+          <p:childTnLst>
+            <p:seq concurrent="1" nextAc="seek">
+              <p:cTn id="2" dur="indefinite" nodeType="mainSeq">
+                <p:childTnLst>
+                  <p:par>
+                    <p:cTn id="3" fill="hold">
+                      <p:stCondLst>
+                        <p:cond delay="indefinite"/>
+                      </p:stCondLst>
+                      <p:childTnLst>
+                        <p:par>
+                          <p:cTn id="4" fill="hold">
+                            <p:stCondLst>
+                              <p:cond delay="0"/>
+                            </p:stCondLst>
+                            <p:childTnLst>
+                              <p:par>
+                                <p:cTn id="5" presetID="1" presetClass="entr" presetSubtype="0" fill="hold" grpId="0" nodeType="clickEffect">
+                                  <p:stCondLst>
+                                    <p:cond delay="0"/>
+                                  </p:stCondLst>
+                                  <p:childTnLst>
+                                    <p:set>
+                                      <p:cBhvr>
+                                        <p:cTn id="6" dur="1" fill="hold">
+                                          <p:stCondLst>
+                                            <p:cond delay="0"/>
+                                          </p:stCondLst>
+                                        </p:cTn>
+                                        <p:tgtEl>
+                                          <p:spTgt spid="3">
+                                            <p:txEl>
+                                              <p:pRg st="1" end="1"/>
+                                            </p:txEl>
+                                          </p:spTgt>
+                                        </p:tgtEl>
+                                        <p:attrNameLst>
+                                          <p:attrName>style.visibility</p:attrName>
+                                        </p:attrNameLst>
+                                      </p:cBhvr>
+                                      <p:to>
+                                        <p:strVal val="visible"/>
+                                      </p:to>
+                                    </p:set>
+                                  </p:childTnLst>
+                                </p:cTn>
+                              </p:par>
+                            </p:childTnLst>
+                          </p:cTn>
+                        </p:par>
+                      </p:childTnLst>
+                    </p:cTn>
+                  </p:par>
+                  <p:par>
+                    <p:cTn id="7" fill="hold">
+                      <p:stCondLst>
+                        <p:cond delay="indefinite"/>
+                      </p:stCondLst>
+                      <p:childTnLst>
+                        <p:par>
+                          <p:cTn id="8" fill="hold">
+                            <p:stCondLst>
+                              <p:cond delay="0"/>
+                            </p:stCondLst>
+                            <p:childTnLst>
+                              <p:par>
+                                <p:cTn id="9" presetID="1" presetClass="entr" presetSubtype="0" fill="hold" grpId="0" nodeType="clickEffect">
+                                  <p:stCondLst>
+                                    <p:cond delay="0"/>
+                                  </p:stCondLst>
+                                  <p:childTnLst>
+                                    <p:set>
+                                      <p:cBhvr>
+                                        <p:cTn id="10" dur="1" fill="hold">
+                                          <p:stCondLst>
+                                            <p:cond delay="0"/>
+                                          </p:stCondLst>
+                                        </p:cTn>
+                                        <p:tgtEl>
+                                          <p:spTgt spid="3">
+                                            <p:txEl>
+                                              <p:pRg st="2" end="2"/>
+                                            </p:txEl>
+                                          </p:spTgt>
+                                        </p:tgtEl>
+                                        <p:attrNameLst>
+                                          <p:attrName>style.visibility</p:attrName>
+                                        </p:attrNameLst>
+                                      </p:cBhvr>
+                                      <p:to>
+                                        <p:strVal val="visible"/>
+                                      </p:to>
+                                    </p:set>
+                                  </p:childTnLst>
+                                </p:cTn>
+                              </p:par>
+                            </p:childTnLst>
+                          </p:cTn>
+                        </p:par>
+                      </p:childTnLst>
+                    </p:cTn>
+                  </p:par>
+                </p:childTnLst>
+              </p:cTn>
+              <p:prevCondLst>
+                <p:cond evt="onPrev" delay="0">
+                  <p:tgtEl>
+                    <p:sldTgt/>
+                  </p:tgtEl>
+                </p:cond>
+              </p:prevCondLst>
+              <p:nextCondLst>
+                <p:cond evt="onNext" delay="0">
+                  <p:tgtEl>
+                    <p:sldTgt/>
+                  </p:tgtEl>
+                </p:cond>
+              </p:nextCondLst>
+            </p:seq>
+          </p:childTnLst>
+        </p:cTn>
+      </p:par>
+    </p:tnLst>
+    <p:bldLst>
+      <p:bldP spid="3" grpId="0" uiExpand="1" build="p"/>
+    </p:bldLst>
+  </p:timing>
+</p:sld>
+</file>
+
+<file path=ppt/slides/slide26.xml><?xml version="1.0" encoding="utf-8"?>
+<p:sld xmlns:a="http://schemas.openxmlformats.org/drawingml/2006/main" xmlns:r="http://schemas.openxmlformats.org/officeDocument/2006/relationships" xmlns:p="http://schemas.openxmlformats.org/presentationml/2006/main">
+  <p:cSld>
+    <p:spTree>
+      <p:nvGrpSpPr>
+        <p:cNvPr id="1" name=""/>
+        <p:cNvGrpSpPr/>
+        <p:nvPr/>
+      </p:nvGrpSpPr>
+      <p:grpSpPr>
+        <a:xfrm>
+          <a:off x="0" y="0"/>
+          <a:ext cx="0" cy="0"/>
+          <a:chOff x="0" y="0"/>
+          <a:chExt cx="0" cy="0"/>
+        </a:xfrm>
+      </p:grpSpPr>
+      <p:sp>
+        <p:nvSpPr>
+          <p:cNvPr id="2" name="Title 1">
+            <a:extLst>
+              <a:ext uri="{FF2B5EF4-FFF2-40B4-BE49-F238E27FC236}">
+                <a16:creationId xmlns:a16="http://schemas.microsoft.com/office/drawing/2014/main" id="{5EBDA3CF-9A6F-F957-0836-484DFA2F733F}"/>
+              </a:ext>
+            </a:extLst>
+          </p:cNvPr>
+          <p:cNvSpPr>
+            <a:spLocks noGrp="1"/>
+          </p:cNvSpPr>
+          <p:nvPr>
+            <p:ph type="title"/>
+          </p:nvPr>
+        </p:nvSpPr>
+        <p:spPr/>
+        <p:txBody>
+          <a:bodyPr/>
+          <a:lstStyle/>
+          <a:p>
+            <a:r>
+              <a:rPr lang="en-GB" noProof="0" dirty="0"/>
+              <a:t>Risks</a:t>
+            </a:r>
+          </a:p>
+        </p:txBody>
+      </p:sp>
+      <p:sp>
+        <p:nvSpPr>
+          <p:cNvPr id="3" name="Content Placeholder 2">
+            <a:extLst>
+              <a:ext uri="{FF2B5EF4-FFF2-40B4-BE49-F238E27FC236}">
+                <a16:creationId xmlns:a16="http://schemas.microsoft.com/office/drawing/2014/main" id="{C5FED9DA-AB31-8063-84CC-3ABCD7B91EEA}"/>
+              </a:ext>
+            </a:extLst>
+          </p:cNvPr>
+          <p:cNvSpPr>
+            <a:spLocks noGrp="1"/>
+          </p:cNvSpPr>
+          <p:nvPr>
+            <p:ph idx="1"/>
+          </p:nvPr>
+        </p:nvSpPr>
+        <p:spPr/>
+        <p:txBody>
+          <a:bodyPr>
+            <a:normAutofit lnSpcReduction="10000"/>
+          </a:bodyPr>
+          <a:lstStyle/>
+          <a:p>
+            <a:r>
+              <a:rPr lang="en-GB" noProof="0" dirty="0"/>
+              <a:t>The dark web has websites that share illegal or disturbing content, such as stolen data, fake documents or worse.</a:t>
+            </a:r>
+          </a:p>
+          <a:p>
+            <a:r>
+              <a:rPr lang="en-GB" noProof="0" dirty="0"/>
+              <a:t>Accidentally seeing or downloading illegal material can get you in serious trouble, even if you did not mean to.</a:t>
+            </a:r>
+          </a:p>
+          <a:p>
+            <a:r>
+              <a:rPr lang="en-GB" noProof="0" dirty="0"/>
+              <a:t>Stay away from unknown or suspicious sites to protect yourself.</a:t>
+            </a:r>
+          </a:p>
+          <a:p>
+            <a:endParaRPr lang="en-GB" noProof="0" dirty="0"/>
+          </a:p>
+        </p:txBody>
+      </p:sp>
+    </p:spTree>
+    <p:extLst>
+      <p:ext uri="{BB962C8B-B14F-4D97-AF65-F5344CB8AC3E}">
+        <p14:creationId xmlns:p14="http://schemas.microsoft.com/office/powerpoint/2010/main" val="857648003"/>
+      </p:ext>
+    </p:extLst>
+  </p:cSld>
+  <p:clrMapOvr>
+    <a:masterClrMapping/>
+  </p:clrMapOvr>
+  <p:timing>
+    <p:tnLst>
+      <p:par>
+        <p:cTn id="1" dur="indefinite" restart="never" nodeType="tmRoot">
+          <p:childTnLst>
+            <p:seq concurrent="1" nextAc="seek">
+              <p:cTn id="2" dur="indefinite" nodeType="mainSeq">
+                <p:childTnLst>
+                  <p:par>
+                    <p:cTn id="3" fill="hold">
+                      <p:stCondLst>
+                        <p:cond delay="indefinite"/>
+                      </p:stCondLst>
+                      <p:childTnLst>
+                        <p:par>
+                          <p:cTn id="4" fill="hold">
+                            <p:stCondLst>
+                              <p:cond delay="0"/>
+                            </p:stCondLst>
+                            <p:childTnLst>
+                              <p:par>
+                                <p:cTn id="5" presetID="1" presetClass="entr" presetSubtype="0" fill="hold" grpId="0" nodeType="clickEffect">
+                                  <p:stCondLst>
+                                    <p:cond delay="0"/>
+                                  </p:stCondLst>
+                                  <p:childTnLst>
+                                    <p:set>
+                                      <p:cBhvr>
+                                        <p:cTn id="6" dur="1" fill="hold">
+                                          <p:stCondLst>
+                                            <p:cond delay="0"/>
+                                          </p:stCondLst>
+                                        </p:cTn>
+                                        <p:tgtEl>
+                                          <p:spTgt spid="3">
+                                            <p:txEl>
+                                              <p:pRg st="1" end="1"/>
+                                            </p:txEl>
+                                          </p:spTgt>
+                                        </p:tgtEl>
+                                        <p:attrNameLst>
+                                          <p:attrName>style.visibility</p:attrName>
+                                        </p:attrNameLst>
+                                      </p:cBhvr>
+                                      <p:to>
+                                        <p:strVal val="visible"/>
+                                      </p:to>
+                                    </p:set>
+                                  </p:childTnLst>
+                                </p:cTn>
+                              </p:par>
+                            </p:childTnLst>
+                          </p:cTn>
+                        </p:par>
+                      </p:childTnLst>
+                    </p:cTn>
+                  </p:par>
+                  <p:par>
+                    <p:cTn id="7" fill="hold">
+                      <p:stCondLst>
+                        <p:cond delay="indefinite"/>
+                      </p:stCondLst>
+                      <p:childTnLst>
+                        <p:par>
+                          <p:cTn id="8" fill="hold">
+                            <p:stCondLst>
+                              <p:cond delay="0"/>
+                            </p:stCondLst>
+                            <p:childTnLst>
+                              <p:par>
+                                <p:cTn id="9" presetID="1" presetClass="entr" presetSubtype="0" fill="hold" grpId="0" nodeType="clickEffect">
+                                  <p:stCondLst>
+                                    <p:cond delay="0"/>
+                                  </p:stCondLst>
+                                  <p:childTnLst>
+                                    <p:set>
+                                      <p:cBhvr>
+                                        <p:cTn id="10" dur="1" fill="hold">
+                                          <p:stCondLst>
+                                            <p:cond delay="0"/>
+                                          </p:stCondLst>
+                                        </p:cTn>
+                                        <p:tgtEl>
+                                          <p:spTgt spid="3">
+                                            <p:txEl>
+                                              <p:pRg st="2" end="2"/>
+                                            </p:txEl>
+                                          </p:spTgt>
+                                        </p:tgtEl>
+                                        <p:attrNameLst>
+                                          <p:attrName>style.visibility</p:attrName>
+                                        </p:attrNameLst>
+                                      </p:cBhvr>
+                                      <p:to>
+                                        <p:strVal val="visible"/>
+                                      </p:to>
+                                    </p:set>
+                                  </p:childTnLst>
+                                </p:cTn>
+                              </p:par>
+                            </p:childTnLst>
+                          </p:cTn>
+                        </p:par>
+                      </p:childTnLst>
+                    </p:cTn>
+                  </p:par>
+                </p:childTnLst>
+              </p:cTn>
+              <p:prevCondLst>
+                <p:cond evt="onPrev" delay="0">
+                  <p:tgtEl>
+                    <p:sldTgt/>
+                  </p:tgtEl>
+                </p:cond>
+              </p:prevCondLst>
+              <p:nextCondLst>
+                <p:cond evt="onNext" delay="0">
+                  <p:tgtEl>
+                    <p:sldTgt/>
+                  </p:tgtEl>
+                </p:cond>
+              </p:nextCondLst>
+            </p:seq>
+          </p:childTnLst>
+        </p:cTn>
+      </p:par>
+    </p:tnLst>
+    <p:bldLst>
+      <p:bldP spid="3" grpId="0" uiExpand="1" build="p"/>
+    </p:bldLst>
+  </p:timing>
+</p:sld>
+</file>
+
+<file path=ppt/slides/slide27.xml><?xml version="1.0" encoding="utf-8"?>
+<p:sld xmlns:a="http://schemas.openxmlformats.org/drawingml/2006/main" xmlns:r="http://schemas.openxmlformats.org/officeDocument/2006/relationships" xmlns:p="http://schemas.openxmlformats.org/presentationml/2006/main">
+  <p:cSld>
+    <p:spTree>
+      <p:nvGrpSpPr>
+        <p:cNvPr id="1" name=""/>
+        <p:cNvGrpSpPr/>
+        <p:nvPr/>
+      </p:nvGrpSpPr>
+      <p:grpSpPr>
+        <a:xfrm>
+          <a:off x="0" y="0"/>
+          <a:ext cx="0" cy="0"/>
+          <a:chOff x="0" y="0"/>
+          <a:chExt cx="0" cy="0"/>
+        </a:xfrm>
+      </p:grpSpPr>
+      <p:sp>
+        <p:nvSpPr>
+          <p:cNvPr id="2" name="Title 1">
+            <a:extLst>
+              <a:ext uri="{FF2B5EF4-FFF2-40B4-BE49-F238E27FC236}">
+                <a16:creationId xmlns:a16="http://schemas.microsoft.com/office/drawing/2014/main" id="{9D4FB3BA-16B9-7F9B-C452-2CAF20C3E239}"/>
+              </a:ext>
+            </a:extLst>
+          </p:cNvPr>
+          <p:cNvSpPr>
+            <a:spLocks noGrp="1"/>
+          </p:cNvSpPr>
+          <p:nvPr>
+            <p:ph type="title"/>
+          </p:nvPr>
+        </p:nvSpPr>
+        <p:spPr/>
+        <p:txBody>
+          <a:bodyPr/>
+          <a:lstStyle/>
+          <a:p>
+            <a:r>
+              <a:rPr lang="en-GB" noProof="0" dirty="0"/>
+              <a:t>Risks</a:t>
+            </a:r>
+          </a:p>
+        </p:txBody>
+      </p:sp>
+      <p:sp>
+        <p:nvSpPr>
+          <p:cNvPr id="3" name="Content Placeholder 2">
+            <a:extLst>
+              <a:ext uri="{FF2B5EF4-FFF2-40B4-BE49-F238E27FC236}">
+                <a16:creationId xmlns:a16="http://schemas.microsoft.com/office/drawing/2014/main" id="{643FD534-B31D-06F3-D3E2-19AA65F9F6A6}"/>
+              </a:ext>
+            </a:extLst>
+          </p:cNvPr>
+          <p:cNvSpPr>
+            <a:spLocks noGrp="1"/>
+          </p:cNvSpPr>
+          <p:nvPr>
+            <p:ph idx="1"/>
+          </p:nvPr>
+        </p:nvSpPr>
+        <p:spPr/>
+        <p:txBody>
+          <a:bodyPr>
+            <a:normAutofit/>
+          </a:bodyPr>
+          <a:lstStyle/>
+          <a:p>
+            <a:r>
+              <a:rPr lang="en-GB" noProof="0" dirty="0"/>
+              <a:t>Cybercriminals on the dark web might try to target you if they get your information.</a:t>
+            </a:r>
+          </a:p>
+          <a:p>
+            <a:r>
+              <a:rPr lang="en-GB" noProof="0" dirty="0"/>
+              <a:t>They could try to hack your accounts, steal your identity or trick you into giving them money.</a:t>
+            </a:r>
+          </a:p>
+          <a:p>
+            <a:r>
+              <a:rPr lang="en-GB" noProof="0" dirty="0"/>
+              <a:t>Protect your personal details and never share them with strangers online.</a:t>
+            </a:r>
+          </a:p>
+          <a:p>
+            <a:endParaRPr lang="en-GB" noProof="0" dirty="0"/>
+          </a:p>
+          <a:p>
+            <a:endParaRPr lang="en-GB" noProof="0" dirty="0"/>
+          </a:p>
+        </p:txBody>
+      </p:sp>
+    </p:spTree>
+    <p:extLst>
+      <p:ext uri="{BB962C8B-B14F-4D97-AF65-F5344CB8AC3E}">
+        <p14:creationId xmlns:p14="http://schemas.microsoft.com/office/powerpoint/2010/main" val="1341722828"/>
+      </p:ext>
+    </p:extLst>
+  </p:cSld>
+  <p:clrMapOvr>
+    <a:masterClrMapping/>
+  </p:clrMapOvr>
+  <p:timing>
+    <p:tnLst>
+      <p:par>
+        <p:cTn id="1" dur="indefinite" restart="never" nodeType="tmRoot">
+          <p:childTnLst>
+            <p:seq concurrent="1" nextAc="seek">
+              <p:cTn id="2" dur="indefinite" nodeType="mainSeq">
+                <p:childTnLst>
+                  <p:par>
+                    <p:cTn id="3" fill="hold">
+                      <p:stCondLst>
+                        <p:cond delay="indefinite"/>
+                      </p:stCondLst>
+                      <p:childTnLst>
+                        <p:par>
+                          <p:cTn id="4" fill="hold">
+                            <p:stCondLst>
+                              <p:cond delay="0"/>
+                            </p:stCondLst>
+                            <p:childTnLst>
+                              <p:par>
+                                <p:cTn id="5" presetID="1" presetClass="entr" presetSubtype="0" fill="hold" grpId="0" nodeType="clickEffect">
+                                  <p:stCondLst>
+                                    <p:cond delay="0"/>
+                                  </p:stCondLst>
+                                  <p:childTnLst>
+                                    <p:set>
+                                      <p:cBhvr>
+                                        <p:cTn id="6" dur="1" fill="hold">
+                                          <p:stCondLst>
+                                            <p:cond delay="0"/>
+                                          </p:stCondLst>
+                                        </p:cTn>
+                                        <p:tgtEl>
+                                          <p:spTgt spid="3">
+                                            <p:txEl>
+                                              <p:pRg st="1" end="1"/>
+                                            </p:txEl>
+                                          </p:spTgt>
+                                        </p:tgtEl>
+                                        <p:attrNameLst>
+                                          <p:attrName>style.visibility</p:attrName>
+                                        </p:attrNameLst>
+                                      </p:cBhvr>
+                                      <p:to>
+                                        <p:strVal val="visible"/>
+                                      </p:to>
+                                    </p:set>
+                                  </p:childTnLst>
+                                </p:cTn>
+                              </p:par>
+                            </p:childTnLst>
+                          </p:cTn>
+                        </p:par>
+                      </p:childTnLst>
+                    </p:cTn>
+                  </p:par>
+                  <p:par>
+                    <p:cTn id="7" fill="hold">
+                      <p:stCondLst>
+                        <p:cond delay="indefinite"/>
+                      </p:stCondLst>
+                      <p:childTnLst>
+                        <p:par>
+                          <p:cTn id="8" fill="hold">
+                            <p:stCondLst>
+                              <p:cond delay="0"/>
+                            </p:stCondLst>
+                            <p:childTnLst>
+                              <p:par>
+                                <p:cTn id="9" presetID="1" presetClass="entr" presetSubtype="0" fill="hold" grpId="0" nodeType="clickEffect">
+                                  <p:stCondLst>
+                                    <p:cond delay="0"/>
+                                  </p:stCondLst>
+                                  <p:childTnLst>
+                                    <p:set>
+                                      <p:cBhvr>
+                                        <p:cTn id="10" dur="1" fill="hold">
+                                          <p:stCondLst>
+                                            <p:cond delay="0"/>
+                                          </p:stCondLst>
+                                        </p:cTn>
+                                        <p:tgtEl>
+                                          <p:spTgt spid="3">
+                                            <p:txEl>
+                                              <p:pRg st="2" end="2"/>
+                                            </p:txEl>
+                                          </p:spTgt>
+                                        </p:tgtEl>
+                                        <p:attrNameLst>
+                                          <p:attrName>style.visibility</p:attrName>
+                                        </p:attrNameLst>
+                                      </p:cBhvr>
+                                      <p:to>
+                                        <p:strVal val="visible"/>
+                                      </p:to>
+                                    </p:set>
+                                  </p:childTnLst>
+                                </p:cTn>
+                              </p:par>
+                            </p:childTnLst>
+                          </p:cTn>
+                        </p:par>
+                      </p:childTnLst>
+                    </p:cTn>
+                  </p:par>
+                </p:childTnLst>
+              </p:cTn>
+              <p:prevCondLst>
+                <p:cond evt="onPrev" delay="0">
+                  <p:tgtEl>
+                    <p:sldTgt/>
+                  </p:tgtEl>
+                </p:cond>
+              </p:prevCondLst>
+              <p:nextCondLst>
+                <p:cond evt="onNext" delay="0">
+                  <p:tgtEl>
+                    <p:sldTgt/>
+                  </p:tgtEl>
+                </p:cond>
+              </p:nextCondLst>
+            </p:seq>
+          </p:childTnLst>
+        </p:cTn>
+      </p:par>
+    </p:tnLst>
+    <p:bldLst>
+      <p:bldP spid="3" grpId="0" uiExpand="1" build="p"/>
+    </p:bldLst>
+  </p:timing>
+</p:sld>
+</file>
+
+<file path=ppt/slides/slide28.xml><?xml version="1.0" encoding="utf-8"?>
+<p:sld xmlns:a="http://schemas.openxmlformats.org/drawingml/2006/main" xmlns:r="http://schemas.openxmlformats.org/officeDocument/2006/relationships" xmlns:p="http://schemas.openxmlformats.org/presentationml/2006/main">
+  <p:cSld>
+    <p:spTree>
+      <p:nvGrpSpPr>
+        <p:cNvPr id="1" name=""/>
+        <p:cNvGrpSpPr/>
+        <p:nvPr/>
+      </p:nvGrpSpPr>
+      <p:grpSpPr>
+        <a:xfrm>
+          <a:off x="0" y="0"/>
+          <a:ext cx="0" cy="0"/>
+          <a:chOff x="0" y="0"/>
+          <a:chExt cx="0" cy="0"/>
+        </a:xfrm>
+      </p:grpSpPr>
+      <p:sp>
+        <p:nvSpPr>
+          <p:cNvPr id="2" name="Title 1">
+            <a:extLst>
+              <a:ext uri="{FF2B5EF4-FFF2-40B4-BE49-F238E27FC236}">
+                <a16:creationId xmlns:a16="http://schemas.microsoft.com/office/drawing/2014/main" id="{4A45EBF5-AD27-7CF2-B695-2E2E513B0927}"/>
+              </a:ext>
+            </a:extLst>
+          </p:cNvPr>
+          <p:cNvSpPr>
+            <a:spLocks noGrp="1"/>
+          </p:cNvSpPr>
+          <p:nvPr>
+            <p:ph type="title"/>
+          </p:nvPr>
+        </p:nvSpPr>
+        <p:spPr/>
+        <p:txBody>
+          <a:bodyPr/>
+          <a:lstStyle/>
+          <a:p>
+            <a:r>
+              <a:rPr lang="en-GB" noProof="0" dirty="0"/>
+              <a:t>Risks</a:t>
+            </a:r>
+          </a:p>
+        </p:txBody>
+      </p:sp>
+      <p:sp>
+        <p:nvSpPr>
+          <p:cNvPr id="3" name="Content Placeholder 2">
+            <a:extLst>
+              <a:ext uri="{FF2B5EF4-FFF2-40B4-BE49-F238E27FC236}">
+                <a16:creationId xmlns:a16="http://schemas.microsoft.com/office/drawing/2014/main" id="{40FB0E32-ED7C-32EC-92A1-B8142B63B581}"/>
+              </a:ext>
+            </a:extLst>
+          </p:cNvPr>
+          <p:cNvSpPr>
+            <a:spLocks noGrp="1"/>
+          </p:cNvSpPr>
+          <p:nvPr>
+            <p:ph idx="1"/>
+          </p:nvPr>
+        </p:nvSpPr>
+        <p:spPr/>
+        <p:txBody>
+          <a:bodyPr>
+            <a:normAutofit/>
+          </a:bodyPr>
+          <a:lstStyle/>
+          <a:p>
+            <a:r>
+              <a:rPr lang="en-GB" noProof="0" dirty="0"/>
+              <a:t>Law enforcement agencies monitor the dark web to catch illegal activity.</a:t>
+            </a:r>
+          </a:p>
+          <a:p>
+            <a:r>
+              <a:rPr lang="en-GB" noProof="0" dirty="0"/>
+              <a:t>If you access or download illegal content, even by accident, you could be investigated or face serious consequences.</a:t>
+            </a:r>
+          </a:p>
+          <a:p>
+            <a:r>
+              <a:rPr lang="en-GB" noProof="0" dirty="0"/>
+              <a:t>Breaking the law online is still breaking the law. Always use the internet safely and responsibly.</a:t>
+            </a:r>
+          </a:p>
+        </p:txBody>
+      </p:sp>
+    </p:spTree>
+    <p:extLst>
+      <p:ext uri="{BB962C8B-B14F-4D97-AF65-F5344CB8AC3E}">
+        <p14:creationId xmlns:p14="http://schemas.microsoft.com/office/powerpoint/2010/main" val="2750668128"/>
+      </p:ext>
+    </p:extLst>
+  </p:cSld>
+  <p:clrMapOvr>
+    <a:masterClrMapping/>
+  </p:clrMapOvr>
+  <p:timing>
+    <p:tnLst>
+      <p:par>
+        <p:cTn id="1" dur="indefinite" restart="never" nodeType="tmRoot">
+          <p:childTnLst>
+            <p:seq concurrent="1" nextAc="seek">
+              <p:cTn id="2" dur="indefinite" nodeType="mainSeq">
+                <p:childTnLst>
+                  <p:par>
+                    <p:cTn id="3" fill="hold">
+                      <p:stCondLst>
+                        <p:cond delay="indefinite"/>
+                      </p:stCondLst>
+                      <p:childTnLst>
+                        <p:par>
+                          <p:cTn id="4" fill="hold">
+                            <p:stCondLst>
+                              <p:cond delay="0"/>
+                            </p:stCondLst>
+                            <p:childTnLst>
+                              <p:par>
+                                <p:cTn id="5" presetID="1" presetClass="entr" presetSubtype="0" fill="hold" grpId="0" nodeType="clickEffect">
+                                  <p:stCondLst>
+                                    <p:cond delay="0"/>
+                                  </p:stCondLst>
+                                  <p:childTnLst>
+                                    <p:set>
+                                      <p:cBhvr>
+                                        <p:cTn id="6" dur="1" fill="hold">
+                                          <p:stCondLst>
+                                            <p:cond delay="0"/>
+                                          </p:stCondLst>
+                                        </p:cTn>
+                                        <p:tgtEl>
+                                          <p:spTgt spid="3">
+                                            <p:txEl>
+                                              <p:pRg st="1" end="1"/>
+                                            </p:txEl>
+                                          </p:spTgt>
+                                        </p:tgtEl>
+                                        <p:attrNameLst>
+                                          <p:attrName>style.visibility</p:attrName>
+                                        </p:attrNameLst>
+                                      </p:cBhvr>
+                                      <p:to>
+                                        <p:strVal val="visible"/>
+                                      </p:to>
+                                    </p:set>
+                                  </p:childTnLst>
+                                </p:cTn>
+                              </p:par>
+                            </p:childTnLst>
+                          </p:cTn>
+                        </p:par>
+                      </p:childTnLst>
+                    </p:cTn>
+                  </p:par>
+                  <p:par>
+                    <p:cTn id="7" fill="hold">
+                      <p:stCondLst>
+                        <p:cond delay="indefinite"/>
+                      </p:stCondLst>
+                      <p:childTnLst>
+                        <p:par>
+                          <p:cTn id="8" fill="hold">
+                            <p:stCondLst>
+                              <p:cond delay="0"/>
+                            </p:stCondLst>
+                            <p:childTnLst>
+                              <p:par>
+                                <p:cTn id="9" presetID="1" presetClass="entr" presetSubtype="0" fill="hold" grpId="0" nodeType="clickEffect">
+                                  <p:stCondLst>
+                                    <p:cond delay="0"/>
+                                  </p:stCondLst>
+                                  <p:childTnLst>
+                                    <p:set>
+                                      <p:cBhvr>
+                                        <p:cTn id="10" dur="1" fill="hold">
+                                          <p:stCondLst>
+                                            <p:cond delay="0"/>
+                                          </p:stCondLst>
+                                        </p:cTn>
+                                        <p:tgtEl>
+                                          <p:spTgt spid="3">
+                                            <p:txEl>
+                                              <p:pRg st="2" end="2"/>
+                                            </p:txEl>
+                                          </p:spTgt>
+                                        </p:tgtEl>
+                                        <p:attrNameLst>
+                                          <p:attrName>style.visibility</p:attrName>
+                                        </p:attrNameLst>
+                                      </p:cBhvr>
+                                      <p:to>
+                                        <p:strVal val="visible"/>
+                                      </p:to>
+                                    </p:set>
+                                  </p:childTnLst>
+                                </p:cTn>
+                              </p:par>
+                            </p:childTnLst>
+                          </p:cTn>
+                        </p:par>
+                      </p:childTnLst>
+                    </p:cTn>
+                  </p:par>
+                </p:childTnLst>
+              </p:cTn>
+              <p:prevCondLst>
+                <p:cond evt="onPrev" delay="0">
+                  <p:tgtEl>
+                    <p:sldTgt/>
+                  </p:tgtEl>
+                </p:cond>
+              </p:prevCondLst>
+              <p:nextCondLst>
+                <p:cond evt="onNext" delay="0">
+                  <p:tgtEl>
+                    <p:sldTgt/>
+                  </p:tgtEl>
+                </p:cond>
+              </p:nextCondLst>
+            </p:seq>
+          </p:childTnLst>
+        </p:cTn>
+      </p:par>
+    </p:tnLst>
+    <p:bldLst>
+      <p:bldP spid="3" grpId="0" uiExpand="1" build="p"/>
+    </p:bldLst>
+  </p:timing>
+</p:sld>
+</file>
+
+<file path=ppt/slides/slide29.xml><?xml version="1.0" encoding="utf-8"?>
+<p:sld xmlns:a="http://schemas.openxmlformats.org/drawingml/2006/main" xmlns:r="http://schemas.openxmlformats.org/officeDocument/2006/relationships" xmlns:p="http://schemas.openxmlformats.org/presentationml/2006/main">
+  <p:cSld>
+    <p:spTree>
+      <p:nvGrpSpPr>
+        <p:cNvPr id="1" name="">
+          <a:extLst>
+            <a:ext uri="{FF2B5EF4-FFF2-40B4-BE49-F238E27FC236}">
+              <a16:creationId xmlns:a16="http://schemas.microsoft.com/office/drawing/2014/main" id="{CAE468A0-223D-8D46-4290-45B3A94B1C4D}"/>
+            </a:ext>
+          </a:extLst>
+        </p:cNvPr>
+        <p:cNvGrpSpPr/>
+        <p:nvPr/>
+      </p:nvGrpSpPr>
+      <p:grpSpPr>
+        <a:xfrm>
+          <a:off x="0" y="0"/>
+          <a:ext cx="0" cy="0"/>
+          <a:chOff x="0" y="0"/>
+          <a:chExt cx="0" cy="0"/>
+        </a:xfrm>
+      </p:grpSpPr>
+      <p:sp>
+        <p:nvSpPr>
+          <p:cNvPr id="5" name="Content Placeholder 4">
+            <a:extLst>
+              <a:ext uri="{FF2B5EF4-FFF2-40B4-BE49-F238E27FC236}">
+                <a16:creationId xmlns:a16="http://schemas.microsoft.com/office/drawing/2014/main" id="{FE0E0E6B-FEDE-7710-E8BF-1836BC5E18FA}"/>
+              </a:ext>
+            </a:extLst>
+          </p:cNvPr>
+          <p:cNvSpPr>
+            <a:spLocks noGrp="1"/>
+          </p:cNvSpPr>
+          <p:nvPr>
+            <p:ph idx="1"/>
+          </p:nvPr>
+        </p:nvSpPr>
+        <p:spPr/>
+        <p:txBody>
+          <a:bodyPr>
+            <a:normAutofit/>
+          </a:bodyPr>
+          <a:lstStyle/>
+          <a:p>
+            <a:r>
+              <a:rPr lang="en-GB" noProof="0" dirty="0"/>
+              <a:t>How would you feel if your online activities were always being watched, even if you had nothing to hide?</a:t>
+            </a:r>
+          </a:p>
+          <a:p>
+            <a:r>
+              <a:rPr lang="en-GB" noProof="0" dirty="0"/>
+              <a:t>Is it fair to punish everyone for the actions of a few criminals online? Why or why not?</a:t>
+            </a:r>
+          </a:p>
+        </p:txBody>
+      </p:sp>
+      <p:sp>
+        <p:nvSpPr>
+          <p:cNvPr id="4" name="Title 3">
+            <a:extLst>
+              <a:ext uri="{FF2B5EF4-FFF2-40B4-BE49-F238E27FC236}">
+                <a16:creationId xmlns:a16="http://schemas.microsoft.com/office/drawing/2014/main" id="{EFD673A9-5032-8EB4-44C7-4B313223F025}"/>
+              </a:ext>
+            </a:extLst>
+          </p:cNvPr>
+          <p:cNvSpPr>
+            <a:spLocks noGrp="1"/>
+          </p:cNvSpPr>
+          <p:nvPr>
+            <p:ph type="title"/>
+          </p:nvPr>
+        </p:nvSpPr>
+        <p:spPr/>
+        <p:txBody>
+          <a:bodyPr/>
+          <a:lstStyle/>
+          <a:p>
+            <a:r>
+              <a:rPr lang="en-GB" noProof="0" dirty="0"/>
+              <a:t>Risks</a:t>
+            </a:r>
+          </a:p>
+        </p:txBody>
+      </p:sp>
+    </p:spTree>
+    <p:extLst>
+      <p:ext uri="{BB962C8B-B14F-4D97-AF65-F5344CB8AC3E}">
+        <p14:creationId xmlns:p14="http://schemas.microsoft.com/office/powerpoint/2010/main" val="1175043999"/>
+      </p:ext>
+    </p:extLst>
+  </p:cSld>
+  <p:clrMapOvr>
+    <a:masterClrMapping/>
+  </p:clrMapOvr>
+  <p:timing>
+    <p:tnLst>
+      <p:par>
+        <p:cTn id="1" dur="indefinite" restart="never" nodeType="tmRoot">
+          <p:childTnLst>
+            <p:seq concurrent="1" nextAc="seek">
+              <p:cTn id="2" dur="indefinite" nodeType="mainSeq">
+                <p:childTnLst>
+                  <p:par>
+                    <p:cTn id="3" fill="hold">
+                      <p:stCondLst>
+                        <p:cond delay="indefinite"/>
+                      </p:stCondLst>
+                      <p:childTnLst>
+                        <p:par>
+                          <p:cTn id="4" fill="hold">
+                            <p:stCondLst>
+                              <p:cond delay="0"/>
+                            </p:stCondLst>
+                            <p:childTnLst>
+                              <p:par>
+                                <p:cTn id="5" presetID="1" presetClass="entr" presetSubtype="0" fill="hold" grpId="0" nodeType="clickEffect">
+                                  <p:stCondLst>
+                                    <p:cond delay="0"/>
+                                  </p:stCondLst>
+                                  <p:childTnLst>
+                                    <p:set>
+                                      <p:cBhvr>
+                                        <p:cTn id="6" dur="1" fill="hold">
+                                          <p:stCondLst>
+                                            <p:cond delay="0"/>
+                                          </p:stCondLst>
+                                        </p:cTn>
+                                        <p:tgtEl>
+                                          <p:spTgt spid="5">
+                                            <p:txEl>
+                                              <p:pRg st="1" end="1"/>
                                             </p:txEl>
                                           </p:spTgt>
                                         </p:tgtEl>
@@ -12295,1630 +11833,6 @@
       </p:grpSpPr>
       <p:sp>
         <p:nvSpPr>
-          <p:cNvPr id="2" name="Title 1">
-            <a:extLst>
-              <a:ext uri="{FF2B5EF4-FFF2-40B4-BE49-F238E27FC236}">
-                <a16:creationId xmlns:a16="http://schemas.microsoft.com/office/drawing/2014/main" id="{BB32BE76-7756-B7F7-4722-D1EF2E04C7B4}"/>
-              </a:ext>
-            </a:extLst>
-          </p:cNvPr>
-          <p:cNvSpPr>
-            <a:spLocks noGrp="1"/>
-          </p:cNvSpPr>
-          <p:nvPr>
-            <p:ph type="title"/>
-          </p:nvPr>
-        </p:nvSpPr>
-        <p:spPr/>
-        <p:txBody>
-          <a:bodyPr/>
-          <a:lstStyle/>
-          <a:p>
-            <a:r>
-              <a:rPr lang="en-GB" noProof="0" dirty="0"/>
-              <a:t>Risks</a:t>
-            </a:r>
-          </a:p>
-        </p:txBody>
-      </p:sp>
-      <p:sp>
-        <p:nvSpPr>
-          <p:cNvPr id="3" name="Content Placeholder 2">
-            <a:extLst>
-              <a:ext uri="{FF2B5EF4-FFF2-40B4-BE49-F238E27FC236}">
-                <a16:creationId xmlns:a16="http://schemas.microsoft.com/office/drawing/2014/main" id="{C17987BE-3B57-8A40-AD7B-69C2BCCF3269}"/>
-              </a:ext>
-            </a:extLst>
-          </p:cNvPr>
-          <p:cNvSpPr>
-            <a:spLocks noGrp="1"/>
-          </p:cNvSpPr>
-          <p:nvPr>
-            <p:ph idx="1"/>
-          </p:nvPr>
-        </p:nvSpPr>
-        <p:spPr/>
-        <p:txBody>
-          <a:bodyPr>
-            <a:normAutofit/>
-          </a:bodyPr>
-          <a:lstStyle/>
-          <a:p>
-            <a:r>
-              <a:rPr lang="en-GB" noProof="0" dirty="0"/>
-              <a:t>Viruses and malware are harmful programs that can infect your computer or phone.</a:t>
-            </a:r>
-          </a:p>
-          <a:p>
-            <a:r>
-              <a:rPr lang="en-GB" noProof="0" dirty="0"/>
-              <a:t>Downloading files or software from unknown sources, especially on the dark web, can lead to your device being infected.</a:t>
-            </a:r>
-          </a:p>
-          <a:p>
-            <a:r>
-              <a:rPr lang="en-GB" noProof="0" dirty="0"/>
-              <a:t>Only download from trusted sites and always use antivirus protection.</a:t>
-            </a:r>
-          </a:p>
-          <a:p>
-            <a:endParaRPr lang="en-GB" noProof="0" dirty="0"/>
-          </a:p>
-          <a:p>
-            <a:endParaRPr lang="en-GB" noProof="0" dirty="0"/>
-          </a:p>
-        </p:txBody>
-      </p:sp>
-    </p:spTree>
-    <p:extLst>
-      <p:ext uri="{BB962C8B-B14F-4D97-AF65-F5344CB8AC3E}">
-        <p14:creationId xmlns:p14="http://schemas.microsoft.com/office/powerpoint/2010/main" val="3111090728"/>
-      </p:ext>
-    </p:extLst>
-  </p:cSld>
-  <p:clrMapOvr>
-    <a:masterClrMapping/>
-  </p:clrMapOvr>
-  <p:timing>
-    <p:tnLst>
-      <p:par>
-        <p:cTn id="1" dur="indefinite" restart="never" nodeType="tmRoot">
-          <p:childTnLst>
-            <p:seq concurrent="1" nextAc="seek">
-              <p:cTn id="2" dur="indefinite" nodeType="mainSeq">
-                <p:childTnLst>
-                  <p:par>
-                    <p:cTn id="3" fill="hold">
-                      <p:stCondLst>
-                        <p:cond delay="indefinite"/>
-                      </p:stCondLst>
-                      <p:childTnLst>
-                        <p:par>
-                          <p:cTn id="4" fill="hold">
-                            <p:stCondLst>
-                              <p:cond delay="0"/>
-                            </p:stCondLst>
-                            <p:childTnLst>
-                              <p:par>
-                                <p:cTn id="5" presetID="1" presetClass="entr" presetSubtype="0" fill="hold" grpId="0" nodeType="clickEffect">
-                                  <p:stCondLst>
-                                    <p:cond delay="0"/>
-                                  </p:stCondLst>
-                                  <p:childTnLst>
-                                    <p:set>
-                                      <p:cBhvr>
-                                        <p:cTn id="6" dur="1" fill="hold">
-                                          <p:stCondLst>
-                                            <p:cond delay="0"/>
-                                          </p:stCondLst>
-                                        </p:cTn>
-                                        <p:tgtEl>
-                                          <p:spTgt spid="3">
-                                            <p:txEl>
-                                              <p:pRg st="1" end="1"/>
-                                            </p:txEl>
-                                          </p:spTgt>
-                                        </p:tgtEl>
-                                        <p:attrNameLst>
-                                          <p:attrName>style.visibility</p:attrName>
-                                        </p:attrNameLst>
-                                      </p:cBhvr>
-                                      <p:to>
-                                        <p:strVal val="visible"/>
-                                      </p:to>
-                                    </p:set>
-                                  </p:childTnLst>
-                                </p:cTn>
-                              </p:par>
-                            </p:childTnLst>
-                          </p:cTn>
-                        </p:par>
-                      </p:childTnLst>
-                    </p:cTn>
-                  </p:par>
-                  <p:par>
-                    <p:cTn id="7" fill="hold">
-                      <p:stCondLst>
-                        <p:cond delay="indefinite"/>
-                      </p:stCondLst>
-                      <p:childTnLst>
-                        <p:par>
-                          <p:cTn id="8" fill="hold">
-                            <p:stCondLst>
-                              <p:cond delay="0"/>
-                            </p:stCondLst>
-                            <p:childTnLst>
-                              <p:par>
-                                <p:cTn id="9" presetID="1" presetClass="entr" presetSubtype="0" fill="hold" grpId="0" nodeType="clickEffect">
-                                  <p:stCondLst>
-                                    <p:cond delay="0"/>
-                                  </p:stCondLst>
-                                  <p:childTnLst>
-                                    <p:set>
-                                      <p:cBhvr>
-                                        <p:cTn id="10" dur="1" fill="hold">
-                                          <p:stCondLst>
-                                            <p:cond delay="0"/>
-                                          </p:stCondLst>
-                                        </p:cTn>
-                                        <p:tgtEl>
-                                          <p:spTgt spid="3">
-                                            <p:txEl>
-                                              <p:pRg st="2" end="2"/>
-                                            </p:txEl>
-                                          </p:spTgt>
-                                        </p:tgtEl>
-                                        <p:attrNameLst>
-                                          <p:attrName>style.visibility</p:attrName>
-                                        </p:attrNameLst>
-                                      </p:cBhvr>
-                                      <p:to>
-                                        <p:strVal val="visible"/>
-                                      </p:to>
-                                    </p:set>
-                                  </p:childTnLst>
-                                </p:cTn>
-                              </p:par>
-                            </p:childTnLst>
-                          </p:cTn>
-                        </p:par>
-                      </p:childTnLst>
-                    </p:cTn>
-                  </p:par>
-                </p:childTnLst>
-              </p:cTn>
-              <p:prevCondLst>
-                <p:cond evt="onPrev" delay="0">
-                  <p:tgtEl>
-                    <p:sldTgt/>
-                  </p:tgtEl>
-                </p:cond>
-              </p:prevCondLst>
-              <p:nextCondLst>
-                <p:cond evt="onNext" delay="0">
-                  <p:tgtEl>
-                    <p:sldTgt/>
-                  </p:tgtEl>
-                </p:cond>
-              </p:nextCondLst>
-            </p:seq>
-          </p:childTnLst>
-        </p:cTn>
-      </p:par>
-    </p:tnLst>
-    <p:bldLst>
-      <p:bldP spid="3" grpId="0" uiExpand="1" build="p"/>
-    </p:bldLst>
-  </p:timing>
-</p:sld>
-</file>
-
-<file path=ppt/slides/slide31.xml><?xml version="1.0" encoding="utf-8"?>
-<p:sld xmlns:a="http://schemas.openxmlformats.org/drawingml/2006/main" xmlns:r="http://schemas.openxmlformats.org/officeDocument/2006/relationships" xmlns:p="http://schemas.openxmlformats.org/presentationml/2006/main">
-  <p:cSld>
-    <p:spTree>
-      <p:nvGrpSpPr>
-        <p:cNvPr id="1" name=""/>
-        <p:cNvGrpSpPr/>
-        <p:nvPr/>
-      </p:nvGrpSpPr>
-      <p:grpSpPr>
-        <a:xfrm>
-          <a:off x="0" y="0"/>
-          <a:ext cx="0" cy="0"/>
-          <a:chOff x="0" y="0"/>
-          <a:chExt cx="0" cy="0"/>
-        </a:xfrm>
-      </p:grpSpPr>
-      <p:sp>
-        <p:nvSpPr>
-          <p:cNvPr id="2" name="Title 1">
-            <a:extLst>
-              <a:ext uri="{FF2B5EF4-FFF2-40B4-BE49-F238E27FC236}">
-                <a16:creationId xmlns:a16="http://schemas.microsoft.com/office/drawing/2014/main" id="{5EBDA3CF-9A6F-F957-0836-484DFA2F733F}"/>
-              </a:ext>
-            </a:extLst>
-          </p:cNvPr>
-          <p:cNvSpPr>
-            <a:spLocks noGrp="1"/>
-          </p:cNvSpPr>
-          <p:nvPr>
-            <p:ph type="title"/>
-          </p:nvPr>
-        </p:nvSpPr>
-        <p:spPr/>
-        <p:txBody>
-          <a:bodyPr/>
-          <a:lstStyle/>
-          <a:p>
-            <a:r>
-              <a:rPr lang="en-GB" noProof="0" dirty="0"/>
-              <a:t>Risks</a:t>
-            </a:r>
-          </a:p>
-        </p:txBody>
-      </p:sp>
-      <p:sp>
-        <p:nvSpPr>
-          <p:cNvPr id="3" name="Content Placeholder 2">
-            <a:extLst>
-              <a:ext uri="{FF2B5EF4-FFF2-40B4-BE49-F238E27FC236}">
-                <a16:creationId xmlns:a16="http://schemas.microsoft.com/office/drawing/2014/main" id="{C5FED9DA-AB31-8063-84CC-3ABCD7B91EEA}"/>
-              </a:ext>
-            </a:extLst>
-          </p:cNvPr>
-          <p:cNvSpPr>
-            <a:spLocks noGrp="1"/>
-          </p:cNvSpPr>
-          <p:nvPr>
-            <p:ph idx="1"/>
-          </p:nvPr>
-        </p:nvSpPr>
-        <p:spPr/>
-        <p:txBody>
-          <a:bodyPr>
-            <a:normAutofit lnSpcReduction="10000"/>
-          </a:bodyPr>
-          <a:lstStyle/>
-          <a:p>
-            <a:r>
-              <a:rPr lang="en-GB" noProof="0" dirty="0"/>
-              <a:t>The dark web has websites that share illegal or disturbing content, such as stolen data, fake documents or worse.</a:t>
-            </a:r>
-          </a:p>
-          <a:p>
-            <a:r>
-              <a:rPr lang="en-GB" noProof="0" dirty="0"/>
-              <a:t>Accidentally seeing or downloading illegal material can get you in serious trouble, even if you did not mean to.</a:t>
-            </a:r>
-          </a:p>
-          <a:p>
-            <a:r>
-              <a:rPr lang="en-GB" noProof="0" dirty="0"/>
-              <a:t>Stay away from unknown or suspicious sites to protect yourself.</a:t>
-            </a:r>
-          </a:p>
-          <a:p>
-            <a:endParaRPr lang="en-GB" noProof="0" dirty="0"/>
-          </a:p>
-        </p:txBody>
-      </p:sp>
-    </p:spTree>
-    <p:extLst>
-      <p:ext uri="{BB962C8B-B14F-4D97-AF65-F5344CB8AC3E}">
-        <p14:creationId xmlns:p14="http://schemas.microsoft.com/office/powerpoint/2010/main" val="857648003"/>
-      </p:ext>
-    </p:extLst>
-  </p:cSld>
-  <p:clrMapOvr>
-    <a:masterClrMapping/>
-  </p:clrMapOvr>
-  <p:timing>
-    <p:tnLst>
-      <p:par>
-        <p:cTn id="1" dur="indefinite" restart="never" nodeType="tmRoot">
-          <p:childTnLst>
-            <p:seq concurrent="1" nextAc="seek">
-              <p:cTn id="2" dur="indefinite" nodeType="mainSeq">
-                <p:childTnLst>
-                  <p:par>
-                    <p:cTn id="3" fill="hold">
-                      <p:stCondLst>
-                        <p:cond delay="indefinite"/>
-                      </p:stCondLst>
-                      <p:childTnLst>
-                        <p:par>
-                          <p:cTn id="4" fill="hold">
-                            <p:stCondLst>
-                              <p:cond delay="0"/>
-                            </p:stCondLst>
-                            <p:childTnLst>
-                              <p:par>
-                                <p:cTn id="5" presetID="1" presetClass="entr" presetSubtype="0" fill="hold" grpId="0" nodeType="clickEffect">
-                                  <p:stCondLst>
-                                    <p:cond delay="0"/>
-                                  </p:stCondLst>
-                                  <p:childTnLst>
-                                    <p:set>
-                                      <p:cBhvr>
-                                        <p:cTn id="6" dur="1" fill="hold">
-                                          <p:stCondLst>
-                                            <p:cond delay="0"/>
-                                          </p:stCondLst>
-                                        </p:cTn>
-                                        <p:tgtEl>
-                                          <p:spTgt spid="3">
-                                            <p:txEl>
-                                              <p:pRg st="1" end="1"/>
-                                            </p:txEl>
-                                          </p:spTgt>
-                                        </p:tgtEl>
-                                        <p:attrNameLst>
-                                          <p:attrName>style.visibility</p:attrName>
-                                        </p:attrNameLst>
-                                      </p:cBhvr>
-                                      <p:to>
-                                        <p:strVal val="visible"/>
-                                      </p:to>
-                                    </p:set>
-                                  </p:childTnLst>
-                                </p:cTn>
-                              </p:par>
-                            </p:childTnLst>
-                          </p:cTn>
-                        </p:par>
-                      </p:childTnLst>
-                    </p:cTn>
-                  </p:par>
-                  <p:par>
-                    <p:cTn id="7" fill="hold">
-                      <p:stCondLst>
-                        <p:cond delay="indefinite"/>
-                      </p:stCondLst>
-                      <p:childTnLst>
-                        <p:par>
-                          <p:cTn id="8" fill="hold">
-                            <p:stCondLst>
-                              <p:cond delay="0"/>
-                            </p:stCondLst>
-                            <p:childTnLst>
-                              <p:par>
-                                <p:cTn id="9" presetID="1" presetClass="entr" presetSubtype="0" fill="hold" grpId="0" nodeType="clickEffect">
-                                  <p:stCondLst>
-                                    <p:cond delay="0"/>
-                                  </p:stCondLst>
-                                  <p:childTnLst>
-                                    <p:set>
-                                      <p:cBhvr>
-                                        <p:cTn id="10" dur="1" fill="hold">
-                                          <p:stCondLst>
-                                            <p:cond delay="0"/>
-                                          </p:stCondLst>
-                                        </p:cTn>
-                                        <p:tgtEl>
-                                          <p:spTgt spid="3">
-                                            <p:txEl>
-                                              <p:pRg st="2" end="2"/>
-                                            </p:txEl>
-                                          </p:spTgt>
-                                        </p:tgtEl>
-                                        <p:attrNameLst>
-                                          <p:attrName>style.visibility</p:attrName>
-                                        </p:attrNameLst>
-                                      </p:cBhvr>
-                                      <p:to>
-                                        <p:strVal val="visible"/>
-                                      </p:to>
-                                    </p:set>
-                                  </p:childTnLst>
-                                </p:cTn>
-                              </p:par>
-                            </p:childTnLst>
-                          </p:cTn>
-                        </p:par>
-                      </p:childTnLst>
-                    </p:cTn>
-                  </p:par>
-                </p:childTnLst>
-              </p:cTn>
-              <p:prevCondLst>
-                <p:cond evt="onPrev" delay="0">
-                  <p:tgtEl>
-                    <p:sldTgt/>
-                  </p:tgtEl>
-                </p:cond>
-              </p:prevCondLst>
-              <p:nextCondLst>
-                <p:cond evt="onNext" delay="0">
-                  <p:tgtEl>
-                    <p:sldTgt/>
-                  </p:tgtEl>
-                </p:cond>
-              </p:nextCondLst>
-            </p:seq>
-          </p:childTnLst>
-        </p:cTn>
-      </p:par>
-    </p:tnLst>
-    <p:bldLst>
-      <p:bldP spid="3" grpId="0" uiExpand="1" build="p"/>
-    </p:bldLst>
-  </p:timing>
-</p:sld>
-</file>
-
-<file path=ppt/slides/slide32.xml><?xml version="1.0" encoding="utf-8"?>
-<p:sld xmlns:a="http://schemas.openxmlformats.org/drawingml/2006/main" xmlns:r="http://schemas.openxmlformats.org/officeDocument/2006/relationships" xmlns:p="http://schemas.openxmlformats.org/presentationml/2006/main">
-  <p:cSld>
-    <p:spTree>
-      <p:nvGrpSpPr>
-        <p:cNvPr id="1" name=""/>
-        <p:cNvGrpSpPr/>
-        <p:nvPr/>
-      </p:nvGrpSpPr>
-      <p:grpSpPr>
-        <a:xfrm>
-          <a:off x="0" y="0"/>
-          <a:ext cx="0" cy="0"/>
-          <a:chOff x="0" y="0"/>
-          <a:chExt cx="0" cy="0"/>
-        </a:xfrm>
-      </p:grpSpPr>
-      <p:sp>
-        <p:nvSpPr>
-          <p:cNvPr id="2" name="Title 1">
-            <a:extLst>
-              <a:ext uri="{FF2B5EF4-FFF2-40B4-BE49-F238E27FC236}">
-                <a16:creationId xmlns:a16="http://schemas.microsoft.com/office/drawing/2014/main" id="{9D4FB3BA-16B9-7F9B-C452-2CAF20C3E239}"/>
-              </a:ext>
-            </a:extLst>
-          </p:cNvPr>
-          <p:cNvSpPr>
-            <a:spLocks noGrp="1"/>
-          </p:cNvSpPr>
-          <p:nvPr>
-            <p:ph type="title"/>
-          </p:nvPr>
-        </p:nvSpPr>
-        <p:spPr/>
-        <p:txBody>
-          <a:bodyPr/>
-          <a:lstStyle/>
-          <a:p>
-            <a:r>
-              <a:rPr lang="en-GB" noProof="0" dirty="0"/>
-              <a:t>Risks</a:t>
-            </a:r>
-          </a:p>
-        </p:txBody>
-      </p:sp>
-      <p:sp>
-        <p:nvSpPr>
-          <p:cNvPr id="3" name="Content Placeholder 2">
-            <a:extLst>
-              <a:ext uri="{FF2B5EF4-FFF2-40B4-BE49-F238E27FC236}">
-                <a16:creationId xmlns:a16="http://schemas.microsoft.com/office/drawing/2014/main" id="{643FD534-B31D-06F3-D3E2-19AA65F9F6A6}"/>
-              </a:ext>
-            </a:extLst>
-          </p:cNvPr>
-          <p:cNvSpPr>
-            <a:spLocks noGrp="1"/>
-          </p:cNvSpPr>
-          <p:nvPr>
-            <p:ph idx="1"/>
-          </p:nvPr>
-        </p:nvSpPr>
-        <p:spPr/>
-        <p:txBody>
-          <a:bodyPr>
-            <a:normAutofit/>
-          </a:bodyPr>
-          <a:lstStyle/>
-          <a:p>
-            <a:r>
-              <a:rPr lang="en-GB" noProof="0" dirty="0"/>
-              <a:t>Cybercriminals on the dark web might try to target you if they get your information.</a:t>
-            </a:r>
-          </a:p>
-          <a:p>
-            <a:r>
-              <a:rPr lang="en-GB" noProof="0" dirty="0"/>
-              <a:t>They could try to hack your accounts, steal your identity or trick you into giving them money.</a:t>
-            </a:r>
-          </a:p>
-          <a:p>
-            <a:r>
-              <a:rPr lang="en-GB" noProof="0" dirty="0"/>
-              <a:t>Protect your personal details and never share them with strangers online.</a:t>
-            </a:r>
-          </a:p>
-          <a:p>
-            <a:endParaRPr lang="en-GB" noProof="0" dirty="0"/>
-          </a:p>
-          <a:p>
-            <a:endParaRPr lang="en-GB" noProof="0" dirty="0"/>
-          </a:p>
-        </p:txBody>
-      </p:sp>
-    </p:spTree>
-    <p:extLst>
-      <p:ext uri="{BB962C8B-B14F-4D97-AF65-F5344CB8AC3E}">
-        <p14:creationId xmlns:p14="http://schemas.microsoft.com/office/powerpoint/2010/main" val="1341722828"/>
-      </p:ext>
-    </p:extLst>
-  </p:cSld>
-  <p:clrMapOvr>
-    <a:masterClrMapping/>
-  </p:clrMapOvr>
-  <p:timing>
-    <p:tnLst>
-      <p:par>
-        <p:cTn id="1" dur="indefinite" restart="never" nodeType="tmRoot">
-          <p:childTnLst>
-            <p:seq concurrent="1" nextAc="seek">
-              <p:cTn id="2" dur="indefinite" nodeType="mainSeq">
-                <p:childTnLst>
-                  <p:par>
-                    <p:cTn id="3" fill="hold">
-                      <p:stCondLst>
-                        <p:cond delay="indefinite"/>
-                      </p:stCondLst>
-                      <p:childTnLst>
-                        <p:par>
-                          <p:cTn id="4" fill="hold">
-                            <p:stCondLst>
-                              <p:cond delay="0"/>
-                            </p:stCondLst>
-                            <p:childTnLst>
-                              <p:par>
-                                <p:cTn id="5" presetID="1" presetClass="entr" presetSubtype="0" fill="hold" grpId="0" nodeType="clickEffect">
-                                  <p:stCondLst>
-                                    <p:cond delay="0"/>
-                                  </p:stCondLst>
-                                  <p:childTnLst>
-                                    <p:set>
-                                      <p:cBhvr>
-                                        <p:cTn id="6" dur="1" fill="hold">
-                                          <p:stCondLst>
-                                            <p:cond delay="0"/>
-                                          </p:stCondLst>
-                                        </p:cTn>
-                                        <p:tgtEl>
-                                          <p:spTgt spid="3">
-                                            <p:txEl>
-                                              <p:pRg st="1" end="1"/>
-                                            </p:txEl>
-                                          </p:spTgt>
-                                        </p:tgtEl>
-                                        <p:attrNameLst>
-                                          <p:attrName>style.visibility</p:attrName>
-                                        </p:attrNameLst>
-                                      </p:cBhvr>
-                                      <p:to>
-                                        <p:strVal val="visible"/>
-                                      </p:to>
-                                    </p:set>
-                                  </p:childTnLst>
-                                </p:cTn>
-                              </p:par>
-                            </p:childTnLst>
-                          </p:cTn>
-                        </p:par>
-                      </p:childTnLst>
-                    </p:cTn>
-                  </p:par>
-                  <p:par>
-                    <p:cTn id="7" fill="hold">
-                      <p:stCondLst>
-                        <p:cond delay="indefinite"/>
-                      </p:stCondLst>
-                      <p:childTnLst>
-                        <p:par>
-                          <p:cTn id="8" fill="hold">
-                            <p:stCondLst>
-                              <p:cond delay="0"/>
-                            </p:stCondLst>
-                            <p:childTnLst>
-                              <p:par>
-                                <p:cTn id="9" presetID="1" presetClass="entr" presetSubtype="0" fill="hold" grpId="0" nodeType="clickEffect">
-                                  <p:stCondLst>
-                                    <p:cond delay="0"/>
-                                  </p:stCondLst>
-                                  <p:childTnLst>
-                                    <p:set>
-                                      <p:cBhvr>
-                                        <p:cTn id="10" dur="1" fill="hold">
-                                          <p:stCondLst>
-                                            <p:cond delay="0"/>
-                                          </p:stCondLst>
-                                        </p:cTn>
-                                        <p:tgtEl>
-                                          <p:spTgt spid="3">
-                                            <p:txEl>
-                                              <p:pRg st="2" end="2"/>
-                                            </p:txEl>
-                                          </p:spTgt>
-                                        </p:tgtEl>
-                                        <p:attrNameLst>
-                                          <p:attrName>style.visibility</p:attrName>
-                                        </p:attrNameLst>
-                                      </p:cBhvr>
-                                      <p:to>
-                                        <p:strVal val="visible"/>
-                                      </p:to>
-                                    </p:set>
-                                  </p:childTnLst>
-                                </p:cTn>
-                              </p:par>
-                            </p:childTnLst>
-                          </p:cTn>
-                        </p:par>
-                      </p:childTnLst>
-                    </p:cTn>
-                  </p:par>
-                </p:childTnLst>
-              </p:cTn>
-              <p:prevCondLst>
-                <p:cond evt="onPrev" delay="0">
-                  <p:tgtEl>
-                    <p:sldTgt/>
-                  </p:tgtEl>
-                </p:cond>
-              </p:prevCondLst>
-              <p:nextCondLst>
-                <p:cond evt="onNext" delay="0">
-                  <p:tgtEl>
-                    <p:sldTgt/>
-                  </p:tgtEl>
-                </p:cond>
-              </p:nextCondLst>
-            </p:seq>
-          </p:childTnLst>
-        </p:cTn>
-      </p:par>
-    </p:tnLst>
-    <p:bldLst>
-      <p:bldP spid="3" grpId="0" uiExpand="1" build="p"/>
-    </p:bldLst>
-  </p:timing>
-</p:sld>
-</file>
-
-<file path=ppt/slides/slide33.xml><?xml version="1.0" encoding="utf-8"?>
-<p:sld xmlns:a="http://schemas.openxmlformats.org/drawingml/2006/main" xmlns:r="http://schemas.openxmlformats.org/officeDocument/2006/relationships" xmlns:p="http://schemas.openxmlformats.org/presentationml/2006/main">
-  <p:cSld>
-    <p:spTree>
-      <p:nvGrpSpPr>
-        <p:cNvPr id="1" name=""/>
-        <p:cNvGrpSpPr/>
-        <p:nvPr/>
-      </p:nvGrpSpPr>
-      <p:grpSpPr>
-        <a:xfrm>
-          <a:off x="0" y="0"/>
-          <a:ext cx="0" cy="0"/>
-          <a:chOff x="0" y="0"/>
-          <a:chExt cx="0" cy="0"/>
-        </a:xfrm>
-      </p:grpSpPr>
-      <p:sp>
-        <p:nvSpPr>
-          <p:cNvPr id="2" name="Title 1">
-            <a:extLst>
-              <a:ext uri="{FF2B5EF4-FFF2-40B4-BE49-F238E27FC236}">
-                <a16:creationId xmlns:a16="http://schemas.microsoft.com/office/drawing/2014/main" id="{4A45EBF5-AD27-7CF2-B695-2E2E513B0927}"/>
-              </a:ext>
-            </a:extLst>
-          </p:cNvPr>
-          <p:cNvSpPr>
-            <a:spLocks noGrp="1"/>
-          </p:cNvSpPr>
-          <p:nvPr>
-            <p:ph type="title"/>
-          </p:nvPr>
-        </p:nvSpPr>
-        <p:spPr/>
-        <p:txBody>
-          <a:bodyPr/>
-          <a:lstStyle/>
-          <a:p>
-            <a:r>
-              <a:rPr lang="en-GB" noProof="0" dirty="0"/>
-              <a:t>Risks</a:t>
-            </a:r>
-          </a:p>
-        </p:txBody>
-      </p:sp>
-      <p:sp>
-        <p:nvSpPr>
-          <p:cNvPr id="3" name="Content Placeholder 2">
-            <a:extLst>
-              <a:ext uri="{FF2B5EF4-FFF2-40B4-BE49-F238E27FC236}">
-                <a16:creationId xmlns:a16="http://schemas.microsoft.com/office/drawing/2014/main" id="{40FB0E32-ED7C-32EC-92A1-B8142B63B581}"/>
-              </a:ext>
-            </a:extLst>
-          </p:cNvPr>
-          <p:cNvSpPr>
-            <a:spLocks noGrp="1"/>
-          </p:cNvSpPr>
-          <p:nvPr>
-            <p:ph idx="1"/>
-          </p:nvPr>
-        </p:nvSpPr>
-        <p:spPr/>
-        <p:txBody>
-          <a:bodyPr>
-            <a:normAutofit/>
-          </a:bodyPr>
-          <a:lstStyle/>
-          <a:p>
-            <a:r>
-              <a:rPr lang="en-GB" noProof="0" dirty="0"/>
-              <a:t>Law enforcement agencies monitor the dark web to catch illegal activity.</a:t>
-            </a:r>
-          </a:p>
-          <a:p>
-            <a:r>
-              <a:rPr lang="en-GB" noProof="0" dirty="0"/>
-              <a:t>If you access or download illegal content, even by accident, you could be investigated or face serious consequences.</a:t>
-            </a:r>
-          </a:p>
-          <a:p>
-            <a:r>
-              <a:rPr lang="en-GB" noProof="0" dirty="0"/>
-              <a:t>Breaking the law online is still breaking the law. Always use the internet safely and responsibly.</a:t>
-            </a:r>
-          </a:p>
-        </p:txBody>
-      </p:sp>
-    </p:spTree>
-    <p:extLst>
-      <p:ext uri="{BB962C8B-B14F-4D97-AF65-F5344CB8AC3E}">
-        <p14:creationId xmlns:p14="http://schemas.microsoft.com/office/powerpoint/2010/main" val="2750668128"/>
-      </p:ext>
-    </p:extLst>
-  </p:cSld>
-  <p:clrMapOvr>
-    <a:masterClrMapping/>
-  </p:clrMapOvr>
-  <p:timing>
-    <p:tnLst>
-      <p:par>
-        <p:cTn id="1" dur="indefinite" restart="never" nodeType="tmRoot">
-          <p:childTnLst>
-            <p:seq concurrent="1" nextAc="seek">
-              <p:cTn id="2" dur="indefinite" nodeType="mainSeq">
-                <p:childTnLst>
-                  <p:par>
-                    <p:cTn id="3" fill="hold">
-                      <p:stCondLst>
-                        <p:cond delay="indefinite"/>
-                      </p:stCondLst>
-                      <p:childTnLst>
-                        <p:par>
-                          <p:cTn id="4" fill="hold">
-                            <p:stCondLst>
-                              <p:cond delay="0"/>
-                            </p:stCondLst>
-                            <p:childTnLst>
-                              <p:par>
-                                <p:cTn id="5" presetID="1" presetClass="entr" presetSubtype="0" fill="hold" grpId="0" nodeType="clickEffect">
-                                  <p:stCondLst>
-                                    <p:cond delay="0"/>
-                                  </p:stCondLst>
-                                  <p:childTnLst>
-                                    <p:set>
-                                      <p:cBhvr>
-                                        <p:cTn id="6" dur="1" fill="hold">
-                                          <p:stCondLst>
-                                            <p:cond delay="0"/>
-                                          </p:stCondLst>
-                                        </p:cTn>
-                                        <p:tgtEl>
-                                          <p:spTgt spid="3">
-                                            <p:txEl>
-                                              <p:pRg st="1" end="1"/>
-                                            </p:txEl>
-                                          </p:spTgt>
-                                        </p:tgtEl>
-                                        <p:attrNameLst>
-                                          <p:attrName>style.visibility</p:attrName>
-                                        </p:attrNameLst>
-                                      </p:cBhvr>
-                                      <p:to>
-                                        <p:strVal val="visible"/>
-                                      </p:to>
-                                    </p:set>
-                                  </p:childTnLst>
-                                </p:cTn>
-                              </p:par>
-                            </p:childTnLst>
-                          </p:cTn>
-                        </p:par>
-                      </p:childTnLst>
-                    </p:cTn>
-                  </p:par>
-                  <p:par>
-                    <p:cTn id="7" fill="hold">
-                      <p:stCondLst>
-                        <p:cond delay="indefinite"/>
-                      </p:stCondLst>
-                      <p:childTnLst>
-                        <p:par>
-                          <p:cTn id="8" fill="hold">
-                            <p:stCondLst>
-                              <p:cond delay="0"/>
-                            </p:stCondLst>
-                            <p:childTnLst>
-                              <p:par>
-                                <p:cTn id="9" presetID="1" presetClass="entr" presetSubtype="0" fill="hold" grpId="0" nodeType="clickEffect">
-                                  <p:stCondLst>
-                                    <p:cond delay="0"/>
-                                  </p:stCondLst>
-                                  <p:childTnLst>
-                                    <p:set>
-                                      <p:cBhvr>
-                                        <p:cTn id="10" dur="1" fill="hold">
-                                          <p:stCondLst>
-                                            <p:cond delay="0"/>
-                                          </p:stCondLst>
-                                        </p:cTn>
-                                        <p:tgtEl>
-                                          <p:spTgt spid="3">
-                                            <p:txEl>
-                                              <p:pRg st="2" end="2"/>
-                                            </p:txEl>
-                                          </p:spTgt>
-                                        </p:tgtEl>
-                                        <p:attrNameLst>
-                                          <p:attrName>style.visibility</p:attrName>
-                                        </p:attrNameLst>
-                                      </p:cBhvr>
-                                      <p:to>
-                                        <p:strVal val="visible"/>
-                                      </p:to>
-                                    </p:set>
-                                  </p:childTnLst>
-                                </p:cTn>
-                              </p:par>
-                            </p:childTnLst>
-                          </p:cTn>
-                        </p:par>
-                      </p:childTnLst>
-                    </p:cTn>
-                  </p:par>
-                </p:childTnLst>
-              </p:cTn>
-              <p:prevCondLst>
-                <p:cond evt="onPrev" delay="0">
-                  <p:tgtEl>
-                    <p:sldTgt/>
-                  </p:tgtEl>
-                </p:cond>
-              </p:prevCondLst>
-              <p:nextCondLst>
-                <p:cond evt="onNext" delay="0">
-                  <p:tgtEl>
-                    <p:sldTgt/>
-                  </p:tgtEl>
-                </p:cond>
-              </p:nextCondLst>
-            </p:seq>
-          </p:childTnLst>
-        </p:cTn>
-      </p:par>
-    </p:tnLst>
-    <p:bldLst>
-      <p:bldP spid="3" grpId="0" uiExpand="1" build="p"/>
-    </p:bldLst>
-  </p:timing>
-</p:sld>
-</file>
-
-<file path=ppt/slides/slide34.xml><?xml version="1.0" encoding="utf-8"?>
-<p:sld xmlns:a="http://schemas.openxmlformats.org/drawingml/2006/main" xmlns:r="http://schemas.openxmlformats.org/officeDocument/2006/relationships" xmlns:p="http://schemas.openxmlformats.org/presentationml/2006/main">
-  <p:cSld>
-    <p:spTree>
-      <p:nvGrpSpPr>
-        <p:cNvPr id="1" name=""/>
-        <p:cNvGrpSpPr/>
-        <p:nvPr/>
-      </p:nvGrpSpPr>
-      <p:grpSpPr>
-        <a:xfrm>
-          <a:off x="0" y="0"/>
-          <a:ext cx="0" cy="0"/>
-          <a:chOff x="0" y="0"/>
-          <a:chExt cx="0" cy="0"/>
-        </a:xfrm>
-      </p:grpSpPr>
-      <p:sp>
-        <p:nvSpPr>
-          <p:cNvPr id="4" name="Content Placeholder 3">
-            <a:extLst>
-              <a:ext uri="{FF2B5EF4-FFF2-40B4-BE49-F238E27FC236}">
-                <a16:creationId xmlns:a16="http://schemas.microsoft.com/office/drawing/2014/main" id="{EBFA43AF-096F-79D3-1B8F-9924691AF12C}"/>
-              </a:ext>
-            </a:extLst>
-          </p:cNvPr>
-          <p:cNvSpPr>
-            <a:spLocks noGrp="1"/>
-          </p:cNvSpPr>
-          <p:nvPr>
-            <p:ph idx="1"/>
-          </p:nvPr>
-        </p:nvSpPr>
-        <p:spPr/>
-        <p:txBody>
-          <a:bodyPr>
-            <a:normAutofit lnSpcReduction="10000"/>
-          </a:bodyPr>
-          <a:lstStyle/>
-          <a:p>
-            <a:r>
-              <a:rPr lang="en-GB" noProof="0" dirty="0"/>
-              <a:t>If you had the power to make one new law or rule to help reduce cybercrime on the dark web, what would it be?</a:t>
-            </a:r>
-          </a:p>
-          <a:p>
-            <a:pPr marL="893763" indent="-441325">
-              <a:buFont typeface="Arial" panose="020B0604020202020204" pitchFamily="34" charset="0"/>
-              <a:buChar char="•"/>
-            </a:pPr>
-            <a:r>
-              <a:rPr lang="en-GB" noProof="0" dirty="0"/>
-              <a:t>Explain why you chose this rule.</a:t>
-            </a:r>
-          </a:p>
-          <a:p>
-            <a:pPr marL="893763" indent="-441325">
-              <a:buFont typeface="Arial" panose="020B0604020202020204" pitchFamily="34" charset="0"/>
-              <a:buChar char="•"/>
-            </a:pPr>
-            <a:r>
-              <a:rPr lang="en-GB" noProof="0" dirty="0"/>
-              <a:t>How do you think it would help protect people?</a:t>
-            </a:r>
-          </a:p>
-          <a:p>
-            <a:pPr marL="893763" indent="-441325">
-              <a:buFont typeface="Arial" panose="020B0604020202020204" pitchFamily="34" charset="0"/>
-              <a:buChar char="•"/>
-            </a:pPr>
-            <a:r>
-              <a:rPr lang="en-GB" noProof="0" dirty="0"/>
-              <a:t>Are there any possible downsides or challenges with your idea?</a:t>
-            </a:r>
-          </a:p>
-        </p:txBody>
-      </p:sp>
-      <p:sp>
-        <p:nvSpPr>
-          <p:cNvPr id="2" name="Title 1">
-            <a:extLst>
-              <a:ext uri="{FF2B5EF4-FFF2-40B4-BE49-F238E27FC236}">
-                <a16:creationId xmlns:a16="http://schemas.microsoft.com/office/drawing/2014/main" id="{8E6F5C87-A557-8B63-58BC-B289090E030C}"/>
-              </a:ext>
-            </a:extLst>
-          </p:cNvPr>
-          <p:cNvSpPr>
-            <a:spLocks noGrp="1"/>
-          </p:cNvSpPr>
-          <p:nvPr>
-            <p:ph type="title"/>
-          </p:nvPr>
-        </p:nvSpPr>
-        <p:spPr/>
-        <p:txBody>
-          <a:bodyPr/>
-          <a:lstStyle/>
-          <a:p>
-            <a:r>
-              <a:rPr lang="en-GB" noProof="0" dirty="0"/>
-              <a:t>3: Risks</a:t>
-            </a:r>
-          </a:p>
-        </p:txBody>
-      </p:sp>
-    </p:spTree>
-    <p:extLst>
-      <p:ext uri="{BB962C8B-B14F-4D97-AF65-F5344CB8AC3E}">
-        <p14:creationId xmlns:p14="http://schemas.microsoft.com/office/powerpoint/2010/main" val="101224300"/>
-      </p:ext>
-    </p:extLst>
-  </p:cSld>
-  <p:clrMapOvr>
-    <a:masterClrMapping/>
-  </p:clrMapOvr>
-</p:sld>
-</file>
-
-<file path=ppt/slides/slide35.xml><?xml version="1.0" encoding="utf-8"?>
-<p:sld xmlns:a="http://schemas.openxmlformats.org/drawingml/2006/main" xmlns:r="http://schemas.openxmlformats.org/officeDocument/2006/relationships" xmlns:p="http://schemas.openxmlformats.org/presentationml/2006/main">
-  <p:cSld>
-    <p:spTree>
-      <p:nvGrpSpPr>
-        <p:cNvPr id="1" name="">
-          <a:extLst>
-            <a:ext uri="{FF2B5EF4-FFF2-40B4-BE49-F238E27FC236}">
-              <a16:creationId xmlns:a16="http://schemas.microsoft.com/office/drawing/2014/main" id="{302D1959-52F2-D457-DADB-57482753CC00}"/>
-            </a:ext>
-          </a:extLst>
-        </p:cNvPr>
-        <p:cNvGrpSpPr/>
-        <p:nvPr/>
-      </p:nvGrpSpPr>
-      <p:grpSpPr>
-        <a:xfrm>
-          <a:off x="0" y="0"/>
-          <a:ext cx="0" cy="0"/>
-          <a:chOff x="0" y="0"/>
-          <a:chExt cx="0" cy="0"/>
-        </a:xfrm>
-      </p:grpSpPr>
-      <p:sp>
-        <p:nvSpPr>
-          <p:cNvPr id="4" name="Content Placeholder 3">
-            <a:extLst>
-              <a:ext uri="{FF2B5EF4-FFF2-40B4-BE49-F238E27FC236}">
-                <a16:creationId xmlns:a16="http://schemas.microsoft.com/office/drawing/2014/main" id="{10A40938-4E4C-6A23-AF42-C574B8837A4B}"/>
-              </a:ext>
-            </a:extLst>
-          </p:cNvPr>
-          <p:cNvSpPr>
-            <a:spLocks noGrp="1"/>
-          </p:cNvSpPr>
-          <p:nvPr>
-            <p:ph idx="1"/>
-          </p:nvPr>
-        </p:nvSpPr>
-        <p:spPr/>
-        <p:txBody>
-          <a:bodyPr>
-            <a:normAutofit fontScale="77500" lnSpcReduction="20000"/>
-          </a:bodyPr>
-          <a:lstStyle/>
-          <a:p>
-            <a:pPr>
-              <a:spcAft>
-                <a:spcPts val="600"/>
-              </a:spcAft>
-            </a:pPr>
-            <a:r>
-              <a:rPr lang="en-GB" b="1" noProof="0" dirty="0">
-                <a:solidFill>
-                  <a:srgbClr val="C00000"/>
-                </a:solidFill>
-              </a:rPr>
-              <a:t>I would make a rule that every website, even on the dark web, must use a special verification system to check that users are not criminals before they can buy or sell anything. </a:t>
-            </a:r>
-          </a:p>
-          <a:p>
-            <a:pPr>
-              <a:spcAft>
-                <a:spcPts val="600"/>
-              </a:spcAft>
-            </a:pPr>
-            <a:r>
-              <a:rPr lang="en-GB" b="1" noProof="0" dirty="0">
-                <a:solidFill>
-                  <a:srgbClr val="C00000"/>
-                </a:solidFill>
-              </a:rPr>
-              <a:t>This could involve using advanced technology, such as AI, to spot suspicious behaviour and block illegal activity automatically. </a:t>
-            </a:r>
-          </a:p>
-          <a:p>
-            <a:pPr>
-              <a:spcAft>
-                <a:spcPts val="600"/>
-              </a:spcAft>
-            </a:pPr>
-            <a:r>
-              <a:rPr lang="en-GB" b="1" noProof="0" dirty="0">
-                <a:solidFill>
-                  <a:srgbClr val="C00000"/>
-                </a:solidFill>
-              </a:rPr>
-              <a:t>I think this rule would help protect people by making it much harder for criminals to sell stolen data or illegal goods. </a:t>
-            </a:r>
-          </a:p>
-          <a:p>
-            <a:pPr>
-              <a:spcAft>
-                <a:spcPts val="600"/>
-              </a:spcAft>
-            </a:pPr>
-            <a:r>
-              <a:rPr lang="en-GB" b="1" noProof="0" dirty="0">
-                <a:solidFill>
-                  <a:srgbClr val="C00000"/>
-                </a:solidFill>
-              </a:rPr>
-              <a:t>The downside might be that it could also make it harder for people who need privacy for good reasons, such as journalists or activists, to use the dark web safely.</a:t>
-            </a:r>
-          </a:p>
-        </p:txBody>
-      </p:sp>
-      <p:sp>
-        <p:nvSpPr>
-          <p:cNvPr id="2" name="Title 1">
-            <a:extLst>
-              <a:ext uri="{FF2B5EF4-FFF2-40B4-BE49-F238E27FC236}">
-                <a16:creationId xmlns:a16="http://schemas.microsoft.com/office/drawing/2014/main" id="{DFAEC996-5E3F-90D0-1EEA-781B5AE17F7E}"/>
-              </a:ext>
-            </a:extLst>
-          </p:cNvPr>
-          <p:cNvSpPr>
-            <a:spLocks noGrp="1"/>
-          </p:cNvSpPr>
-          <p:nvPr>
-            <p:ph type="title"/>
-          </p:nvPr>
-        </p:nvSpPr>
-        <p:spPr/>
-        <p:txBody>
-          <a:bodyPr/>
-          <a:lstStyle/>
-          <a:p>
-            <a:r>
-              <a:rPr lang="en-GB" noProof="0" dirty="0"/>
-              <a:t>3: Risks </a:t>
-            </a:r>
-            <a:r>
-              <a:rPr lang="en-GB" noProof="0" dirty="0">
-                <a:solidFill>
-                  <a:srgbClr val="C00000"/>
-                </a:solidFill>
-              </a:rPr>
-              <a:t>POSSIBLE ANSWER</a:t>
-            </a:r>
-          </a:p>
-        </p:txBody>
-      </p:sp>
-    </p:spTree>
-    <p:extLst>
-      <p:ext uri="{BB962C8B-B14F-4D97-AF65-F5344CB8AC3E}">
-        <p14:creationId xmlns:p14="http://schemas.microsoft.com/office/powerpoint/2010/main" val="1256929047"/>
-      </p:ext>
-    </p:extLst>
-  </p:cSld>
-  <p:clrMapOvr>
-    <a:masterClrMapping/>
-  </p:clrMapOvr>
-  <p:timing>
-    <p:tnLst>
-      <p:par>
-        <p:cTn id="1" dur="indefinite" restart="never" nodeType="tmRoot">
-          <p:childTnLst>
-            <p:seq concurrent="1" nextAc="seek">
-              <p:cTn id="2" dur="indefinite" nodeType="mainSeq">
-                <p:childTnLst>
-                  <p:par>
-                    <p:cTn id="3" fill="hold">
-                      <p:stCondLst>
-                        <p:cond delay="indefinite"/>
-                      </p:stCondLst>
-                      <p:childTnLst>
-                        <p:par>
-                          <p:cTn id="4" fill="hold">
-                            <p:stCondLst>
-                              <p:cond delay="0"/>
-                            </p:stCondLst>
-                            <p:childTnLst>
-                              <p:par>
-                                <p:cTn id="5" presetID="1" presetClass="entr" presetSubtype="0" fill="hold" grpId="0" nodeType="clickEffect">
-                                  <p:stCondLst>
-                                    <p:cond delay="0"/>
-                                  </p:stCondLst>
-                                  <p:childTnLst>
-                                    <p:set>
-                                      <p:cBhvr>
-                                        <p:cTn id="6" dur="1" fill="hold">
-                                          <p:stCondLst>
-                                            <p:cond delay="0"/>
-                                          </p:stCondLst>
-                                        </p:cTn>
-                                        <p:tgtEl>
-                                          <p:spTgt spid="4">
-                                            <p:txEl>
-                                              <p:pRg st="0" end="0"/>
-                                            </p:txEl>
-                                          </p:spTgt>
-                                        </p:tgtEl>
-                                        <p:attrNameLst>
-                                          <p:attrName>style.visibility</p:attrName>
-                                        </p:attrNameLst>
-                                      </p:cBhvr>
-                                      <p:to>
-                                        <p:strVal val="visible"/>
-                                      </p:to>
-                                    </p:set>
-                                  </p:childTnLst>
-                                </p:cTn>
-                              </p:par>
-                            </p:childTnLst>
-                          </p:cTn>
-                        </p:par>
-                      </p:childTnLst>
-                    </p:cTn>
-                  </p:par>
-                  <p:par>
-                    <p:cTn id="7" fill="hold">
-                      <p:stCondLst>
-                        <p:cond delay="indefinite"/>
-                      </p:stCondLst>
-                      <p:childTnLst>
-                        <p:par>
-                          <p:cTn id="8" fill="hold">
-                            <p:stCondLst>
-                              <p:cond delay="0"/>
-                            </p:stCondLst>
-                            <p:childTnLst>
-                              <p:par>
-                                <p:cTn id="9" presetID="1" presetClass="entr" presetSubtype="0" fill="hold" grpId="0" nodeType="clickEffect">
-                                  <p:stCondLst>
-                                    <p:cond delay="0"/>
-                                  </p:stCondLst>
-                                  <p:childTnLst>
-                                    <p:set>
-                                      <p:cBhvr>
-                                        <p:cTn id="10" dur="1" fill="hold">
-                                          <p:stCondLst>
-                                            <p:cond delay="0"/>
-                                          </p:stCondLst>
-                                        </p:cTn>
-                                        <p:tgtEl>
-                                          <p:spTgt spid="4">
-                                            <p:txEl>
-                                              <p:pRg st="1" end="1"/>
-                                            </p:txEl>
-                                          </p:spTgt>
-                                        </p:tgtEl>
-                                        <p:attrNameLst>
-                                          <p:attrName>style.visibility</p:attrName>
-                                        </p:attrNameLst>
-                                      </p:cBhvr>
-                                      <p:to>
-                                        <p:strVal val="visible"/>
-                                      </p:to>
-                                    </p:set>
-                                  </p:childTnLst>
-                                </p:cTn>
-                              </p:par>
-                            </p:childTnLst>
-                          </p:cTn>
-                        </p:par>
-                      </p:childTnLst>
-                    </p:cTn>
-                  </p:par>
-                  <p:par>
-                    <p:cTn id="11" fill="hold">
-                      <p:stCondLst>
-                        <p:cond delay="indefinite"/>
-                      </p:stCondLst>
-                      <p:childTnLst>
-                        <p:par>
-                          <p:cTn id="12" fill="hold">
-                            <p:stCondLst>
-                              <p:cond delay="0"/>
-                            </p:stCondLst>
-                            <p:childTnLst>
-                              <p:par>
-                                <p:cTn id="13" presetID="1" presetClass="entr" presetSubtype="0" fill="hold" grpId="0" nodeType="clickEffect">
-                                  <p:stCondLst>
-                                    <p:cond delay="0"/>
-                                  </p:stCondLst>
-                                  <p:childTnLst>
-                                    <p:set>
-                                      <p:cBhvr>
-                                        <p:cTn id="14" dur="1" fill="hold">
-                                          <p:stCondLst>
-                                            <p:cond delay="0"/>
-                                          </p:stCondLst>
-                                        </p:cTn>
-                                        <p:tgtEl>
-                                          <p:spTgt spid="4">
-                                            <p:txEl>
-                                              <p:pRg st="2" end="2"/>
-                                            </p:txEl>
-                                          </p:spTgt>
-                                        </p:tgtEl>
-                                        <p:attrNameLst>
-                                          <p:attrName>style.visibility</p:attrName>
-                                        </p:attrNameLst>
-                                      </p:cBhvr>
-                                      <p:to>
-                                        <p:strVal val="visible"/>
-                                      </p:to>
-                                    </p:set>
-                                  </p:childTnLst>
-                                </p:cTn>
-                              </p:par>
-                            </p:childTnLst>
-                          </p:cTn>
-                        </p:par>
-                      </p:childTnLst>
-                    </p:cTn>
-                  </p:par>
-                  <p:par>
-                    <p:cTn id="15" fill="hold">
-                      <p:stCondLst>
-                        <p:cond delay="indefinite"/>
-                      </p:stCondLst>
-                      <p:childTnLst>
-                        <p:par>
-                          <p:cTn id="16" fill="hold">
-                            <p:stCondLst>
-                              <p:cond delay="0"/>
-                            </p:stCondLst>
-                            <p:childTnLst>
-                              <p:par>
-                                <p:cTn id="17" presetID="1" presetClass="entr" presetSubtype="0" fill="hold" grpId="0" nodeType="clickEffect">
-                                  <p:stCondLst>
-                                    <p:cond delay="0"/>
-                                  </p:stCondLst>
-                                  <p:childTnLst>
-                                    <p:set>
-                                      <p:cBhvr>
-                                        <p:cTn id="18" dur="1" fill="hold">
-                                          <p:stCondLst>
-                                            <p:cond delay="0"/>
-                                          </p:stCondLst>
-                                        </p:cTn>
-                                        <p:tgtEl>
-                                          <p:spTgt spid="4">
-                                            <p:txEl>
-                                              <p:pRg st="3" end="3"/>
-                                            </p:txEl>
-                                          </p:spTgt>
-                                        </p:tgtEl>
-                                        <p:attrNameLst>
-                                          <p:attrName>style.visibility</p:attrName>
-                                        </p:attrNameLst>
-                                      </p:cBhvr>
-                                      <p:to>
-                                        <p:strVal val="visible"/>
-                                      </p:to>
-                                    </p:set>
-                                  </p:childTnLst>
-                                </p:cTn>
-                              </p:par>
-                            </p:childTnLst>
-                          </p:cTn>
-                        </p:par>
-                      </p:childTnLst>
-                    </p:cTn>
-                  </p:par>
-                </p:childTnLst>
-              </p:cTn>
-              <p:prevCondLst>
-                <p:cond evt="onPrev" delay="0">
-                  <p:tgtEl>
-                    <p:sldTgt/>
-                  </p:tgtEl>
-                </p:cond>
-              </p:prevCondLst>
-              <p:nextCondLst>
-                <p:cond evt="onNext" delay="0">
-                  <p:tgtEl>
-                    <p:sldTgt/>
-                  </p:tgtEl>
-                </p:cond>
-              </p:nextCondLst>
-            </p:seq>
-          </p:childTnLst>
-        </p:cTn>
-      </p:par>
-    </p:tnLst>
-    <p:bldLst>
-      <p:bldP spid="4" grpId="0" uiExpand="1" build="p"/>
-    </p:bldLst>
-  </p:timing>
-</p:sld>
-</file>
-
-<file path=ppt/slides/slide36.xml><?xml version="1.0" encoding="utf-8"?>
-<p:sld xmlns:a="http://schemas.openxmlformats.org/drawingml/2006/main" xmlns:r="http://schemas.openxmlformats.org/officeDocument/2006/relationships" xmlns:p="http://schemas.openxmlformats.org/presentationml/2006/main">
-  <p:cSld>
-    <p:spTree>
-      <p:nvGrpSpPr>
-        <p:cNvPr id="1" name="">
-          <a:extLst>
-            <a:ext uri="{FF2B5EF4-FFF2-40B4-BE49-F238E27FC236}">
-              <a16:creationId xmlns:a16="http://schemas.microsoft.com/office/drawing/2014/main" id="{CAE468A0-223D-8D46-4290-45B3A94B1C4D}"/>
-            </a:ext>
-          </a:extLst>
-        </p:cNvPr>
-        <p:cNvGrpSpPr/>
-        <p:nvPr/>
-      </p:nvGrpSpPr>
-      <p:grpSpPr>
-        <a:xfrm>
-          <a:off x="0" y="0"/>
-          <a:ext cx="0" cy="0"/>
-          <a:chOff x="0" y="0"/>
-          <a:chExt cx="0" cy="0"/>
-        </a:xfrm>
-      </p:grpSpPr>
-      <p:sp>
-        <p:nvSpPr>
-          <p:cNvPr id="5" name="Content Placeholder 4">
-            <a:extLst>
-              <a:ext uri="{FF2B5EF4-FFF2-40B4-BE49-F238E27FC236}">
-                <a16:creationId xmlns:a16="http://schemas.microsoft.com/office/drawing/2014/main" id="{FE0E0E6B-FEDE-7710-E8BF-1836BC5E18FA}"/>
-              </a:ext>
-            </a:extLst>
-          </p:cNvPr>
-          <p:cNvSpPr>
-            <a:spLocks noGrp="1"/>
-          </p:cNvSpPr>
-          <p:nvPr>
-            <p:ph idx="1"/>
-          </p:nvPr>
-        </p:nvSpPr>
-        <p:spPr/>
-        <p:txBody>
-          <a:bodyPr>
-            <a:normAutofit/>
-          </a:bodyPr>
-          <a:lstStyle/>
-          <a:p>
-            <a:r>
-              <a:rPr lang="en-GB" noProof="0" dirty="0"/>
-              <a:t>How would you feel if your online activities were always being watched, even if you had nothing to hide?</a:t>
-            </a:r>
-          </a:p>
-          <a:p>
-            <a:r>
-              <a:rPr lang="en-GB" noProof="0" dirty="0"/>
-              <a:t>Is it fair to punish everyone for the actions of a few criminals online? Why or why not?</a:t>
-            </a:r>
-          </a:p>
-        </p:txBody>
-      </p:sp>
-      <p:sp>
-        <p:nvSpPr>
-          <p:cNvPr id="4" name="Title 3">
-            <a:extLst>
-              <a:ext uri="{FF2B5EF4-FFF2-40B4-BE49-F238E27FC236}">
-                <a16:creationId xmlns:a16="http://schemas.microsoft.com/office/drawing/2014/main" id="{EFD673A9-5032-8EB4-44C7-4B313223F025}"/>
-              </a:ext>
-            </a:extLst>
-          </p:cNvPr>
-          <p:cNvSpPr>
-            <a:spLocks noGrp="1"/>
-          </p:cNvSpPr>
-          <p:nvPr>
-            <p:ph type="title"/>
-          </p:nvPr>
-        </p:nvSpPr>
-        <p:spPr/>
-        <p:txBody>
-          <a:bodyPr/>
-          <a:lstStyle/>
-          <a:p>
-            <a:r>
-              <a:rPr lang="en-GB" noProof="0" dirty="0"/>
-              <a:t>Risks</a:t>
-            </a:r>
-          </a:p>
-        </p:txBody>
-      </p:sp>
-    </p:spTree>
-    <p:extLst>
-      <p:ext uri="{BB962C8B-B14F-4D97-AF65-F5344CB8AC3E}">
-        <p14:creationId xmlns:p14="http://schemas.microsoft.com/office/powerpoint/2010/main" val="1175043999"/>
-      </p:ext>
-    </p:extLst>
-  </p:cSld>
-  <p:clrMapOvr>
-    <a:masterClrMapping/>
-  </p:clrMapOvr>
-  <p:timing>
-    <p:tnLst>
-      <p:par>
-        <p:cTn id="1" dur="indefinite" restart="never" nodeType="tmRoot">
-          <p:childTnLst>
-            <p:seq concurrent="1" nextAc="seek">
-              <p:cTn id="2" dur="indefinite" nodeType="mainSeq">
-                <p:childTnLst>
-                  <p:par>
-                    <p:cTn id="3" fill="hold">
-                      <p:stCondLst>
-                        <p:cond delay="indefinite"/>
-                      </p:stCondLst>
-                      <p:childTnLst>
-                        <p:par>
-                          <p:cTn id="4" fill="hold">
-                            <p:stCondLst>
-                              <p:cond delay="0"/>
-                            </p:stCondLst>
-                            <p:childTnLst>
-                              <p:par>
-                                <p:cTn id="5" presetID="1" presetClass="entr" presetSubtype="0" fill="hold" grpId="0" nodeType="clickEffect">
-                                  <p:stCondLst>
-                                    <p:cond delay="0"/>
-                                  </p:stCondLst>
-                                  <p:childTnLst>
-                                    <p:set>
-                                      <p:cBhvr>
-                                        <p:cTn id="6" dur="1" fill="hold">
-                                          <p:stCondLst>
-                                            <p:cond delay="0"/>
-                                          </p:stCondLst>
-                                        </p:cTn>
-                                        <p:tgtEl>
-                                          <p:spTgt spid="5">
-                                            <p:txEl>
-                                              <p:pRg st="1" end="1"/>
-                                            </p:txEl>
-                                          </p:spTgt>
-                                        </p:tgtEl>
-                                        <p:attrNameLst>
-                                          <p:attrName>style.visibility</p:attrName>
-                                        </p:attrNameLst>
-                                      </p:cBhvr>
-                                      <p:to>
-                                        <p:strVal val="visible"/>
-                                      </p:to>
-                                    </p:set>
-                                  </p:childTnLst>
-                                </p:cTn>
-                              </p:par>
-                            </p:childTnLst>
-                          </p:cTn>
-                        </p:par>
-                      </p:childTnLst>
-                    </p:cTn>
-                  </p:par>
-                </p:childTnLst>
-              </p:cTn>
-              <p:prevCondLst>
-                <p:cond evt="onPrev" delay="0">
-                  <p:tgtEl>
-                    <p:sldTgt/>
-                  </p:tgtEl>
-                </p:cond>
-              </p:prevCondLst>
-              <p:nextCondLst>
-                <p:cond evt="onNext" delay="0">
-                  <p:tgtEl>
-                    <p:sldTgt/>
-                  </p:tgtEl>
-                </p:cond>
-              </p:nextCondLst>
-            </p:seq>
-          </p:childTnLst>
-        </p:cTn>
-      </p:par>
-    </p:tnLst>
-    <p:bldLst>
-      <p:bldP spid="5" grpId="0" uiExpand="1" build="p"/>
-    </p:bldLst>
-  </p:timing>
-</p:sld>
-</file>
-
-<file path=ppt/slides/slide37.xml><?xml version="1.0" encoding="utf-8"?>
-<p:sld xmlns:a="http://schemas.openxmlformats.org/drawingml/2006/main" xmlns:r="http://schemas.openxmlformats.org/officeDocument/2006/relationships" xmlns:p="http://schemas.openxmlformats.org/presentationml/2006/main">
-  <p:cSld>
-    <p:spTree>
-      <p:nvGrpSpPr>
-        <p:cNvPr id="1" name=""/>
-        <p:cNvGrpSpPr/>
-        <p:nvPr/>
-      </p:nvGrpSpPr>
-      <p:grpSpPr>
-        <a:xfrm>
-          <a:off x="0" y="0"/>
-          <a:ext cx="0" cy="0"/>
-          <a:chOff x="0" y="0"/>
-          <a:chExt cx="0" cy="0"/>
-        </a:xfrm>
-      </p:grpSpPr>
-      <p:sp>
-        <p:nvSpPr>
           <p:cNvPr id="5" name="Content Placeholder 4">
             <a:extLst>
               <a:ext uri="{FF2B5EF4-FFF2-40B4-BE49-F238E27FC236}">
@@ -14086,7 +12000,7 @@
 </p:sld>
 </file>
 
-<file path=ppt/slides/slide38.xml><?xml version="1.0" encoding="utf-8"?>
+<file path=ppt/slides/slide31.xml><?xml version="1.0" encoding="utf-8"?>
 <p:sld xmlns:a="http://schemas.openxmlformats.org/drawingml/2006/main" xmlns:r="http://schemas.openxmlformats.org/officeDocument/2006/relationships" xmlns:p="http://schemas.openxmlformats.org/presentationml/2006/main">
   <p:cSld>
     <p:spTree>
@@ -14346,7 +12260,7 @@
 </p:sld>
 </file>
 
-<file path=ppt/slides/slide39.xml><?xml version="1.0" encoding="utf-8"?>
+<file path=ppt/slides/slide32.xml><?xml version="1.0" encoding="utf-8"?>
 <p:sld xmlns:a="http://schemas.openxmlformats.org/drawingml/2006/main" xmlns:r="http://schemas.openxmlformats.org/officeDocument/2006/relationships" xmlns:p="http://schemas.openxmlformats.org/presentationml/2006/main">
   <p:cSld>
     <p:spTree>
@@ -14672,6 +12586,113 @@
 </p:sld>
 </file>
 
+<file path=ppt/slides/slide33.xml><?xml version="1.0" encoding="utf-8"?>
+<p:sld xmlns:a="http://schemas.openxmlformats.org/drawingml/2006/main" xmlns:r="http://schemas.openxmlformats.org/officeDocument/2006/relationships" xmlns:p="http://schemas.openxmlformats.org/presentationml/2006/main" show="0">
+  <p:cSld>
+    <p:spTree>
+      <p:nvGrpSpPr>
+        <p:cNvPr id="1" name=""/>
+        <p:cNvGrpSpPr/>
+        <p:nvPr/>
+      </p:nvGrpSpPr>
+      <p:grpSpPr>
+        <a:xfrm>
+          <a:off x="0" y="0"/>
+          <a:ext cx="0" cy="0"/>
+          <a:chOff x="0" y="0"/>
+          <a:chExt cx="0" cy="0"/>
+        </a:xfrm>
+      </p:grpSpPr>
+      <p:sp>
+        <p:nvSpPr>
+          <p:cNvPr id="7" name="Text Placeholder 6">
+            <a:extLst>
+              <a:ext uri="{FF2B5EF4-FFF2-40B4-BE49-F238E27FC236}">
+                <a16:creationId xmlns:a16="http://schemas.microsoft.com/office/drawing/2014/main" id="{29F27A30-74F1-B68F-DB4C-1E52B13E6B0A}"/>
+              </a:ext>
+            </a:extLst>
+          </p:cNvPr>
+          <p:cNvSpPr>
+            <a:spLocks noGrp="1"/>
+          </p:cNvSpPr>
+          <p:nvPr>
+            <p:ph type="body" sz="quarter" idx="10"/>
+          </p:nvPr>
+        </p:nvSpPr>
+        <p:spPr/>
+        <p:txBody>
+          <a:bodyPr>
+            <a:normAutofit/>
+          </a:bodyPr>
+          <a:lstStyle/>
+          <a:p>
+            <a:r>
+              <a:rPr lang="en-GB" sz="2800" noProof="0" dirty="0">
+                <a:solidFill>
+                  <a:srgbClr val="C00000"/>
+                </a:solidFill>
+                <a:hlinkClick r:id="rId2">
+                  <a:extLst>
+                    <a:ext uri="{A12FA001-AC4F-418D-AE19-62706E023703}">
+                      <ahyp:hlinkClr xmlns:ahyp="http://schemas.microsoft.com/office/drawing/2018/hyperlinkcolor" val="tx"/>
+                    </a:ext>
+                  </a:extLst>
+                </a:hlinkClick>
+              </a:rPr>
+              <a:t>https://www.nicholawilkin.com/terms</a:t>
+            </a:r>
+            <a:r>
+              <a:rPr lang="en-GB" sz="2800" noProof="0" dirty="0">
+                <a:solidFill>
+                  <a:srgbClr val="C00000"/>
+                </a:solidFill>
+              </a:rPr>
+              <a:t> </a:t>
+            </a:r>
+          </a:p>
+        </p:txBody>
+      </p:sp>
+      <p:sp>
+        <p:nvSpPr>
+          <p:cNvPr id="8" name="Title 7">
+            <a:extLst>
+              <a:ext uri="{FF2B5EF4-FFF2-40B4-BE49-F238E27FC236}">
+                <a16:creationId xmlns:a16="http://schemas.microsoft.com/office/drawing/2014/main" id="{AD801862-38A1-2E92-3A46-84D475AF4FD0}"/>
+              </a:ext>
+            </a:extLst>
+          </p:cNvPr>
+          <p:cNvSpPr>
+            <a:spLocks noGrp="1"/>
+          </p:cNvSpPr>
+          <p:nvPr>
+            <p:ph type="title"/>
+          </p:nvPr>
+        </p:nvSpPr>
+        <p:spPr/>
+        <p:txBody>
+          <a:bodyPr/>
+          <a:lstStyle/>
+          <a:p>
+            <a:r>
+              <a:rPr lang="en-GB" noProof="0" dirty="0"/>
+              <a:t>© 2025 Nichola Wilkin Ltd</a:t>
+            </a:r>
+          </a:p>
+        </p:txBody>
+      </p:sp>
+    </p:spTree>
+    <p:extLst>
+      <p:ext uri="{BB962C8B-B14F-4D97-AF65-F5344CB8AC3E}">
+        <p14:creationId xmlns:p14="http://schemas.microsoft.com/office/powerpoint/2010/main" val="549628395"/>
+      </p:ext>
+    </p:extLst>
+  </p:cSld>
+  <p:clrMapOvr>
+    <a:masterClrMapping/>
+  </p:clrMapOvr>
+</p:sld>
+</file>
+
 <file path=ppt/slides/slide4.xml><?xml version="1.0" encoding="utf-8"?>
 <p:sld xmlns:a="http://schemas.openxmlformats.org/drawingml/2006/main" xmlns:r="http://schemas.openxmlformats.org/officeDocument/2006/relationships" xmlns:p="http://schemas.openxmlformats.org/presentationml/2006/main">
   <p:cSld>
@@ -14958,113 +12979,6 @@
 </p:sld>
 </file>
 
-<file path=ppt/slides/slide40.xml><?xml version="1.0" encoding="utf-8"?>
-<p:sld xmlns:a="http://schemas.openxmlformats.org/drawingml/2006/main" xmlns:r="http://schemas.openxmlformats.org/officeDocument/2006/relationships" xmlns:p="http://schemas.openxmlformats.org/presentationml/2006/main" show="0">
-  <p:cSld>
-    <p:spTree>
-      <p:nvGrpSpPr>
-        <p:cNvPr id="1" name=""/>
-        <p:cNvGrpSpPr/>
-        <p:nvPr/>
-      </p:nvGrpSpPr>
-      <p:grpSpPr>
-        <a:xfrm>
-          <a:off x="0" y="0"/>
-          <a:ext cx="0" cy="0"/>
-          <a:chOff x="0" y="0"/>
-          <a:chExt cx="0" cy="0"/>
-        </a:xfrm>
-      </p:grpSpPr>
-      <p:sp>
-        <p:nvSpPr>
-          <p:cNvPr id="7" name="Text Placeholder 6">
-            <a:extLst>
-              <a:ext uri="{FF2B5EF4-FFF2-40B4-BE49-F238E27FC236}">
-                <a16:creationId xmlns:a16="http://schemas.microsoft.com/office/drawing/2014/main" id="{29F27A30-74F1-B68F-DB4C-1E52B13E6B0A}"/>
-              </a:ext>
-            </a:extLst>
-          </p:cNvPr>
-          <p:cNvSpPr>
-            <a:spLocks noGrp="1"/>
-          </p:cNvSpPr>
-          <p:nvPr>
-            <p:ph type="body" sz="quarter" idx="10"/>
-          </p:nvPr>
-        </p:nvSpPr>
-        <p:spPr/>
-        <p:txBody>
-          <a:bodyPr>
-            <a:normAutofit/>
-          </a:bodyPr>
-          <a:lstStyle/>
-          <a:p>
-            <a:r>
-              <a:rPr lang="en-GB" sz="2800" noProof="0" dirty="0">
-                <a:solidFill>
-                  <a:srgbClr val="C00000"/>
-                </a:solidFill>
-                <a:hlinkClick r:id="rId2">
-                  <a:extLst>
-                    <a:ext uri="{A12FA001-AC4F-418D-AE19-62706E023703}">
-                      <ahyp:hlinkClr xmlns:ahyp="http://schemas.microsoft.com/office/drawing/2018/hyperlinkcolor" val="tx"/>
-                    </a:ext>
-                  </a:extLst>
-                </a:hlinkClick>
-              </a:rPr>
-              <a:t>https://www.nicholawilkin.com/terms</a:t>
-            </a:r>
-            <a:r>
-              <a:rPr lang="en-GB" sz="2800" noProof="0" dirty="0">
-                <a:solidFill>
-                  <a:srgbClr val="C00000"/>
-                </a:solidFill>
-              </a:rPr>
-              <a:t> </a:t>
-            </a:r>
-          </a:p>
-        </p:txBody>
-      </p:sp>
-      <p:sp>
-        <p:nvSpPr>
-          <p:cNvPr id="8" name="Title 7">
-            <a:extLst>
-              <a:ext uri="{FF2B5EF4-FFF2-40B4-BE49-F238E27FC236}">
-                <a16:creationId xmlns:a16="http://schemas.microsoft.com/office/drawing/2014/main" id="{AD801862-38A1-2E92-3A46-84D475AF4FD0}"/>
-              </a:ext>
-            </a:extLst>
-          </p:cNvPr>
-          <p:cNvSpPr>
-            <a:spLocks noGrp="1"/>
-          </p:cNvSpPr>
-          <p:nvPr>
-            <p:ph type="title"/>
-          </p:nvPr>
-        </p:nvSpPr>
-        <p:spPr/>
-        <p:txBody>
-          <a:bodyPr/>
-          <a:lstStyle/>
-          <a:p>
-            <a:r>
-              <a:rPr lang="en-GB" noProof="0" dirty="0"/>
-              <a:t>© 2025 Nichola Wilkin Ltd</a:t>
-            </a:r>
-          </a:p>
-        </p:txBody>
-      </p:sp>
-    </p:spTree>
-    <p:extLst>
-      <p:ext uri="{BB962C8B-B14F-4D97-AF65-F5344CB8AC3E}">
-        <p14:creationId xmlns:p14="http://schemas.microsoft.com/office/powerpoint/2010/main" val="549628395"/>
-      </p:ext>
-    </p:extLst>
-  </p:cSld>
-  <p:clrMapOvr>
-    <a:masterClrMapping/>
-  </p:clrMapOvr>
-</p:sld>
-</file>
-
 <file path=ppt/slides/slide5.xml><?xml version="1.0" encoding="utf-8"?>
 <p:sld xmlns:a="http://schemas.openxmlformats.org/drawingml/2006/main" xmlns:r="http://schemas.openxmlformats.org/officeDocument/2006/relationships" xmlns:p="http://schemas.openxmlformats.org/presentationml/2006/main">
   <p:cSld>
@@ -15331,164 +13245,6 @@
   <p:cSld>
     <p:spTree>
       <p:nvGrpSpPr>
-        <p:cNvPr id="1" name=""/>
-        <p:cNvGrpSpPr/>
-        <p:nvPr/>
-      </p:nvGrpSpPr>
-      <p:grpSpPr>
-        <a:xfrm>
-          <a:off x="0" y="0"/>
-          <a:ext cx="0" cy="0"/>
-          <a:chOff x="0" y="0"/>
-          <a:chExt cx="0" cy="0"/>
-        </a:xfrm>
-      </p:grpSpPr>
-      <p:sp>
-        <p:nvSpPr>
-          <p:cNvPr id="3" name="Content Placeholder 2">
-            <a:extLst>
-              <a:ext uri="{FF2B5EF4-FFF2-40B4-BE49-F238E27FC236}">
-                <a16:creationId xmlns:a16="http://schemas.microsoft.com/office/drawing/2014/main" id="{37C15442-47A6-8269-B2FC-CDAB290F753D}"/>
-              </a:ext>
-            </a:extLst>
-          </p:cNvPr>
-          <p:cNvSpPr>
-            <a:spLocks noGrp="1"/>
-          </p:cNvSpPr>
-          <p:nvPr>
-            <p:ph idx="1"/>
-          </p:nvPr>
-        </p:nvSpPr>
-        <p:spPr/>
-        <p:txBody>
-          <a:bodyPr>
-            <a:normAutofit fontScale="92500" lnSpcReduction="20000"/>
-          </a:bodyPr>
-          <a:lstStyle/>
-          <a:p>
-            <a:pPr>
-              <a:spcAft>
-                <a:spcPts val="600"/>
-              </a:spcAft>
-            </a:pPr>
-            <a:r>
-              <a:rPr lang="en-GB" noProof="0" dirty="0"/>
-              <a:t>Work in pairs. Each pair will get a worksheet with twelve cards showing different online activities. Carefully cut out each card.</a:t>
-            </a:r>
-          </a:p>
-          <a:p>
-            <a:pPr>
-              <a:spcAft>
-                <a:spcPts val="600"/>
-              </a:spcAft>
-            </a:pPr>
-            <a:r>
-              <a:rPr lang="en-GB" noProof="0" dirty="0"/>
-              <a:t>Sort the cards into two groups:</a:t>
-            </a:r>
-          </a:p>
-          <a:p>
-            <a:pPr marL="893763" indent="-441325">
-              <a:spcAft>
-                <a:spcPts val="600"/>
-              </a:spcAft>
-              <a:buFont typeface="Arial" panose="020B0604020202020204" pitchFamily="34" charset="0"/>
-              <a:buChar char="•"/>
-            </a:pPr>
-            <a:r>
-              <a:rPr lang="en-GB" noProof="0" dirty="0"/>
-              <a:t>Normal online activities</a:t>
-            </a:r>
-          </a:p>
-          <a:p>
-            <a:pPr marL="893763" indent="-441325">
-              <a:spcAft>
-                <a:spcPts val="600"/>
-              </a:spcAft>
-              <a:buFont typeface="Arial" panose="020B0604020202020204" pitchFamily="34" charset="0"/>
-              <a:buChar char="•"/>
-            </a:pPr>
-            <a:r>
-              <a:rPr lang="en-GB" noProof="0" dirty="0"/>
-              <a:t>Risky online activities</a:t>
-            </a:r>
-          </a:p>
-          <a:p>
-            <a:pPr>
-              <a:spcAft>
-                <a:spcPts val="600"/>
-              </a:spcAft>
-            </a:pPr>
-            <a:r>
-              <a:rPr lang="en-GB" noProof="0" dirty="0"/>
-              <a:t>Discuss your choices together. For each card, talk about why you think it is normal or risky.</a:t>
-            </a:r>
-          </a:p>
-          <a:p>
-            <a:pPr>
-              <a:spcAft>
-                <a:spcPts val="600"/>
-              </a:spcAft>
-            </a:pPr>
-            <a:r>
-              <a:rPr lang="en-GB" noProof="0" dirty="0"/>
-              <a:t>Be ready to share your ideas with the class and explain your reasons.</a:t>
-            </a:r>
-          </a:p>
-        </p:txBody>
-      </p:sp>
-      <p:sp>
-        <p:nvSpPr>
-          <p:cNvPr id="2" name="Title 1">
-            <a:extLst>
-              <a:ext uri="{FF2B5EF4-FFF2-40B4-BE49-F238E27FC236}">
-                <a16:creationId xmlns:a16="http://schemas.microsoft.com/office/drawing/2014/main" id="{93F4EDDF-DA3A-23EB-AF41-ED5529DB04E8}"/>
-              </a:ext>
-            </a:extLst>
-          </p:cNvPr>
-          <p:cNvSpPr>
-            <a:spLocks noGrp="1"/>
-          </p:cNvSpPr>
-          <p:nvPr>
-            <p:ph type="title"/>
-          </p:nvPr>
-        </p:nvSpPr>
-        <p:spPr/>
-        <p:txBody>
-          <a:bodyPr/>
-          <a:lstStyle/>
-          <a:p>
-            <a:pPr marL="85725">
-              <a:buClr>
-                <a:srgbClr val="C00000"/>
-              </a:buClr>
-              <a:buSzPct val="107000"/>
-            </a:pPr>
-            <a:r>
-              <a:rPr lang="en-GB" sz="4800" noProof="0" dirty="0"/>
-              <a:t>The dark web</a:t>
-            </a:r>
-          </a:p>
-        </p:txBody>
-      </p:sp>
-    </p:spTree>
-    <p:extLst>
-      <p:ext uri="{BB962C8B-B14F-4D97-AF65-F5344CB8AC3E}">
-        <p14:creationId xmlns:p14="http://schemas.microsoft.com/office/powerpoint/2010/main" val="2892186640"/>
-      </p:ext>
-    </p:extLst>
-  </p:cSld>
-  <p:clrMapOvr>
-    <a:masterClrMapping/>
-  </p:clrMapOvr>
-</p:sld>
-</file>
-
-<file path=ppt/slides/slide7.xml><?xml version="1.0" encoding="utf-8"?>
-<p:sld xmlns:a="http://schemas.openxmlformats.org/drawingml/2006/main" xmlns:r="http://schemas.openxmlformats.org/officeDocument/2006/relationships" xmlns:p="http://schemas.openxmlformats.org/presentationml/2006/main">
-  <p:cSld>
-    <p:spTree>
-      <p:nvGrpSpPr>
         <p:cNvPr id="1" name="">
           <a:extLst>
             <a:ext uri="{FF2B5EF4-FFF2-40B4-BE49-F238E27FC236}">
@@ -15876,16 +13632,13 @@
             </a:pPr>
             <a:r>
               <a:rPr lang="en-GB" sz="4800" noProof="0" dirty="0"/>
-              <a:t>The dark web </a:t>
-            </a:r>
-            <a:r>
-              <a:rPr lang="en-GB" sz="4800" noProof="0" dirty="0">
-                <a:solidFill>
-                  <a:srgbClr val="C00000"/>
-                </a:solidFill>
-              </a:rPr>
-              <a:t>ANSWERS</a:t>
-            </a:r>
+              <a:t>The dark web</a:t>
+            </a:r>
+            <a:endParaRPr lang="en-GB" sz="4800" noProof="0" dirty="0">
+              <a:solidFill>
+                <a:srgbClr val="C00000"/>
+              </a:solidFill>
+            </a:endParaRPr>
           </a:p>
         </p:txBody>
       </p:sp>
@@ -16556,7 +14309,7 @@
 </p:sld>
 </file>
 
-<file path=ppt/slides/slide8.xml><?xml version="1.0" encoding="utf-8"?>
+<file path=ppt/slides/slide7.xml><?xml version="1.0" encoding="utf-8"?>
 <p:sld xmlns:a="http://schemas.openxmlformats.org/drawingml/2006/main" xmlns:r="http://schemas.openxmlformats.org/officeDocument/2006/relationships" xmlns:p="http://schemas.openxmlformats.org/presentationml/2006/main">
   <p:cSld>
     <p:spTree>
@@ -16891,7 +14644,7 @@
 </p:sld>
 </file>
 
-<file path=ppt/slides/slide9.xml><?xml version="1.0" encoding="utf-8"?>
+<file path=ppt/slides/slide8.xml><?xml version="1.0" encoding="utf-8"?>
 <p:sld xmlns:a="http://schemas.openxmlformats.org/drawingml/2006/main" xmlns:r="http://schemas.openxmlformats.org/officeDocument/2006/relationships" xmlns:p="http://schemas.openxmlformats.org/presentationml/2006/main">
   <p:cSld>
     <p:spTree>
@@ -17146,6 +14899,381 @@
                                           <p:spTgt spid="3">
                                             <p:txEl>
                                               <p:pRg st="3" end="3"/>
+                                            </p:txEl>
+                                          </p:spTgt>
+                                        </p:tgtEl>
+                                        <p:attrNameLst>
+                                          <p:attrName>style.visibility</p:attrName>
+                                        </p:attrNameLst>
+                                      </p:cBhvr>
+                                      <p:to>
+                                        <p:strVal val="visible"/>
+                                      </p:to>
+                                    </p:set>
+                                  </p:childTnLst>
+                                </p:cTn>
+                              </p:par>
+                            </p:childTnLst>
+                          </p:cTn>
+                        </p:par>
+                      </p:childTnLst>
+                    </p:cTn>
+                  </p:par>
+                </p:childTnLst>
+              </p:cTn>
+              <p:prevCondLst>
+                <p:cond evt="onPrev" delay="0">
+                  <p:tgtEl>
+                    <p:sldTgt/>
+                  </p:tgtEl>
+                </p:cond>
+              </p:prevCondLst>
+              <p:nextCondLst>
+                <p:cond evt="onNext" delay="0">
+                  <p:tgtEl>
+                    <p:sldTgt/>
+                  </p:tgtEl>
+                </p:cond>
+              </p:nextCondLst>
+            </p:seq>
+          </p:childTnLst>
+        </p:cTn>
+      </p:par>
+    </p:tnLst>
+    <p:bldLst>
+      <p:bldP spid="3" grpId="0" uiExpand="1" build="p"/>
+    </p:bldLst>
+  </p:timing>
+</p:sld>
+</file>
+
+<file path=ppt/slides/slide9.xml><?xml version="1.0" encoding="utf-8"?>
+<p:sld xmlns:a="http://schemas.openxmlformats.org/drawingml/2006/main" xmlns:r="http://schemas.openxmlformats.org/officeDocument/2006/relationships" xmlns:p="http://schemas.openxmlformats.org/presentationml/2006/main">
+  <p:cSld>
+    <p:spTree>
+      <p:nvGrpSpPr>
+        <p:cNvPr id="1" name="">
+          <a:extLst>
+            <a:ext uri="{FF2B5EF4-FFF2-40B4-BE49-F238E27FC236}">
+              <a16:creationId xmlns:a16="http://schemas.microsoft.com/office/drawing/2014/main" id="{A89F7598-BA49-B8CD-5418-3A01EEE89FC5}"/>
+            </a:ext>
+          </a:extLst>
+        </p:cNvPr>
+        <p:cNvGrpSpPr/>
+        <p:nvPr/>
+      </p:nvGrpSpPr>
+      <p:grpSpPr>
+        <a:xfrm>
+          <a:off x="0" y="0"/>
+          <a:ext cx="0" cy="0"/>
+          <a:chOff x="0" y="0"/>
+          <a:chExt cx="0" cy="0"/>
+        </a:xfrm>
+      </p:grpSpPr>
+      <p:sp>
+        <p:nvSpPr>
+          <p:cNvPr id="2" name="Title 1">
+            <a:extLst>
+              <a:ext uri="{FF2B5EF4-FFF2-40B4-BE49-F238E27FC236}">
+                <a16:creationId xmlns:a16="http://schemas.microsoft.com/office/drawing/2014/main" id="{3FBD3C5C-A0A2-5D40-E936-FCF188996CDA}"/>
+              </a:ext>
+            </a:extLst>
+          </p:cNvPr>
+          <p:cNvSpPr>
+            <a:spLocks noGrp="1"/>
+          </p:cNvSpPr>
+          <p:nvPr>
+            <p:ph type="title"/>
+          </p:nvPr>
+        </p:nvSpPr>
+        <p:spPr/>
+        <p:txBody>
+          <a:bodyPr/>
+          <a:lstStyle/>
+          <a:p>
+            <a:r>
+              <a:rPr lang="en-GB" noProof="0" dirty="0"/>
+              <a:t>The dark web</a:t>
+            </a:r>
+          </a:p>
+        </p:txBody>
+      </p:sp>
+      <p:sp>
+        <p:nvSpPr>
+          <p:cNvPr id="3" name="Content Placeholder 2">
+            <a:extLst>
+              <a:ext uri="{FF2B5EF4-FFF2-40B4-BE49-F238E27FC236}">
+                <a16:creationId xmlns:a16="http://schemas.microsoft.com/office/drawing/2014/main" id="{65FEB216-EF07-CF32-126F-99CBCB549EAD}"/>
+              </a:ext>
+            </a:extLst>
+          </p:cNvPr>
+          <p:cNvSpPr>
+            <a:spLocks noGrp="1"/>
+          </p:cNvSpPr>
+          <p:nvPr>
+            <p:ph idx="1"/>
+          </p:nvPr>
+        </p:nvSpPr>
+        <p:spPr/>
+        <p:txBody>
+          <a:bodyPr>
+            <a:normAutofit fontScale="92500"/>
+          </a:bodyPr>
+          <a:lstStyle/>
+          <a:p>
+            <a:r>
+              <a:rPr lang="en-GB" noProof="0" dirty="0"/>
+              <a:t>The </a:t>
+            </a:r>
+            <a:r>
+              <a:rPr lang="en-GB" b="1" noProof="0" dirty="0"/>
+              <a:t>deep web </a:t>
+            </a:r>
+            <a:r>
+              <a:rPr lang="en-GB" noProof="0" dirty="0"/>
+              <a:t>is</a:t>
+            </a:r>
+            <a:r>
+              <a:rPr lang="en-GB" b="1" noProof="0" dirty="0"/>
+              <a:t> </a:t>
+            </a:r>
+            <a:r>
+              <a:rPr lang="en-GB" noProof="0" dirty="0"/>
+              <a:t>made up of pages that are not indexed by search engines.</a:t>
+            </a:r>
+          </a:p>
+          <a:p>
+            <a:pPr marL="893763" indent="-441325">
+              <a:buFont typeface="Arial" panose="020B0604020202020204" pitchFamily="34" charset="0"/>
+              <a:buChar char="•"/>
+            </a:pPr>
+            <a:r>
+              <a:rPr lang="en-GB" noProof="0" dirty="0"/>
+              <a:t>The school’s homework portal</a:t>
+            </a:r>
+          </a:p>
+          <a:p>
+            <a:pPr marL="893763" indent="-441325">
+              <a:buFont typeface="Arial" panose="020B0604020202020204" pitchFamily="34" charset="0"/>
+              <a:buChar char="•"/>
+            </a:pPr>
+            <a:r>
+              <a:rPr lang="en-GB" noProof="0" dirty="0"/>
+              <a:t>Emails systems </a:t>
+            </a:r>
+          </a:p>
+          <a:p>
+            <a:pPr marL="893763" indent="-441325">
+              <a:buFont typeface="Arial" panose="020B0604020202020204" pitchFamily="34" charset="0"/>
+              <a:buChar char="•"/>
+            </a:pPr>
+            <a:r>
+              <a:rPr lang="en-GB" noProof="0" dirty="0"/>
+              <a:t>Online banking</a:t>
+            </a:r>
+          </a:p>
+          <a:p>
+            <a:r>
+              <a:rPr lang="en-GB" noProof="0" dirty="0"/>
+              <a:t>You need a password or special link to access these, but they are legal and used for privacy.</a:t>
+            </a:r>
+          </a:p>
+        </p:txBody>
+      </p:sp>
+    </p:spTree>
+    <p:extLst>
+      <p:ext uri="{BB962C8B-B14F-4D97-AF65-F5344CB8AC3E}">
+        <p14:creationId xmlns:p14="http://schemas.microsoft.com/office/powerpoint/2010/main" val="3619890700"/>
+      </p:ext>
+    </p:extLst>
+  </p:cSld>
+  <p:clrMapOvr>
+    <a:masterClrMapping/>
+  </p:clrMapOvr>
+  <p:timing>
+    <p:tnLst>
+      <p:par>
+        <p:cTn id="1" dur="indefinite" restart="never" nodeType="tmRoot">
+          <p:childTnLst>
+            <p:seq concurrent="1" nextAc="seek">
+              <p:cTn id="2" dur="indefinite" nodeType="mainSeq">
+                <p:childTnLst>
+                  <p:par>
+                    <p:cTn id="3" fill="hold">
+                      <p:stCondLst>
+                        <p:cond delay="indefinite"/>
+                      </p:stCondLst>
+                      <p:childTnLst>
+                        <p:par>
+                          <p:cTn id="4" fill="hold">
+                            <p:stCondLst>
+                              <p:cond delay="0"/>
+                            </p:stCondLst>
+                            <p:childTnLst>
+                              <p:par>
+                                <p:cTn id="5" presetID="1" presetClass="entr" presetSubtype="0" fill="hold" grpId="0" nodeType="clickEffect">
+                                  <p:stCondLst>
+                                    <p:cond delay="0"/>
+                                  </p:stCondLst>
+                                  <p:childTnLst>
+                                    <p:set>
+                                      <p:cBhvr>
+                                        <p:cTn id="6" dur="1" fill="hold">
+                                          <p:stCondLst>
+                                            <p:cond delay="0"/>
+                                          </p:stCondLst>
+                                        </p:cTn>
+                                        <p:tgtEl>
+                                          <p:spTgt spid="3">
+                                            <p:txEl>
+                                              <p:pRg st="1" end="1"/>
+                                            </p:txEl>
+                                          </p:spTgt>
+                                        </p:tgtEl>
+                                        <p:attrNameLst>
+                                          <p:attrName>style.visibility</p:attrName>
+                                        </p:attrNameLst>
+                                      </p:cBhvr>
+                                      <p:to>
+                                        <p:strVal val="visible"/>
+                                      </p:to>
+                                    </p:set>
+                                  </p:childTnLst>
+                                </p:cTn>
+                              </p:par>
+                            </p:childTnLst>
+                          </p:cTn>
+                        </p:par>
+                      </p:childTnLst>
+                    </p:cTn>
+                  </p:par>
+                  <p:par>
+                    <p:cTn id="7" fill="hold">
+                      <p:stCondLst>
+                        <p:cond delay="indefinite"/>
+                      </p:stCondLst>
+                      <p:childTnLst>
+                        <p:par>
+                          <p:cTn id="8" fill="hold">
+                            <p:stCondLst>
+                              <p:cond delay="0"/>
+                            </p:stCondLst>
+                            <p:childTnLst>
+                              <p:par>
+                                <p:cTn id="9" presetID="1" presetClass="entr" presetSubtype="0" fill="hold" grpId="0" nodeType="clickEffect">
+                                  <p:stCondLst>
+                                    <p:cond delay="0"/>
+                                  </p:stCondLst>
+                                  <p:childTnLst>
+                                    <p:set>
+                                      <p:cBhvr>
+                                        <p:cTn id="10" dur="1" fill="hold">
+                                          <p:stCondLst>
+                                            <p:cond delay="0"/>
+                                          </p:stCondLst>
+                                        </p:cTn>
+                                        <p:tgtEl>
+                                          <p:spTgt spid="3">
+                                            <p:txEl>
+                                              <p:pRg st="2" end="2"/>
+                                            </p:txEl>
+                                          </p:spTgt>
+                                        </p:tgtEl>
+                                        <p:attrNameLst>
+                                          <p:attrName>style.visibility</p:attrName>
+                                        </p:attrNameLst>
+                                      </p:cBhvr>
+                                      <p:to>
+                                        <p:strVal val="visible"/>
+                                      </p:to>
+                                    </p:set>
+                                  </p:childTnLst>
+                                </p:cTn>
+                              </p:par>
+                            </p:childTnLst>
+                          </p:cTn>
+                        </p:par>
+                      </p:childTnLst>
+                    </p:cTn>
+                  </p:par>
+                  <p:par>
+                    <p:cTn id="11" fill="hold">
+                      <p:stCondLst>
+                        <p:cond delay="indefinite"/>
+                      </p:stCondLst>
+                      <p:childTnLst>
+                        <p:par>
+                          <p:cTn id="12" fill="hold">
+                            <p:stCondLst>
+                              <p:cond delay="0"/>
+                            </p:stCondLst>
+                            <p:childTnLst>
+                              <p:par>
+                                <p:cTn id="13" presetID="1" presetClass="entr" presetSubtype="0" fill="hold" grpId="0" nodeType="clickEffect">
+                                  <p:stCondLst>
+                                    <p:cond delay="0"/>
+                                  </p:stCondLst>
+                                  <p:childTnLst>
+                                    <p:set>
+                                      <p:cBhvr>
+                                        <p:cTn id="14" dur="1" fill="hold">
+                                          <p:stCondLst>
+                                            <p:cond delay="0"/>
+                                          </p:stCondLst>
+                                        </p:cTn>
+                                        <p:tgtEl>
+                                          <p:spTgt spid="3">
+                                            <p:txEl>
+                                              <p:pRg st="3" end="3"/>
+                                            </p:txEl>
+                                          </p:spTgt>
+                                        </p:tgtEl>
+                                        <p:attrNameLst>
+                                          <p:attrName>style.visibility</p:attrName>
+                                        </p:attrNameLst>
+                                      </p:cBhvr>
+                                      <p:to>
+                                        <p:strVal val="visible"/>
+                                      </p:to>
+                                    </p:set>
+                                  </p:childTnLst>
+                                </p:cTn>
+                              </p:par>
+                            </p:childTnLst>
+                          </p:cTn>
+                        </p:par>
+                      </p:childTnLst>
+                    </p:cTn>
+                  </p:par>
+                  <p:par>
+                    <p:cTn id="15" fill="hold">
+                      <p:stCondLst>
+                        <p:cond delay="indefinite"/>
+                      </p:stCondLst>
+                      <p:childTnLst>
+                        <p:par>
+                          <p:cTn id="16" fill="hold">
+                            <p:stCondLst>
+                              <p:cond delay="0"/>
+                            </p:stCondLst>
+                            <p:childTnLst>
+                              <p:par>
+                                <p:cTn id="17" presetID="1" presetClass="entr" presetSubtype="0" fill="hold" grpId="0" nodeType="clickEffect">
+                                  <p:stCondLst>
+                                    <p:cond delay="0"/>
+                                  </p:stCondLst>
+                                  <p:childTnLst>
+                                    <p:set>
+                                      <p:cBhvr>
+                                        <p:cTn id="18" dur="1" fill="hold">
+                                          <p:stCondLst>
+                                            <p:cond delay="0"/>
+                                          </p:stCondLst>
+                                        </p:cTn>
+                                        <p:tgtEl>
+                                          <p:spTgt spid="3">
+                                            <p:txEl>
+                                              <p:pRg st="4" end="4"/>
                                             </p:txEl>
                                           </p:spTgt>
                                         </p:tgtEl>
